--- a/Python_ Power of the Script.pptx
+++ b/Python_ Power of the Script.pptx
@@ -40,6 +40,7 @@
     <p:sldId id="288" r:id="rId35"/>
     <p:sldId id="289" r:id="rId36"/>
     <p:sldId id="290" r:id="rId37"/>
+    <p:sldId id="291" r:id="rId38"/>
   </p:sldIdLst>
   <p:sldSz cx="12192000" cy="6858000"/>
   <p:notesSz cx="7772400" cy="10058400"/>
@@ -97,7 +98,7 @@
         <p:txBody>
           <a:bodyPr/>
           <a:p>
-            <a:fld id="{4A9E7395-9ACE-4773-A309-D71C0FFB908C}" type="slidenum">
+            <a:fld id="{8FE6BAE2-89AD-44A9-9197-C920B3AB348B}" type="slidenum">
               <a:t>&lt;#&gt;</a:t>
             </a:fld>
           </a:p>
@@ -264,7 +265,7 @@
         <p:txBody>
           <a:bodyPr/>
           <a:p>
-            <a:fld id="{2F7F3344-8AA7-4E33-855C-264024244814}" type="slidenum">
+            <a:fld id="{2C052214-1B40-4706-8035-5D7B7D7E5423}" type="slidenum">
               <a:t>&lt;#&gt;</a:t>
             </a:fld>
           </a:p>
@@ -461,7 +462,7 @@
                 <a:tab pos="0" algn="l"/>
               </a:tabLst>
             </a:pPr>
-            <a:fld id="{D43ED234-8F95-4C76-9224-5A22A0419DD2}" type="slidenum">
+            <a:fld id="{AA213871-5AA6-4F76-990F-81FB6E23F6B5}" type="slidenum">
               <a:rPr lang="en-US" sz="1200" b="0" u="none" strike="noStrike">
                 <a:solidFill>
                   <a:srgbClr val="888888"/>
@@ -1174,7 +1175,55 @@
                 <a:latin typeface="Lato"/>
                 <a:ea typeface="Lato"/>
               </a:rPr>
-              <a:t>"Arise, Tarnished, and forge thy journey through code."</a:t>
+              <a:t>"Arise, </a:t>
+            </a:r>
+            <a:r>
+              <a:rPr lang="en-US" sz="1500" b="0" i="1" u="none" strike="noStrike">
+                <a:solidFill>
+                  <a:srgbClr val="666666"/>
+                </a:solidFill>
+                <a:effectLst/>
+                <a:uFillTx/>
+                <a:latin typeface="Lato"/>
+                <a:ea typeface="Lato"/>
+              </a:rPr>
+              <a:t>Tarnished, and </a:t>
+            </a:r>
+            <a:r>
+              <a:rPr lang="en-US" sz="1500" b="0" i="1" u="none" strike="noStrike">
+                <a:solidFill>
+                  <a:srgbClr val="666666"/>
+                </a:solidFill>
+                <a:effectLst/>
+                <a:uFillTx/>
+                <a:latin typeface="Lato"/>
+                <a:ea typeface="Lato"/>
+              </a:rPr>
+              <a:t>forge thy </a:t>
+            </a:r>
+            <a:r>
+              <a:rPr lang="en-US" sz="1500" b="0" i="1" u="none" strike="noStrike">
+                <a:solidFill>
+                  <a:srgbClr val="666666"/>
+                </a:solidFill>
+                <a:effectLst/>
+                <a:uFillTx/>
+                <a:latin typeface="Lato"/>
+                <a:ea typeface="Lato"/>
+              </a:rPr>
+              <a:t>journey </a:t>
+            </a:r>
+            <a:r>
+              <a:rPr lang="en-US" sz="1500" b="0" i="1" u="none" strike="noStrike">
+                <a:solidFill>
+                  <a:srgbClr val="666666"/>
+                </a:solidFill>
+                <a:effectLst/>
+                <a:uFillTx/>
+                <a:latin typeface="Lato"/>
+                <a:ea typeface="Lato"/>
+              </a:rPr>
+              <a:t>through code."</a:t>
             </a:r>
             <a:endParaRPr lang="en-US" sz="1500" b="0" u="none" strike="noStrike">
               <a:solidFill>
@@ -9805,88 +9854,16 @@
           <a:chExt cx="0" cy="0"/>
         </a:xfrm>
       </p:grpSpPr>
-      <p:pic>
-        <p:nvPicPr>
-          <p:cNvPr id="186" name="Google Shape;199;p 1"/>
-          <p:cNvPicPr/>
-          <p:nvPr/>
-        </p:nvPicPr>
-        <p:blipFill>
-          <a:blip r:embed="rId1"/>
-          <a:stretch/>
-        </p:blipFill>
-        <p:spPr>
-          <a:xfrm>
-            <a:off x="0" y="0"/>
-            <a:ext cx="12191760" cy="6857640"/>
-          </a:xfrm>
-          <a:prstGeom prst="rect">
-            <a:avLst/>
-          </a:prstGeom>
-          <a:noFill/>
-          <a:ln w="0">
-            <a:noFill/>
-          </a:ln>
-        </p:spPr>
-      </p:pic>
-      <p:pic>
-        <p:nvPicPr>
-          <p:cNvPr id="187" name="Google Shape;200;p 4"/>
-          <p:cNvPicPr/>
-          <p:nvPr/>
-        </p:nvPicPr>
-        <p:blipFill>
-          <a:blip r:embed="rId2"/>
-          <a:stretch/>
-        </p:blipFill>
+      <p:sp>
+        <p:nvSpPr>
+          <p:cNvPr id="186" name="Google Shape;103;p 28"/>
+          <p:cNvSpPr/>
+          <p:nvPr/>
+        </p:nvSpPr>
         <p:spPr>
           <a:xfrm>
             <a:off x="581040" y="1609560"/>
-            <a:ext cx="11074320" cy="4849920"/>
-          </a:xfrm>
-          <a:prstGeom prst="rect">
-            <a:avLst/>
-          </a:prstGeom>
-          <a:noFill/>
-          <a:ln w="0">
-            <a:noFill/>
-          </a:ln>
-        </p:spPr>
-      </p:pic>
-      <p:pic>
-        <p:nvPicPr>
-          <p:cNvPr id="188" name="Google Shape;204;p 2"/>
-          <p:cNvPicPr/>
-          <p:nvPr/>
-        </p:nvPicPr>
-        <p:blipFill>
-          <a:blip r:embed="rId3"/>
-          <a:stretch/>
-        </p:blipFill>
-        <p:spPr>
-          <a:xfrm>
-            <a:off x="5929560" y="1905120"/>
-            <a:ext cx="333000" cy="380520"/>
-          </a:xfrm>
-          <a:prstGeom prst="rect">
-            <a:avLst/>
-          </a:prstGeom>
-          <a:noFill/>
-          <a:ln w="0">
-            <a:noFill/>
-          </a:ln>
-        </p:spPr>
-      </p:pic>
-      <p:sp>
-        <p:nvSpPr>
-          <p:cNvPr id="189" name="Google Shape;205;p 2"/>
-          <p:cNvSpPr/>
-          <p:nvPr/>
-        </p:nvSpPr>
-        <p:spPr>
-          <a:xfrm>
-            <a:off x="3585960" y="2428920"/>
-            <a:ext cx="5020200" cy="366120"/>
+            <a:ext cx="5590440" cy="366120"/>
           </a:xfrm>
           <a:prstGeom prst="rect">
             <a:avLst/>
@@ -9907,7 +9884,7 @@
             <a:spAutoFit/>
           </a:bodyPr>
           <a:p>
-            <a:pPr algn="ctr">
+            <a:pPr>
               <a:lnSpc>
                 <a:spcPct val="100000"/>
               </a:lnSpc>
@@ -9925,7 +9902,7 @@
                 <a:latin typeface="Cinzel"/>
                 <a:ea typeface="Cinzel"/>
               </a:rPr>
-              <a:t>Nesting If Statements</a:t>
+              <a:t>Code</a:t>
             </a:r>
             <a:endParaRPr lang="en-US" sz="2400" b="0" u="none" strike="noStrike">
               <a:solidFill>
@@ -9940,14 +9917,14 @@
       </p:sp>
       <p:sp>
         <p:nvSpPr>
-          <p:cNvPr id="190" name="Google Shape;218;p 2"/>
+          <p:cNvPr id="187" name="Google Shape;104;p 27"/>
           <p:cNvSpPr/>
           <p:nvPr/>
         </p:nvSpPr>
         <p:spPr>
           <a:xfrm>
-            <a:off x="581040" y="581040"/>
-            <a:ext cx="11581200" cy="480240"/>
+            <a:off x="581040" y="2162160"/>
+            <a:ext cx="9879120" cy="1370520"/>
           </a:xfrm>
           <a:prstGeom prst="rect">
             <a:avLst/>
@@ -9968,54 +9945,179 @@
             <a:spAutoFit/>
           </a:bodyPr>
           <a:p>
-            <a:pPr>
-              <a:lnSpc>
-                <a:spcPct val="100000"/>
-              </a:lnSpc>
-              <a:tabLst>
-                <a:tab pos="0" algn="l"/>
-              </a:tabLst>
-            </a:pPr>
-            <a:r>
-              <a:rPr lang="en-US" sz="3150" b="1" u="none" strike="noStrike">
-                <a:solidFill>
-                  <a:srgbClr val="C5A059"/>
-                </a:solidFill>
-                <a:effectLst/>
-                <a:uFillTx/>
-                <a:latin typeface="Cinzel"/>
-                <a:ea typeface="Cinzel"/>
-              </a:rPr>
-              <a:t>THE HIDDEN RUNES: Nested If Statements</a:t>
-            </a:r>
-            <a:endParaRPr lang="en-US" sz="3150" b="0" u="none" strike="noStrike">
-              <a:solidFill>
-                <a:srgbClr val="FFFFFF"/>
-              </a:solidFill>
-              <a:effectLst/>
-              <a:uFillTx/>
-              <a:latin typeface="Arial"/>
-            </a:endParaRPr>
-          </a:p>
-        </p:txBody>
-      </p:sp>
-      <p:sp>
-        <p:nvSpPr>
-          <p:cNvPr id="191" name="Google Shape;219;p 2"/>
+            <a:pPr marL="216000" indent="-216000">
+              <a:lnSpc>
+                <a:spcPct val="150000"/>
+              </a:lnSpc>
+              <a:buClr>
+                <a:srgbClr val="FFFFFF"/>
+              </a:buClr>
+              <a:buSzPct val="45000"/>
+              <a:buFont typeface="Wingdings" charset="2"/>
+              <a:buChar char=""/>
+              <a:tabLst>
+                <a:tab pos="0" algn="l"/>
+              </a:tabLst>
+            </a:pPr>
+            <a:r>
+              <a:rPr lang="en-US" sz="1500" b="0" u="none" strike="noStrike">
+                <a:solidFill>
+                  <a:srgbClr val="D1D1D1"/>
+                </a:solidFill>
+                <a:effectLst/>
+                <a:uFillTx/>
+                <a:latin typeface="Lato"/>
+                <a:ea typeface="Lato"/>
+              </a:rPr>
+              <a:t>Go to the site: </a:t>
+            </a:r>
+            <a:r>
+              <a:rPr lang="en-US" sz="1500" b="0" u="none" strike="noStrike">
+                <a:solidFill>
+                  <a:srgbClr val="D1D1D1"/>
+                </a:solidFill>
+                <a:effectLst/>
+                <a:uFillTx/>
+                <a:latin typeface="Lato"/>
+                <a:ea typeface="Lato"/>
+                <a:hlinkClick r:id="rId1"/>
+              </a:rPr>
+              <a:t>https://github.com/jemiller-iwcc/python-challenge</a:t>
+            </a:r>
+            <a:endParaRPr lang="en-US" sz="1500" b="0" u="none" strike="noStrike">
+              <a:solidFill>
+                <a:srgbClr val="FFFFFF"/>
+              </a:solidFill>
+              <a:effectLst/>
+              <a:uFillTx/>
+              <a:latin typeface="Arial"/>
+            </a:endParaRPr>
+          </a:p>
+          <a:p>
+            <a:pPr marL="216000" indent="-216000">
+              <a:lnSpc>
+                <a:spcPct val="150000"/>
+              </a:lnSpc>
+              <a:buClr>
+                <a:srgbClr val="FFFFFF"/>
+              </a:buClr>
+              <a:buSzPct val="45000"/>
+              <a:buFont typeface="Wingdings" charset="2"/>
+              <a:buChar char=""/>
+              <a:tabLst>
+                <a:tab pos="0" algn="l"/>
+              </a:tabLst>
+            </a:pPr>
+            <a:r>
+              <a:rPr lang="en-US" sz="1500" b="0" u="none" strike="noStrike">
+                <a:solidFill>
+                  <a:srgbClr val="D1D1D1"/>
+                </a:solidFill>
+                <a:effectLst/>
+                <a:uFillTx/>
+                <a:latin typeface="Lato"/>
+                <a:ea typeface="Lato"/>
+              </a:rPr>
+              <a:t>Use either the README.md file in your browser or download the PDF. Both contain the same data.</a:t>
+            </a:r>
+            <a:endParaRPr lang="en-US" sz="1500" b="0" u="none" strike="noStrike">
+              <a:solidFill>
+                <a:srgbClr val="FFFFFF"/>
+              </a:solidFill>
+              <a:effectLst/>
+              <a:uFillTx/>
+              <a:latin typeface="Arial"/>
+            </a:endParaRPr>
+          </a:p>
+          <a:p>
+            <a:pPr marL="216000" indent="-216000">
+              <a:lnSpc>
+                <a:spcPct val="150000"/>
+              </a:lnSpc>
+              <a:buClr>
+                <a:srgbClr val="FFFFFF"/>
+              </a:buClr>
+              <a:buSzPct val="45000"/>
+              <a:buFont typeface="Wingdings" charset="2"/>
+              <a:buChar char=""/>
+              <a:tabLst>
+                <a:tab pos="0" algn="l"/>
+              </a:tabLst>
+            </a:pPr>
+            <a:r>
+              <a:rPr lang="en-US" sz="1500" b="0" u="none" strike="noStrike">
+                <a:solidFill>
+                  <a:srgbClr val="D1D1D1"/>
+                </a:solidFill>
+                <a:effectLst/>
+                <a:uFillTx/>
+                <a:latin typeface="Lato"/>
+                <a:ea typeface="Lato"/>
+              </a:rPr>
+              <a:t>Follow the instructions that are within to make a multi-enemy boss battle.</a:t>
+            </a:r>
+            <a:endParaRPr lang="en-US" sz="1500" b="0" u="none" strike="noStrike">
+              <a:solidFill>
+                <a:srgbClr val="FFFFFF"/>
+              </a:solidFill>
+              <a:effectLst/>
+              <a:uFillTx/>
+              <a:latin typeface="Arial"/>
+            </a:endParaRPr>
+          </a:p>
+          <a:p>
+            <a:pPr marL="216000" indent="-216000">
+              <a:lnSpc>
+                <a:spcPct val="150000"/>
+              </a:lnSpc>
+              <a:buClr>
+                <a:srgbClr val="FFFFFF"/>
+              </a:buClr>
+              <a:buSzPct val="45000"/>
+              <a:buFont typeface="Wingdings" charset="2"/>
+              <a:buChar char=""/>
+              <a:tabLst>
+                <a:tab pos="0" algn="l"/>
+              </a:tabLst>
+            </a:pPr>
+            <a:r>
+              <a:rPr lang="en-US" sz="1500" b="0" u="none" strike="noStrike">
+                <a:solidFill>
+                  <a:srgbClr val="D1D1D1"/>
+                </a:solidFill>
+                <a:effectLst/>
+                <a:uFillTx/>
+                <a:latin typeface="Lato"/>
+                <a:ea typeface="Lato"/>
+              </a:rPr>
+              <a:t>You do not need to know anything more than what we learned yesterday</a:t>
+            </a:r>
+            <a:endParaRPr lang="en-US" sz="1500" b="0" u="none" strike="noStrike">
+              <a:solidFill>
+                <a:srgbClr val="FFFFFF"/>
+              </a:solidFill>
+              <a:effectLst/>
+              <a:uFillTx/>
+              <a:latin typeface="Arial"/>
+            </a:endParaRPr>
+          </a:p>
+        </p:txBody>
+      </p:sp>
+      <p:sp>
+        <p:nvSpPr>
+          <p:cNvPr id="188" name="Google Shape;113;p 15"/>
           <p:cNvSpPr/>
           <p:nvPr/>
         </p:nvSpPr>
         <p:spPr>
           <a:xfrm>
-            <a:off x="581040" y="1219320"/>
-            <a:ext cx="11029680" cy="9000"/>
-          </a:xfrm>
-          <a:prstGeom prst="rect">
-            <a:avLst/>
-          </a:prstGeom>
-          <a:solidFill>
-            <a:srgbClr val="3D3422"/>
-          </a:solidFill>
+            <a:off x="581040" y="581040"/>
+            <a:ext cx="11581200" cy="480240"/>
+          </a:xfrm>
+          <a:prstGeom prst="rect">
+            <a:avLst/>
+          </a:prstGeom>
+          <a:noFill/>
           <a:ln w="0">
             <a:noFill/>
           </a:ln>
@@ -10027,36 +10129,58 @@
           <a:fontRef idx="minor"/>
         </p:style>
         <p:txBody>
-          <a:bodyPr tIns="-36360" bIns="-36360" anchor="ctr">
-            <a:noAutofit/>
-          </a:bodyPr>
-          <a:p>
-            <a:endParaRPr lang="en-US" sz="1400" b="0" u="none" strike="noStrike">
-              <a:solidFill>
-                <a:srgbClr val="FFFFFF"/>
-              </a:solidFill>
-              <a:effectLst/>
-              <a:uFillTx/>
-              <a:latin typeface="Arial"/>
-            </a:endParaRPr>
-          </a:p>
-        </p:txBody>
-      </p:sp>
-      <p:sp>
-        <p:nvSpPr>
-          <p:cNvPr id="192" name="Google Shape;206;p 5"/>
+          <a:bodyPr lIns="0" tIns="0" rIns="0" bIns="0" anchor="t">
+            <a:spAutoFit/>
+          </a:bodyPr>
+          <a:p>
+            <a:pPr>
+              <a:lnSpc>
+                <a:spcPct val="100000"/>
+              </a:lnSpc>
+              <a:tabLst>
+                <a:tab pos="0" algn="l"/>
+              </a:tabLst>
+            </a:pPr>
+            <a:r>
+              <a:rPr lang="en-US" sz="3150" b="1" u="none" strike="noStrike">
+                <a:solidFill>
+                  <a:srgbClr val="C5A059"/>
+                </a:solidFill>
+                <a:effectLst/>
+                <a:uFillTx/>
+                <a:latin typeface="Cinzel"/>
+                <a:ea typeface="Cinzel"/>
+              </a:rPr>
+              <a:t>Coding Challenge</a:t>
+            </a:r>
+            <a:endParaRPr lang="en-US" sz="3150" b="0" u="none" strike="noStrike">
+              <a:solidFill>
+                <a:srgbClr val="FFFFFF"/>
+              </a:solidFill>
+              <a:effectLst/>
+              <a:uFillTx/>
+              <a:latin typeface="Arial"/>
+            </a:endParaRPr>
+          </a:p>
+        </p:txBody>
+      </p:sp>
+      <p:sp>
+        <p:nvSpPr>
+          <p:cNvPr id="189" name="Google Shape;114;p 15"/>
           <p:cNvSpPr/>
           <p:nvPr/>
         </p:nvSpPr>
         <p:spPr>
           <a:xfrm>
-            <a:off x="2337840" y="2865960"/>
-            <a:ext cx="7516080" cy="343080"/>
-          </a:xfrm>
-          <a:prstGeom prst="rect">
-            <a:avLst/>
-          </a:prstGeom>
-          <a:noFill/>
+            <a:off x="581040" y="1219320"/>
+            <a:ext cx="11029680" cy="9000"/>
+          </a:xfrm>
+          <a:prstGeom prst="rect">
+            <a:avLst/>
+          </a:prstGeom>
+          <a:solidFill>
+            <a:srgbClr val="3D3422"/>
+          </a:solidFill>
           <a:ln w="0">
             <a:noFill/>
           </a:ln>
@@ -10068,65 +10192,21 @@
           <a:fontRef idx="minor"/>
         </p:style>
         <p:txBody>
-          <a:bodyPr lIns="0" tIns="0" rIns="0" bIns="0" anchor="t">
-            <a:spAutoFit/>
-          </a:bodyPr>
-          <a:p>
-            <a:pPr algn="ctr">
-              <a:lnSpc>
-                <a:spcPct val="150000"/>
-              </a:lnSpc>
-              <a:tabLst>
-                <a:tab pos="0" algn="l"/>
-              </a:tabLst>
-            </a:pPr>
-            <a:r>
-              <a:rPr lang="en-US" sz="1500" b="0" u="none" strike="noStrike">
-                <a:solidFill>
-                  <a:srgbClr val="D1D1D1"/>
-                </a:solidFill>
-                <a:effectLst/>
-                <a:uFillTx/>
-                <a:latin typeface="Lato"/>
-                <a:ea typeface="Lato"/>
-              </a:rPr>
-              <a:t>If two unrelated things can make a statement true, then we can nest the if statements</a:t>
-            </a:r>
-            <a:endParaRPr lang="en-US" sz="1500" b="0" u="none" strike="noStrike">
-              <a:solidFill>
-                <a:srgbClr val="FFFFFF"/>
-              </a:solidFill>
-              <a:effectLst/>
-              <a:uFillTx/>
-              <a:latin typeface="Arial"/>
-            </a:endParaRPr>
-          </a:p>
-        </p:txBody>
-      </p:sp>
-      <p:pic>
-        <p:nvPicPr>
-          <p:cNvPr id="193" name=""/>
-          <p:cNvPicPr/>
-          <p:nvPr/>
-        </p:nvPicPr>
-        <p:blipFill>
-          <a:blip r:embed="rId4"/>
-          <a:stretch/>
-        </p:blipFill>
-        <p:spPr>
-          <a:xfrm>
-            <a:off x="3168000" y="3467880"/>
-            <a:ext cx="6229080" cy="1504440"/>
-          </a:xfrm>
-          <a:prstGeom prst="rect">
-            <a:avLst/>
-          </a:prstGeom>
-          <a:noFill/>
-          <a:ln w="0">
-            <a:noFill/>
-          </a:ln>
-        </p:spPr>
-      </p:pic>
+          <a:bodyPr tIns="-36360" bIns="-36360" anchor="ctr">
+            <a:noAutofit/>
+          </a:bodyPr>
+          <a:p>
+            <a:endParaRPr lang="en-US" sz="1400" b="0" u="none" strike="noStrike">
+              <a:solidFill>
+                <a:srgbClr val="FFFFFF"/>
+              </a:solidFill>
+              <a:effectLst/>
+              <a:uFillTx/>
+              <a:latin typeface="Arial"/>
+            </a:endParaRPr>
+          </a:p>
+        </p:txBody>
+      </p:sp>
     </p:spTree>
   </p:cSld>
   <mc:AlternateContent>
@@ -10164,16 +10244,88 @@
           <a:chExt cx="0" cy="0"/>
         </a:xfrm>
       </p:grpSpPr>
-      <p:sp>
-        <p:nvSpPr>
-          <p:cNvPr id="194" name="Google Shape;103;p 22"/>
+      <p:pic>
+        <p:nvPicPr>
+          <p:cNvPr id="190" name="Google Shape;199;p 1"/>
+          <p:cNvPicPr/>
+          <p:nvPr/>
+        </p:nvPicPr>
+        <p:blipFill>
+          <a:blip r:embed="rId1"/>
+          <a:stretch/>
+        </p:blipFill>
+        <p:spPr>
+          <a:xfrm>
+            <a:off x="0" y="0"/>
+            <a:ext cx="12191760" cy="6857640"/>
+          </a:xfrm>
+          <a:prstGeom prst="rect">
+            <a:avLst/>
+          </a:prstGeom>
+          <a:noFill/>
+          <a:ln w="0">
+            <a:noFill/>
+          </a:ln>
+        </p:spPr>
+      </p:pic>
+      <p:pic>
+        <p:nvPicPr>
+          <p:cNvPr id="191" name="Google Shape;200;p 4"/>
+          <p:cNvPicPr/>
+          <p:nvPr/>
+        </p:nvPicPr>
+        <p:blipFill>
+          <a:blip r:embed="rId2"/>
+          <a:stretch/>
+        </p:blipFill>
+        <p:spPr>
+          <a:xfrm>
+            <a:off x="581040" y="1609560"/>
+            <a:ext cx="11074320" cy="4849920"/>
+          </a:xfrm>
+          <a:prstGeom prst="rect">
+            <a:avLst/>
+          </a:prstGeom>
+          <a:noFill/>
+          <a:ln w="0">
+            <a:noFill/>
+          </a:ln>
+        </p:spPr>
+      </p:pic>
+      <p:pic>
+        <p:nvPicPr>
+          <p:cNvPr id="192" name="Google Shape;204;p 2"/>
+          <p:cNvPicPr/>
+          <p:nvPr/>
+        </p:nvPicPr>
+        <p:blipFill>
+          <a:blip r:embed="rId3"/>
+          <a:stretch/>
+        </p:blipFill>
+        <p:spPr>
+          <a:xfrm>
+            <a:off x="5929560" y="1905120"/>
+            <a:ext cx="333000" cy="380520"/>
+          </a:xfrm>
+          <a:prstGeom prst="rect">
+            <a:avLst/>
+          </a:prstGeom>
+          <a:noFill/>
+          <a:ln w="0">
+            <a:noFill/>
+          </a:ln>
+        </p:spPr>
+      </p:pic>
+      <p:sp>
+        <p:nvSpPr>
+          <p:cNvPr id="193" name="Google Shape;205;p 2"/>
           <p:cNvSpPr/>
           <p:nvPr/>
         </p:nvSpPr>
         <p:spPr>
           <a:xfrm>
-            <a:off x="581040" y="1609560"/>
-            <a:ext cx="5590440" cy="366120"/>
+            <a:off x="3585960" y="2428920"/>
+            <a:ext cx="5020200" cy="366120"/>
           </a:xfrm>
           <a:prstGeom prst="rect">
             <a:avLst/>
@@ -10194,7 +10346,7 @@
             <a:spAutoFit/>
           </a:bodyPr>
           <a:p>
-            <a:pPr>
+            <a:pPr algn="ctr">
               <a:lnSpc>
                 <a:spcPct val="100000"/>
               </a:lnSpc>
@@ -10212,7 +10364,7 @@
                 <a:latin typeface="Cinzel"/>
                 <a:ea typeface="Cinzel"/>
               </a:rPr>
-              <a:t>Code</a:t>
+              <a:t>Nesting If Statements</a:t>
             </a:r>
             <a:endParaRPr lang="en-US" sz="2400" b="0" u="none" strike="noStrike">
               <a:solidFill>
@@ -10227,14 +10379,14 @@
       </p:sp>
       <p:sp>
         <p:nvSpPr>
-          <p:cNvPr id="195" name="Google Shape;104;p 21"/>
+          <p:cNvPr id="194" name="Google Shape;218;p 2"/>
           <p:cNvSpPr/>
           <p:nvPr/>
         </p:nvSpPr>
         <p:spPr>
           <a:xfrm>
-            <a:off x="581040" y="2162160"/>
-            <a:ext cx="9879120" cy="3427560"/>
+            <a:off x="581040" y="581040"/>
+            <a:ext cx="11581200" cy="480240"/>
           </a:xfrm>
           <a:prstGeom prst="rect">
             <a:avLst/>
@@ -10255,382 +10407,54 @@
             <a:spAutoFit/>
           </a:bodyPr>
           <a:p>
-            <a:pPr marL="216000" indent="-216000">
-              <a:lnSpc>
-                <a:spcPct val="150000"/>
-              </a:lnSpc>
-              <a:buClr>
-                <a:srgbClr val="FFFFFF"/>
-              </a:buClr>
-              <a:buSzPct val="45000"/>
-              <a:buFont typeface="Wingdings" charset="2"/>
-              <a:buChar char=""/>
-              <a:tabLst>
-                <a:tab pos="0" algn="l"/>
-              </a:tabLst>
-            </a:pPr>
-            <a:r>
-              <a:rPr lang="en-US" sz="1500" b="0" u="none" strike="noStrike">
-                <a:solidFill>
-                  <a:srgbClr val="D1D1D1"/>
-                </a:solidFill>
-                <a:effectLst/>
-                <a:uFillTx/>
-                <a:latin typeface="Lato"/>
-                <a:ea typeface="Lato"/>
-              </a:rPr>
-              <a:t>Open the file </a:t>
-            </a:r>
-            <a:r>
-              <a:rPr lang="en-US" sz="1500" b="0" i="1" u="none" strike="noStrike">
-                <a:solidFill>
-                  <a:srgbClr val="D1D1D1"/>
-                </a:solidFill>
-                <a:effectLst/>
-                <a:uFillTx/>
-                <a:latin typeface="Lato"/>
-                <a:ea typeface="Lato"/>
-              </a:rPr>
-              <a:t>Step6.py</a:t>
-            </a:r>
-            <a:endParaRPr lang="en-US" sz="1500" b="0" u="none" strike="noStrike">
-              <a:solidFill>
-                <a:srgbClr val="FFFFFF"/>
-              </a:solidFill>
-              <a:effectLst/>
-              <a:uFillTx/>
-              <a:latin typeface="Arial"/>
-            </a:endParaRPr>
-          </a:p>
-          <a:p>
-            <a:pPr marL="216000" indent="-216000">
-              <a:lnSpc>
-                <a:spcPct val="150000"/>
-              </a:lnSpc>
-              <a:buClr>
-                <a:srgbClr val="FFFFFF"/>
-              </a:buClr>
-              <a:buSzPct val="45000"/>
-              <a:buFont typeface="Wingdings" charset="2"/>
-              <a:buChar char=""/>
-              <a:tabLst>
-                <a:tab pos="0" algn="l"/>
-              </a:tabLst>
-            </a:pPr>
-            <a:r>
-              <a:rPr lang="en-US" sz="1500" b="0" u="none" strike="noStrike">
-                <a:solidFill>
-                  <a:srgbClr val="D1D1D1"/>
-                </a:solidFill>
-                <a:effectLst/>
-                <a:uFillTx/>
-                <a:latin typeface="Lato"/>
-                <a:ea typeface="Lato"/>
-              </a:rPr>
-              <a:t>Click File &gt; Save As</a:t>
-            </a:r>
-            <a:endParaRPr lang="en-US" sz="1500" b="0" u="none" strike="noStrike">
-              <a:solidFill>
-                <a:srgbClr val="FFFFFF"/>
-              </a:solidFill>
-              <a:effectLst/>
-              <a:uFillTx/>
-              <a:latin typeface="Arial"/>
-            </a:endParaRPr>
-          </a:p>
-          <a:p>
-            <a:pPr marL="216000" indent="-216000">
-              <a:lnSpc>
-                <a:spcPct val="150000"/>
-              </a:lnSpc>
-              <a:buClr>
-                <a:srgbClr val="FFFFFF"/>
-              </a:buClr>
-              <a:buSzPct val="45000"/>
-              <a:buFont typeface="Wingdings" charset="2"/>
-              <a:buChar char=""/>
-              <a:tabLst>
-                <a:tab pos="0" algn="l"/>
-              </a:tabLst>
-            </a:pPr>
-            <a:r>
-              <a:rPr lang="en-US" sz="1500" b="0" u="none" strike="noStrike">
-                <a:solidFill>
-                  <a:srgbClr val="D1D1D1"/>
-                </a:solidFill>
-                <a:effectLst/>
-                <a:uFillTx/>
-                <a:latin typeface="Lato"/>
-                <a:ea typeface="Lato"/>
-              </a:rPr>
-              <a:t>Save the file as </a:t>
-            </a:r>
-            <a:r>
-              <a:rPr lang="en-US" sz="1500" b="0" i="1" u="none" strike="noStrike">
-                <a:solidFill>
-                  <a:srgbClr val="D1D1D1"/>
-                </a:solidFill>
-                <a:effectLst/>
-                <a:uFillTx/>
-                <a:latin typeface="Lato"/>
-                <a:ea typeface="Lato"/>
-              </a:rPr>
-              <a:t>Step7.py</a:t>
-            </a:r>
-            <a:endParaRPr lang="en-US" sz="1500" b="0" u="none" strike="noStrike">
-              <a:solidFill>
-                <a:srgbClr val="FFFFFF"/>
-              </a:solidFill>
-              <a:effectLst/>
-              <a:uFillTx/>
-              <a:latin typeface="Arial"/>
-            </a:endParaRPr>
-          </a:p>
-          <a:p>
-            <a:pPr marL="216000" indent="-216000">
-              <a:lnSpc>
-                <a:spcPct val="150000"/>
-              </a:lnSpc>
-              <a:buClr>
-                <a:srgbClr val="FFFFFF"/>
-              </a:buClr>
-              <a:buSzPct val="45000"/>
-              <a:buFont typeface="Wingdings" charset="2"/>
-              <a:buChar char=""/>
-              <a:tabLst>
-                <a:tab pos="0" algn="l"/>
-              </a:tabLst>
-            </a:pPr>
-            <a:r>
-              <a:rPr lang="en-US" sz="1500" b="0" u="none" strike="noStrike">
-                <a:solidFill>
-                  <a:srgbClr val="D1D1D1"/>
-                </a:solidFill>
-                <a:effectLst/>
-                <a:uFillTx/>
-                <a:latin typeface="Lato"/>
-                <a:ea typeface="Lato"/>
-              </a:rPr>
-              <a:t>After </a:t>
-            </a:r>
-            <a:r>
-              <a:rPr lang="en-US" sz="1500" b="0" i="1" u="none" strike="noStrike">
-                <a:solidFill>
-                  <a:srgbClr val="D1D1D1"/>
-                </a:solidFill>
-                <a:effectLst/>
-                <a:uFillTx/>
-                <a:latin typeface="Lato"/>
-                <a:ea typeface="Lato"/>
-              </a:rPr>
-              <a:t>import random</a:t>
-            </a:r>
-            <a:r>
-              <a:rPr lang="en-US" sz="1500" b="0" u="none" strike="noStrike">
-                <a:solidFill>
-                  <a:srgbClr val="D1D1D1"/>
-                </a:solidFill>
-                <a:effectLst/>
-                <a:uFillTx/>
-                <a:latin typeface="Lato"/>
-                <a:ea typeface="Lato"/>
-              </a:rPr>
-              <a:t>, add a line with the variable </a:t>
-            </a:r>
-            <a:r>
-              <a:rPr lang="en-US" sz="1500" b="0" i="1" u="none" strike="noStrike">
-                <a:solidFill>
-                  <a:srgbClr val="D1D1D1"/>
-                </a:solidFill>
-                <a:effectLst/>
-                <a:uFillTx/>
-                <a:latin typeface="Lato"/>
-                <a:ea typeface="Lato"/>
-              </a:rPr>
-              <a:t>player_name</a:t>
-            </a:r>
-            <a:r>
-              <a:rPr lang="en-US" sz="1500" b="0" u="none" strike="noStrike">
-                <a:solidFill>
-                  <a:srgbClr val="D1D1D1"/>
-                </a:solidFill>
-                <a:effectLst/>
-                <a:uFillTx/>
-                <a:latin typeface="Lato"/>
-                <a:ea typeface="Lato"/>
-              </a:rPr>
-              <a:t> using input asking the player’s name, the variable to lower case</a:t>
-            </a:r>
-            <a:endParaRPr lang="en-US" sz="1500" b="0" u="none" strike="noStrike">
-              <a:solidFill>
-                <a:srgbClr val="FFFFFF"/>
-              </a:solidFill>
-              <a:effectLst/>
-              <a:uFillTx/>
-              <a:latin typeface="Arial"/>
-            </a:endParaRPr>
-          </a:p>
-          <a:p>
-            <a:pPr marL="216000" indent="-216000">
-              <a:lnSpc>
-                <a:spcPct val="150000"/>
-              </a:lnSpc>
-              <a:buClr>
-                <a:srgbClr val="FFFFFF"/>
-              </a:buClr>
-              <a:buSzPct val="45000"/>
-              <a:buFont typeface="Wingdings" charset="2"/>
-              <a:buChar char=""/>
-              <a:tabLst>
-                <a:tab pos="0" algn="l"/>
-              </a:tabLst>
-            </a:pPr>
-            <a:r>
-              <a:rPr lang="en-US" sz="1500" b="0" u="none" strike="noStrike">
-                <a:solidFill>
-                  <a:srgbClr val="D1D1D1"/>
-                </a:solidFill>
-                <a:effectLst/>
-                <a:uFillTx/>
-                <a:latin typeface="Lato"/>
-                <a:ea typeface="Lato"/>
-              </a:rPr>
-              <a:t>Under the first beast battle, under the else statement, nest an if/else statement where it checks if the value of player_name is “justin”</a:t>
-            </a:r>
-            <a:endParaRPr lang="en-US" sz="1500" b="0" u="none" strike="noStrike">
-              <a:solidFill>
-                <a:srgbClr val="FFFFFF"/>
-              </a:solidFill>
-              <a:effectLst/>
-              <a:uFillTx/>
-              <a:latin typeface="Arial"/>
-            </a:endParaRPr>
-          </a:p>
-          <a:p>
-            <a:pPr marL="432000" lvl="1" indent="-216000">
-              <a:lnSpc>
-                <a:spcPct val="150000"/>
-              </a:lnSpc>
-              <a:buClr>
-                <a:srgbClr val="FFFFFF"/>
-              </a:buClr>
-              <a:buSzPct val="45000"/>
-              <a:buFont typeface="Wingdings" charset="2"/>
-              <a:buChar char=""/>
-              <a:tabLst>
-                <a:tab pos="0" algn="l"/>
-              </a:tabLst>
-            </a:pPr>
-            <a:r>
-              <a:rPr lang="en-US" sz="1500" b="0" u="none" strike="noStrike">
-                <a:solidFill>
-                  <a:srgbClr val="D1D1D1"/>
-                </a:solidFill>
-                <a:effectLst/>
-                <a:uFillTx/>
-                <a:latin typeface="Lato"/>
-                <a:ea typeface="Lato"/>
-              </a:rPr>
-              <a:t>If the name is justin, let them win</a:t>
-            </a:r>
-            <a:endParaRPr lang="en-US" sz="1500" b="0" u="none" strike="noStrike">
-              <a:solidFill>
-                <a:srgbClr val="FFFFFF"/>
-              </a:solidFill>
-              <a:effectLst/>
-              <a:uFillTx/>
-              <a:latin typeface="Arial"/>
-            </a:endParaRPr>
-          </a:p>
-          <a:p>
-            <a:pPr marL="432000" lvl="1" indent="-216000">
-              <a:lnSpc>
-                <a:spcPct val="150000"/>
-              </a:lnSpc>
-              <a:buClr>
-                <a:srgbClr val="FFFFFF"/>
-              </a:buClr>
-              <a:buSzPct val="45000"/>
-              <a:buFont typeface="Wingdings" charset="2"/>
-              <a:buChar char=""/>
-              <a:tabLst>
-                <a:tab pos="0" algn="l"/>
-              </a:tabLst>
-            </a:pPr>
-            <a:r>
-              <a:rPr lang="en-US" sz="1500" b="0" u="none" strike="noStrike">
-                <a:solidFill>
-                  <a:srgbClr val="D1D1D1"/>
-                </a:solidFill>
-                <a:effectLst/>
-                <a:uFillTx/>
-                <a:latin typeface="Lato"/>
-                <a:ea typeface="Lato"/>
-              </a:rPr>
-              <a:t>If the name isn’t justin, then use the existing else “you died” sequence”</a:t>
-            </a:r>
-            <a:endParaRPr lang="en-US" sz="1500" b="0" u="none" strike="noStrike">
-              <a:solidFill>
-                <a:srgbClr val="FFFFFF"/>
-              </a:solidFill>
-              <a:effectLst/>
-              <a:uFillTx/>
-              <a:latin typeface="Arial"/>
-            </a:endParaRPr>
-          </a:p>
-          <a:p>
-            <a:pPr marL="216000" indent="-216000">
-              <a:lnSpc>
-                <a:spcPct val="150000"/>
-              </a:lnSpc>
-              <a:buClr>
-                <a:srgbClr val="FFFFFF"/>
-              </a:buClr>
-              <a:buSzPct val="45000"/>
-              <a:buFont typeface="Wingdings" charset="2"/>
-              <a:buChar char=""/>
-              <a:tabLst>
-                <a:tab pos="0" algn="l"/>
-              </a:tabLst>
-            </a:pPr>
-            <a:r>
-              <a:rPr lang="en-US" sz="1500" b="0" u="none" strike="noStrike">
-                <a:solidFill>
-                  <a:srgbClr val="D1D1D1"/>
-                </a:solidFill>
-                <a:effectLst/>
-                <a:uFillTx/>
-                <a:latin typeface="Lato"/>
-                <a:ea typeface="Lato"/>
-              </a:rPr>
-              <a:t>Copy and paste this code into the boss battle</a:t>
-            </a:r>
-            <a:endParaRPr lang="en-US" sz="1500" b="0" u="none" strike="noStrike">
-              <a:solidFill>
-                <a:srgbClr val="FFFFFF"/>
-              </a:solidFill>
-              <a:effectLst/>
-              <a:uFillTx/>
-              <a:latin typeface="Arial"/>
-            </a:endParaRPr>
-          </a:p>
-        </p:txBody>
-      </p:sp>
-      <p:sp>
-        <p:nvSpPr>
-          <p:cNvPr id="196" name="Google Shape;113;p 12"/>
+            <a:pPr>
+              <a:lnSpc>
+                <a:spcPct val="100000"/>
+              </a:lnSpc>
+              <a:tabLst>
+                <a:tab pos="0" algn="l"/>
+              </a:tabLst>
+            </a:pPr>
+            <a:r>
+              <a:rPr lang="en-US" sz="3150" b="1" u="none" strike="noStrike">
+                <a:solidFill>
+                  <a:srgbClr val="C5A059"/>
+                </a:solidFill>
+                <a:effectLst/>
+                <a:uFillTx/>
+                <a:latin typeface="Cinzel"/>
+                <a:ea typeface="Cinzel"/>
+              </a:rPr>
+              <a:t>THE HIDDEN RUNES: Nested If Statements</a:t>
+            </a:r>
+            <a:endParaRPr lang="en-US" sz="3150" b="0" u="none" strike="noStrike">
+              <a:solidFill>
+                <a:srgbClr val="FFFFFF"/>
+              </a:solidFill>
+              <a:effectLst/>
+              <a:uFillTx/>
+              <a:latin typeface="Arial"/>
+            </a:endParaRPr>
+          </a:p>
+        </p:txBody>
+      </p:sp>
+      <p:sp>
+        <p:nvSpPr>
+          <p:cNvPr id="195" name="Google Shape;219;p 2"/>
           <p:cNvSpPr/>
           <p:nvPr/>
         </p:nvSpPr>
         <p:spPr>
           <a:xfrm>
-            <a:off x="581040" y="581040"/>
-            <a:ext cx="11581200" cy="480240"/>
-          </a:xfrm>
-          <a:prstGeom prst="rect">
-            <a:avLst/>
-          </a:prstGeom>
-          <a:noFill/>
+            <a:off x="581040" y="1219320"/>
+            <a:ext cx="11029680" cy="9000"/>
+          </a:xfrm>
+          <a:prstGeom prst="rect">
+            <a:avLst/>
+          </a:prstGeom>
+          <a:solidFill>
+            <a:srgbClr val="3D3422"/>
+          </a:solidFill>
           <a:ln w="0">
             <a:noFill/>
           </a:ln>
@@ -10642,58 +10466,36 @@
           <a:fontRef idx="minor"/>
         </p:style>
         <p:txBody>
-          <a:bodyPr lIns="0" tIns="0" rIns="0" bIns="0" anchor="t">
-            <a:spAutoFit/>
-          </a:bodyPr>
-          <a:p>
-            <a:pPr>
-              <a:lnSpc>
-                <a:spcPct val="100000"/>
-              </a:lnSpc>
-              <a:tabLst>
-                <a:tab pos="0" algn="l"/>
-              </a:tabLst>
-            </a:pPr>
-            <a:r>
-              <a:rPr lang="en-US" sz="3150" b="1" u="none" strike="noStrike">
-                <a:solidFill>
-                  <a:srgbClr val="C5A059"/>
-                </a:solidFill>
-                <a:effectLst/>
-                <a:uFillTx/>
-                <a:latin typeface="Cinzel"/>
-                <a:ea typeface="Cinzel"/>
-              </a:rPr>
-              <a:t>Nested If Statements: Your Turn</a:t>
-            </a:r>
-            <a:endParaRPr lang="en-US" sz="3150" b="0" u="none" strike="noStrike">
-              <a:solidFill>
-                <a:srgbClr val="FFFFFF"/>
-              </a:solidFill>
-              <a:effectLst/>
-              <a:uFillTx/>
-              <a:latin typeface="Arial"/>
-            </a:endParaRPr>
-          </a:p>
-        </p:txBody>
-      </p:sp>
-      <p:sp>
-        <p:nvSpPr>
-          <p:cNvPr id="197" name="Google Shape;114;p 12"/>
+          <a:bodyPr tIns="-36360" bIns="-36360" anchor="ctr">
+            <a:noAutofit/>
+          </a:bodyPr>
+          <a:p>
+            <a:endParaRPr lang="en-US" sz="1400" b="0" u="none" strike="noStrike">
+              <a:solidFill>
+                <a:srgbClr val="FFFFFF"/>
+              </a:solidFill>
+              <a:effectLst/>
+              <a:uFillTx/>
+              <a:latin typeface="Arial"/>
+            </a:endParaRPr>
+          </a:p>
+        </p:txBody>
+      </p:sp>
+      <p:sp>
+        <p:nvSpPr>
+          <p:cNvPr id="196" name="Google Shape;206;p 5"/>
           <p:cNvSpPr/>
           <p:nvPr/>
         </p:nvSpPr>
         <p:spPr>
           <a:xfrm>
-            <a:off x="581040" y="1219320"/>
-            <a:ext cx="11029680" cy="9000"/>
-          </a:xfrm>
-          <a:prstGeom prst="rect">
-            <a:avLst/>
-          </a:prstGeom>
-          <a:solidFill>
-            <a:srgbClr val="3D3422"/>
-          </a:solidFill>
+            <a:off x="2337840" y="2865960"/>
+            <a:ext cx="7516080" cy="343080"/>
+          </a:xfrm>
+          <a:prstGeom prst="rect">
+            <a:avLst/>
+          </a:prstGeom>
+          <a:noFill/>
           <a:ln w="0">
             <a:noFill/>
           </a:ln>
@@ -10705,122 +10507,14 @@
           <a:fontRef idx="minor"/>
         </p:style>
         <p:txBody>
-          <a:bodyPr tIns="-36360" bIns="-36360" anchor="ctr">
-            <a:noAutofit/>
-          </a:bodyPr>
-          <a:p>
-            <a:endParaRPr lang="en-US" sz="1400" b="0" u="none" strike="noStrike">
-              <a:solidFill>
-                <a:srgbClr val="FFFFFF"/>
-              </a:solidFill>
-              <a:effectLst/>
-              <a:uFillTx/>
-              <a:latin typeface="Arial"/>
-            </a:endParaRPr>
-          </a:p>
-        </p:txBody>
-      </p:sp>
-      <p:sp>
-        <p:nvSpPr>
-          <p:cNvPr id="198" name="Google Shape;103;p 24"/>
-          <p:cNvSpPr/>
-          <p:nvPr/>
-        </p:nvSpPr>
-        <p:spPr>
-          <a:xfrm>
-            <a:off x="6045120" y="5316120"/>
-            <a:ext cx="5590440" cy="366120"/>
-          </a:xfrm>
-          <a:prstGeom prst="rect">
-            <a:avLst/>
-          </a:prstGeom>
-          <a:noFill/>
-          <a:ln w="0">
-            <a:noFill/>
-          </a:ln>
-        </p:spPr>
-        <p:style>
-          <a:lnRef idx="0"/>
-          <a:fillRef idx="0"/>
-          <a:effectRef idx="0"/>
-          <a:fontRef idx="minor"/>
-        </p:style>
-        <p:txBody>
           <a:bodyPr lIns="0" tIns="0" rIns="0" bIns="0" anchor="t">
             <a:spAutoFit/>
           </a:bodyPr>
           <a:p>
-            <a:pPr>
-              <a:lnSpc>
-                <a:spcPct val="100000"/>
-              </a:lnSpc>
-              <a:tabLst>
-                <a:tab pos="0" algn="l"/>
-              </a:tabLst>
-            </a:pPr>
-            <a:r>
-              <a:rPr lang="en-US" sz="2400" b="1" u="none" strike="noStrike">
-                <a:solidFill>
-                  <a:srgbClr val="F5F5F5"/>
-                </a:solidFill>
-                <a:effectLst/>
-                <a:uFillTx/>
-                <a:latin typeface="Cinzel"/>
-                <a:ea typeface="Cinzel"/>
-              </a:rPr>
-              <a:t>Running your Code</a:t>
-            </a:r>
-            <a:endParaRPr lang="en-US" sz="2400" b="0" u="none" strike="noStrike">
-              <a:solidFill>
-                <a:srgbClr val="FFFFFF"/>
-              </a:solidFill>
-              <a:effectLst/>
-              <a:uFillTx/>
-              <a:latin typeface="Arial"/>
-            </a:endParaRPr>
-          </a:p>
-        </p:txBody>
-      </p:sp>
-      <p:sp>
-        <p:nvSpPr>
-          <p:cNvPr id="199" name="Google Shape;104;p 23"/>
-          <p:cNvSpPr/>
-          <p:nvPr/>
-        </p:nvSpPr>
-        <p:spPr>
-          <a:xfrm>
-            <a:off x="6045120" y="5682240"/>
-            <a:ext cx="9879120" cy="685800"/>
-          </a:xfrm>
-          <a:prstGeom prst="rect">
-            <a:avLst/>
-          </a:prstGeom>
-          <a:noFill/>
-          <a:ln w="0">
-            <a:noFill/>
-          </a:ln>
-        </p:spPr>
-        <p:style>
-          <a:lnRef idx="0"/>
-          <a:fillRef idx="0"/>
-          <a:effectRef idx="0"/>
-          <a:fontRef idx="minor"/>
-        </p:style>
-        <p:txBody>
-          <a:bodyPr lIns="0" tIns="0" rIns="0" bIns="0" anchor="t">
-            <a:spAutoFit/>
-          </a:bodyPr>
-          <a:p>
-            <a:pPr marL="216000" indent="-216000">
+            <a:pPr algn="ctr">
               <a:lnSpc>
                 <a:spcPct val="150000"/>
               </a:lnSpc>
-              <a:buClr>
-                <a:srgbClr val="FFFFFF"/>
-              </a:buClr>
-              <a:buSzPct val="45000"/>
-              <a:buFont typeface="Wingdings" charset="2"/>
-              <a:buChar char=""/>
               <a:tabLst>
                 <a:tab pos="0" algn="l"/>
               </a:tabLst>
@@ -10835,7 +10529,7 @@
                 <a:latin typeface="Lato"/>
                 <a:ea typeface="Lato"/>
               </a:rPr>
-              <a:t>Open the terminal if it is not yet:</a:t>
+              <a:t>If two unrelated things can make a statement true, then we can nest the if statements</a:t>
             </a:r>
             <a:endParaRPr lang="en-US" sz="1500" b="0" u="none" strike="noStrike">
               <a:solidFill>
@@ -10846,44 +10540,32 @@
               <a:latin typeface="Arial"/>
             </a:endParaRPr>
           </a:p>
-          <a:p>
-            <a:pPr marL="216000" indent="-216000">
-              <a:lnSpc>
-                <a:spcPct val="150000"/>
-              </a:lnSpc>
-              <a:buClr>
-                <a:srgbClr val="FFFFFF"/>
-              </a:buClr>
-              <a:buSzPct val="45000"/>
-              <a:buFont typeface="Wingdings" charset="2"/>
-              <a:buChar char=""/>
-              <a:tabLst>
-                <a:tab pos="0" algn="l"/>
-              </a:tabLst>
-            </a:pPr>
-            <a:r>
-              <a:rPr lang="en-US" sz="1500" b="0" u="none" strike="noStrike">
-                <a:solidFill>
-                  <a:srgbClr val="D1D1D1"/>
-                </a:solidFill>
-                <a:effectLst/>
-                <a:uFillTx/>
-                <a:latin typeface="Lato"/>
-                <a:ea typeface="Lato"/>
-              </a:rPr>
-              <a:t>Run the program: python Step7.py</a:t>
-            </a:r>
-            <a:endParaRPr lang="en-US" sz="1500" b="0" u="none" strike="noStrike">
-              <a:solidFill>
-                <a:srgbClr val="FFFFFF"/>
-              </a:solidFill>
-              <a:effectLst/>
-              <a:uFillTx/>
-              <a:latin typeface="Arial"/>
-            </a:endParaRPr>
-          </a:p>
-        </p:txBody>
-      </p:sp>
+        </p:txBody>
+      </p:sp>
+      <p:pic>
+        <p:nvPicPr>
+          <p:cNvPr id="197" name=""/>
+          <p:cNvPicPr/>
+          <p:nvPr/>
+        </p:nvPicPr>
+        <p:blipFill>
+          <a:blip r:embed="rId4"/>
+          <a:stretch/>
+        </p:blipFill>
+        <p:spPr>
+          <a:xfrm>
+            <a:off x="3168000" y="3467880"/>
+            <a:ext cx="6229080" cy="1504440"/>
+          </a:xfrm>
+          <a:prstGeom prst="rect">
+            <a:avLst/>
+          </a:prstGeom>
+          <a:noFill/>
+          <a:ln w="0">
+            <a:noFill/>
+          </a:ln>
+        </p:spPr>
+      </p:pic>
     </p:spTree>
   </p:cSld>
   <mc:AlternateContent>
@@ -10921,88 +10603,16 @@
           <a:chExt cx="0" cy="0"/>
         </a:xfrm>
       </p:grpSpPr>
-      <p:pic>
-        <p:nvPicPr>
-          <p:cNvPr id="200" name="Google Shape;199;p 2"/>
-          <p:cNvPicPr/>
-          <p:nvPr/>
-        </p:nvPicPr>
-        <p:blipFill>
-          <a:blip r:embed="rId1"/>
-          <a:stretch/>
-        </p:blipFill>
-        <p:spPr>
-          <a:xfrm>
-            <a:off x="0" y="0"/>
-            <a:ext cx="12191760" cy="6857640"/>
-          </a:xfrm>
-          <a:prstGeom prst="rect">
-            <a:avLst/>
-          </a:prstGeom>
-          <a:noFill/>
-          <a:ln w="0">
-            <a:noFill/>
-          </a:ln>
-        </p:spPr>
-      </p:pic>
-      <p:pic>
-        <p:nvPicPr>
-          <p:cNvPr id="201" name="Google Shape;200;p 2"/>
-          <p:cNvPicPr/>
-          <p:nvPr/>
-        </p:nvPicPr>
-        <p:blipFill>
-          <a:blip r:embed="rId2"/>
-          <a:stretch/>
-        </p:blipFill>
+      <p:sp>
+        <p:nvSpPr>
+          <p:cNvPr id="198" name="Google Shape;103;p 22"/>
+          <p:cNvSpPr/>
+          <p:nvPr/>
+        </p:nvSpPr>
         <p:spPr>
           <a:xfrm>
             <a:off x="581040" y="1609560"/>
-            <a:ext cx="11074320" cy="4849920"/>
-          </a:xfrm>
-          <a:prstGeom prst="rect">
-            <a:avLst/>
-          </a:prstGeom>
-          <a:noFill/>
-          <a:ln w="0">
-            <a:noFill/>
-          </a:ln>
-        </p:spPr>
-      </p:pic>
-      <p:pic>
-        <p:nvPicPr>
-          <p:cNvPr id="202" name="Google Shape;204;p 3"/>
-          <p:cNvPicPr/>
-          <p:nvPr/>
-        </p:nvPicPr>
-        <p:blipFill>
-          <a:blip r:embed="rId3"/>
-          <a:stretch/>
-        </p:blipFill>
-        <p:spPr>
-          <a:xfrm>
-            <a:off x="5929560" y="1905120"/>
-            <a:ext cx="333000" cy="380520"/>
-          </a:xfrm>
-          <a:prstGeom prst="rect">
-            <a:avLst/>
-          </a:prstGeom>
-          <a:noFill/>
-          <a:ln w="0">
-            <a:noFill/>
-          </a:ln>
-        </p:spPr>
-      </p:pic>
-      <p:sp>
-        <p:nvSpPr>
-          <p:cNvPr id="203" name="Google Shape;205;p 3"/>
-          <p:cNvSpPr/>
-          <p:nvPr/>
-        </p:nvSpPr>
-        <p:spPr>
-          <a:xfrm>
-            <a:off x="3585960" y="2428920"/>
-            <a:ext cx="5020200" cy="366120"/>
+            <a:ext cx="5590440" cy="366120"/>
           </a:xfrm>
           <a:prstGeom prst="rect">
             <a:avLst/>
@@ -11023,7 +10633,7 @@
             <a:spAutoFit/>
           </a:bodyPr>
           <a:p>
-            <a:pPr algn="ctr">
+            <a:pPr>
               <a:lnSpc>
                 <a:spcPct val="100000"/>
               </a:lnSpc>
@@ -11041,7 +10651,7 @@
                 <a:latin typeface="Cinzel"/>
                 <a:ea typeface="Cinzel"/>
               </a:rPr>
-              <a:t>Elif Statements</a:t>
+              <a:t>Code</a:t>
             </a:r>
             <a:endParaRPr lang="en-US" sz="2400" b="0" u="none" strike="noStrike">
               <a:solidFill>
@@ -11056,14 +10666,14 @@
       </p:sp>
       <p:sp>
         <p:nvSpPr>
-          <p:cNvPr id="204" name="Google Shape;218;p 3"/>
+          <p:cNvPr id="199" name="Google Shape;104;p 21"/>
           <p:cNvSpPr/>
           <p:nvPr/>
         </p:nvSpPr>
         <p:spPr>
           <a:xfrm>
-            <a:off x="581040" y="581040"/>
-            <a:ext cx="11581200" cy="480240"/>
+            <a:off x="581040" y="2162160"/>
+            <a:ext cx="9879120" cy="3427560"/>
           </a:xfrm>
           <a:prstGeom prst="rect">
             <a:avLst/>
@@ -11084,54 +10694,382 @@
             <a:spAutoFit/>
           </a:bodyPr>
           <a:p>
-            <a:pPr>
-              <a:lnSpc>
-                <a:spcPct val="100000"/>
-              </a:lnSpc>
-              <a:tabLst>
-                <a:tab pos="0" algn="l"/>
-              </a:tabLst>
-            </a:pPr>
-            <a:r>
-              <a:rPr lang="en-US" sz="3150" b="1" u="none" strike="noStrike">
-                <a:solidFill>
-                  <a:srgbClr val="C5A059"/>
-                </a:solidFill>
-                <a:effectLst/>
-                <a:uFillTx/>
-                <a:latin typeface="Cinzel"/>
-                <a:ea typeface="Cinzel"/>
-              </a:rPr>
-              <a:t>THE HIDDEN RUNES: elif Statements</a:t>
-            </a:r>
-            <a:endParaRPr lang="en-US" sz="3150" b="0" u="none" strike="noStrike">
-              <a:solidFill>
-                <a:srgbClr val="FFFFFF"/>
-              </a:solidFill>
-              <a:effectLst/>
-              <a:uFillTx/>
-              <a:latin typeface="Arial"/>
-            </a:endParaRPr>
-          </a:p>
-        </p:txBody>
-      </p:sp>
-      <p:sp>
-        <p:nvSpPr>
-          <p:cNvPr id="205" name="Google Shape;219;p 3"/>
+            <a:pPr marL="216000" indent="-216000">
+              <a:lnSpc>
+                <a:spcPct val="150000"/>
+              </a:lnSpc>
+              <a:buClr>
+                <a:srgbClr val="FFFFFF"/>
+              </a:buClr>
+              <a:buSzPct val="45000"/>
+              <a:buFont typeface="Wingdings" charset="2"/>
+              <a:buChar char=""/>
+              <a:tabLst>
+                <a:tab pos="0" algn="l"/>
+              </a:tabLst>
+            </a:pPr>
+            <a:r>
+              <a:rPr lang="en-US" sz="1500" b="0" u="none" strike="noStrike">
+                <a:solidFill>
+                  <a:srgbClr val="D1D1D1"/>
+                </a:solidFill>
+                <a:effectLst/>
+                <a:uFillTx/>
+                <a:latin typeface="Lato"/>
+                <a:ea typeface="Lato"/>
+              </a:rPr>
+              <a:t>Open the file </a:t>
+            </a:r>
+            <a:r>
+              <a:rPr lang="en-US" sz="1500" b="0" i="1" u="none" strike="noStrike">
+                <a:solidFill>
+                  <a:srgbClr val="D1D1D1"/>
+                </a:solidFill>
+                <a:effectLst/>
+                <a:uFillTx/>
+                <a:latin typeface="Lato"/>
+                <a:ea typeface="Lato"/>
+              </a:rPr>
+              <a:t>Step6.py</a:t>
+            </a:r>
+            <a:endParaRPr lang="en-US" sz="1500" b="0" u="none" strike="noStrike">
+              <a:solidFill>
+                <a:srgbClr val="FFFFFF"/>
+              </a:solidFill>
+              <a:effectLst/>
+              <a:uFillTx/>
+              <a:latin typeface="Arial"/>
+            </a:endParaRPr>
+          </a:p>
+          <a:p>
+            <a:pPr marL="216000" indent="-216000">
+              <a:lnSpc>
+                <a:spcPct val="150000"/>
+              </a:lnSpc>
+              <a:buClr>
+                <a:srgbClr val="FFFFFF"/>
+              </a:buClr>
+              <a:buSzPct val="45000"/>
+              <a:buFont typeface="Wingdings" charset="2"/>
+              <a:buChar char=""/>
+              <a:tabLst>
+                <a:tab pos="0" algn="l"/>
+              </a:tabLst>
+            </a:pPr>
+            <a:r>
+              <a:rPr lang="en-US" sz="1500" b="0" u="none" strike="noStrike">
+                <a:solidFill>
+                  <a:srgbClr val="D1D1D1"/>
+                </a:solidFill>
+                <a:effectLst/>
+                <a:uFillTx/>
+                <a:latin typeface="Lato"/>
+                <a:ea typeface="Lato"/>
+              </a:rPr>
+              <a:t>Click File &gt; Save As</a:t>
+            </a:r>
+            <a:endParaRPr lang="en-US" sz="1500" b="0" u="none" strike="noStrike">
+              <a:solidFill>
+                <a:srgbClr val="FFFFFF"/>
+              </a:solidFill>
+              <a:effectLst/>
+              <a:uFillTx/>
+              <a:latin typeface="Arial"/>
+            </a:endParaRPr>
+          </a:p>
+          <a:p>
+            <a:pPr marL="216000" indent="-216000">
+              <a:lnSpc>
+                <a:spcPct val="150000"/>
+              </a:lnSpc>
+              <a:buClr>
+                <a:srgbClr val="FFFFFF"/>
+              </a:buClr>
+              <a:buSzPct val="45000"/>
+              <a:buFont typeface="Wingdings" charset="2"/>
+              <a:buChar char=""/>
+              <a:tabLst>
+                <a:tab pos="0" algn="l"/>
+              </a:tabLst>
+            </a:pPr>
+            <a:r>
+              <a:rPr lang="en-US" sz="1500" b="0" u="none" strike="noStrike">
+                <a:solidFill>
+                  <a:srgbClr val="D1D1D1"/>
+                </a:solidFill>
+                <a:effectLst/>
+                <a:uFillTx/>
+                <a:latin typeface="Lato"/>
+                <a:ea typeface="Lato"/>
+              </a:rPr>
+              <a:t>Save the file as </a:t>
+            </a:r>
+            <a:r>
+              <a:rPr lang="en-US" sz="1500" b="0" i="1" u="none" strike="noStrike">
+                <a:solidFill>
+                  <a:srgbClr val="D1D1D1"/>
+                </a:solidFill>
+                <a:effectLst/>
+                <a:uFillTx/>
+                <a:latin typeface="Lato"/>
+                <a:ea typeface="Lato"/>
+              </a:rPr>
+              <a:t>Step7.py</a:t>
+            </a:r>
+            <a:endParaRPr lang="en-US" sz="1500" b="0" u="none" strike="noStrike">
+              <a:solidFill>
+                <a:srgbClr val="FFFFFF"/>
+              </a:solidFill>
+              <a:effectLst/>
+              <a:uFillTx/>
+              <a:latin typeface="Arial"/>
+            </a:endParaRPr>
+          </a:p>
+          <a:p>
+            <a:pPr marL="216000" indent="-216000">
+              <a:lnSpc>
+                <a:spcPct val="150000"/>
+              </a:lnSpc>
+              <a:buClr>
+                <a:srgbClr val="FFFFFF"/>
+              </a:buClr>
+              <a:buSzPct val="45000"/>
+              <a:buFont typeface="Wingdings" charset="2"/>
+              <a:buChar char=""/>
+              <a:tabLst>
+                <a:tab pos="0" algn="l"/>
+              </a:tabLst>
+            </a:pPr>
+            <a:r>
+              <a:rPr lang="en-US" sz="1500" b="0" u="none" strike="noStrike">
+                <a:solidFill>
+                  <a:srgbClr val="D1D1D1"/>
+                </a:solidFill>
+                <a:effectLst/>
+                <a:uFillTx/>
+                <a:latin typeface="Lato"/>
+                <a:ea typeface="Lato"/>
+              </a:rPr>
+              <a:t>After </a:t>
+            </a:r>
+            <a:r>
+              <a:rPr lang="en-US" sz="1500" b="0" i="1" u="none" strike="noStrike">
+                <a:solidFill>
+                  <a:srgbClr val="D1D1D1"/>
+                </a:solidFill>
+                <a:effectLst/>
+                <a:uFillTx/>
+                <a:latin typeface="Lato"/>
+                <a:ea typeface="Lato"/>
+              </a:rPr>
+              <a:t>import random</a:t>
+            </a:r>
+            <a:r>
+              <a:rPr lang="en-US" sz="1500" b="0" u="none" strike="noStrike">
+                <a:solidFill>
+                  <a:srgbClr val="D1D1D1"/>
+                </a:solidFill>
+                <a:effectLst/>
+                <a:uFillTx/>
+                <a:latin typeface="Lato"/>
+                <a:ea typeface="Lato"/>
+              </a:rPr>
+              <a:t>, add a line with the variable </a:t>
+            </a:r>
+            <a:r>
+              <a:rPr lang="en-US" sz="1500" b="0" i="1" u="none" strike="noStrike">
+                <a:solidFill>
+                  <a:srgbClr val="D1D1D1"/>
+                </a:solidFill>
+                <a:effectLst/>
+                <a:uFillTx/>
+                <a:latin typeface="Lato"/>
+                <a:ea typeface="Lato"/>
+              </a:rPr>
+              <a:t>player_name</a:t>
+            </a:r>
+            <a:r>
+              <a:rPr lang="en-US" sz="1500" b="0" u="none" strike="noStrike">
+                <a:solidFill>
+                  <a:srgbClr val="D1D1D1"/>
+                </a:solidFill>
+                <a:effectLst/>
+                <a:uFillTx/>
+                <a:latin typeface="Lato"/>
+                <a:ea typeface="Lato"/>
+              </a:rPr>
+              <a:t> using input asking the player’s name, the variable to lower case</a:t>
+            </a:r>
+            <a:endParaRPr lang="en-US" sz="1500" b="0" u="none" strike="noStrike">
+              <a:solidFill>
+                <a:srgbClr val="FFFFFF"/>
+              </a:solidFill>
+              <a:effectLst/>
+              <a:uFillTx/>
+              <a:latin typeface="Arial"/>
+            </a:endParaRPr>
+          </a:p>
+          <a:p>
+            <a:pPr marL="216000" indent="-216000">
+              <a:lnSpc>
+                <a:spcPct val="150000"/>
+              </a:lnSpc>
+              <a:buClr>
+                <a:srgbClr val="FFFFFF"/>
+              </a:buClr>
+              <a:buSzPct val="45000"/>
+              <a:buFont typeface="Wingdings" charset="2"/>
+              <a:buChar char=""/>
+              <a:tabLst>
+                <a:tab pos="0" algn="l"/>
+              </a:tabLst>
+            </a:pPr>
+            <a:r>
+              <a:rPr lang="en-US" sz="1500" b="0" u="none" strike="noStrike">
+                <a:solidFill>
+                  <a:srgbClr val="D1D1D1"/>
+                </a:solidFill>
+                <a:effectLst/>
+                <a:uFillTx/>
+                <a:latin typeface="Lato"/>
+                <a:ea typeface="Lato"/>
+              </a:rPr>
+              <a:t>Under the first beast battle, under the else statement, nest an if/else statement where it checks if the value of player_name is “justin”</a:t>
+            </a:r>
+            <a:endParaRPr lang="en-US" sz="1500" b="0" u="none" strike="noStrike">
+              <a:solidFill>
+                <a:srgbClr val="FFFFFF"/>
+              </a:solidFill>
+              <a:effectLst/>
+              <a:uFillTx/>
+              <a:latin typeface="Arial"/>
+            </a:endParaRPr>
+          </a:p>
+          <a:p>
+            <a:pPr marL="432000" lvl="1" indent="-216000">
+              <a:lnSpc>
+                <a:spcPct val="150000"/>
+              </a:lnSpc>
+              <a:buClr>
+                <a:srgbClr val="FFFFFF"/>
+              </a:buClr>
+              <a:buSzPct val="45000"/>
+              <a:buFont typeface="Wingdings" charset="2"/>
+              <a:buChar char=""/>
+              <a:tabLst>
+                <a:tab pos="0" algn="l"/>
+              </a:tabLst>
+            </a:pPr>
+            <a:r>
+              <a:rPr lang="en-US" sz="1500" b="0" u="none" strike="noStrike">
+                <a:solidFill>
+                  <a:srgbClr val="D1D1D1"/>
+                </a:solidFill>
+                <a:effectLst/>
+                <a:uFillTx/>
+                <a:latin typeface="Lato"/>
+                <a:ea typeface="Lato"/>
+              </a:rPr>
+              <a:t>If the name is justin, let them win</a:t>
+            </a:r>
+            <a:endParaRPr lang="en-US" sz="1500" b="0" u="none" strike="noStrike">
+              <a:solidFill>
+                <a:srgbClr val="FFFFFF"/>
+              </a:solidFill>
+              <a:effectLst/>
+              <a:uFillTx/>
+              <a:latin typeface="Arial"/>
+            </a:endParaRPr>
+          </a:p>
+          <a:p>
+            <a:pPr marL="432000" lvl="1" indent="-216000">
+              <a:lnSpc>
+                <a:spcPct val="150000"/>
+              </a:lnSpc>
+              <a:buClr>
+                <a:srgbClr val="FFFFFF"/>
+              </a:buClr>
+              <a:buSzPct val="45000"/>
+              <a:buFont typeface="Wingdings" charset="2"/>
+              <a:buChar char=""/>
+              <a:tabLst>
+                <a:tab pos="0" algn="l"/>
+              </a:tabLst>
+            </a:pPr>
+            <a:r>
+              <a:rPr lang="en-US" sz="1500" b="0" u="none" strike="noStrike">
+                <a:solidFill>
+                  <a:srgbClr val="D1D1D1"/>
+                </a:solidFill>
+                <a:effectLst/>
+                <a:uFillTx/>
+                <a:latin typeface="Lato"/>
+                <a:ea typeface="Lato"/>
+              </a:rPr>
+              <a:t>If the name isn’t justin, then use the existing else “you died” sequence”</a:t>
+            </a:r>
+            <a:endParaRPr lang="en-US" sz="1500" b="0" u="none" strike="noStrike">
+              <a:solidFill>
+                <a:srgbClr val="FFFFFF"/>
+              </a:solidFill>
+              <a:effectLst/>
+              <a:uFillTx/>
+              <a:latin typeface="Arial"/>
+            </a:endParaRPr>
+          </a:p>
+          <a:p>
+            <a:pPr marL="216000" indent="-216000">
+              <a:lnSpc>
+                <a:spcPct val="150000"/>
+              </a:lnSpc>
+              <a:buClr>
+                <a:srgbClr val="FFFFFF"/>
+              </a:buClr>
+              <a:buSzPct val="45000"/>
+              <a:buFont typeface="Wingdings" charset="2"/>
+              <a:buChar char=""/>
+              <a:tabLst>
+                <a:tab pos="0" algn="l"/>
+              </a:tabLst>
+            </a:pPr>
+            <a:r>
+              <a:rPr lang="en-US" sz="1500" b="0" u="none" strike="noStrike">
+                <a:solidFill>
+                  <a:srgbClr val="D1D1D1"/>
+                </a:solidFill>
+                <a:effectLst/>
+                <a:uFillTx/>
+                <a:latin typeface="Lato"/>
+                <a:ea typeface="Lato"/>
+              </a:rPr>
+              <a:t>Copy and paste this code into the boss battle</a:t>
+            </a:r>
+            <a:endParaRPr lang="en-US" sz="1500" b="0" u="none" strike="noStrike">
+              <a:solidFill>
+                <a:srgbClr val="FFFFFF"/>
+              </a:solidFill>
+              <a:effectLst/>
+              <a:uFillTx/>
+              <a:latin typeface="Arial"/>
+            </a:endParaRPr>
+          </a:p>
+        </p:txBody>
+      </p:sp>
+      <p:sp>
+        <p:nvSpPr>
+          <p:cNvPr id="200" name="Google Shape;113;p 12"/>
           <p:cNvSpPr/>
           <p:nvPr/>
         </p:nvSpPr>
         <p:spPr>
           <a:xfrm>
-            <a:off x="581040" y="1219320"/>
-            <a:ext cx="11029680" cy="9000"/>
-          </a:xfrm>
-          <a:prstGeom prst="rect">
-            <a:avLst/>
-          </a:prstGeom>
-          <a:solidFill>
-            <a:srgbClr val="3D3422"/>
-          </a:solidFill>
+            <a:off x="581040" y="581040"/>
+            <a:ext cx="11581200" cy="480240"/>
+          </a:xfrm>
+          <a:prstGeom prst="rect">
+            <a:avLst/>
+          </a:prstGeom>
+          <a:noFill/>
           <a:ln w="0">
             <a:noFill/>
           </a:ln>
@@ -11143,36 +11081,58 @@
           <a:fontRef idx="minor"/>
         </p:style>
         <p:txBody>
-          <a:bodyPr tIns="-36360" bIns="-36360" anchor="ctr">
-            <a:noAutofit/>
-          </a:bodyPr>
-          <a:p>
-            <a:endParaRPr lang="en-US" sz="1400" b="0" u="none" strike="noStrike">
-              <a:solidFill>
-                <a:srgbClr val="FFFFFF"/>
-              </a:solidFill>
-              <a:effectLst/>
-              <a:uFillTx/>
-              <a:latin typeface="Arial"/>
-            </a:endParaRPr>
-          </a:p>
-        </p:txBody>
-      </p:sp>
-      <p:sp>
-        <p:nvSpPr>
-          <p:cNvPr id="206" name="Google Shape;206;p 2"/>
+          <a:bodyPr lIns="0" tIns="0" rIns="0" bIns="0" anchor="t">
+            <a:spAutoFit/>
+          </a:bodyPr>
+          <a:p>
+            <a:pPr>
+              <a:lnSpc>
+                <a:spcPct val="100000"/>
+              </a:lnSpc>
+              <a:tabLst>
+                <a:tab pos="0" algn="l"/>
+              </a:tabLst>
+            </a:pPr>
+            <a:r>
+              <a:rPr lang="en-US" sz="3150" b="1" u="none" strike="noStrike">
+                <a:solidFill>
+                  <a:srgbClr val="C5A059"/>
+                </a:solidFill>
+                <a:effectLst/>
+                <a:uFillTx/>
+                <a:latin typeface="Cinzel"/>
+                <a:ea typeface="Cinzel"/>
+              </a:rPr>
+              <a:t>Nested If Statements: Your Turn</a:t>
+            </a:r>
+            <a:endParaRPr lang="en-US" sz="3150" b="0" u="none" strike="noStrike">
+              <a:solidFill>
+                <a:srgbClr val="FFFFFF"/>
+              </a:solidFill>
+              <a:effectLst/>
+              <a:uFillTx/>
+              <a:latin typeface="Arial"/>
+            </a:endParaRPr>
+          </a:p>
+        </p:txBody>
+      </p:sp>
+      <p:sp>
+        <p:nvSpPr>
+          <p:cNvPr id="201" name="Google Shape;114;p 12"/>
           <p:cNvSpPr/>
           <p:nvPr/>
         </p:nvSpPr>
         <p:spPr>
           <a:xfrm>
-            <a:off x="2337840" y="2865960"/>
-            <a:ext cx="7516080" cy="343080"/>
-          </a:xfrm>
-          <a:prstGeom prst="rect">
-            <a:avLst/>
-          </a:prstGeom>
-          <a:noFill/>
+            <a:off x="581040" y="1219320"/>
+            <a:ext cx="11029680" cy="9000"/>
+          </a:xfrm>
+          <a:prstGeom prst="rect">
+            <a:avLst/>
+          </a:prstGeom>
+          <a:solidFill>
+            <a:srgbClr val="3D3422"/>
+          </a:solidFill>
           <a:ln w="0">
             <a:noFill/>
           </a:ln>
@@ -11184,14 +11144,122 @@
           <a:fontRef idx="minor"/>
         </p:style>
         <p:txBody>
+          <a:bodyPr tIns="-36360" bIns="-36360" anchor="ctr">
+            <a:noAutofit/>
+          </a:bodyPr>
+          <a:p>
+            <a:endParaRPr lang="en-US" sz="1400" b="0" u="none" strike="noStrike">
+              <a:solidFill>
+                <a:srgbClr val="FFFFFF"/>
+              </a:solidFill>
+              <a:effectLst/>
+              <a:uFillTx/>
+              <a:latin typeface="Arial"/>
+            </a:endParaRPr>
+          </a:p>
+        </p:txBody>
+      </p:sp>
+      <p:sp>
+        <p:nvSpPr>
+          <p:cNvPr id="202" name="Google Shape;103;p 24"/>
+          <p:cNvSpPr/>
+          <p:nvPr/>
+        </p:nvSpPr>
+        <p:spPr>
+          <a:xfrm>
+            <a:off x="6045120" y="5316120"/>
+            <a:ext cx="5590440" cy="366120"/>
+          </a:xfrm>
+          <a:prstGeom prst="rect">
+            <a:avLst/>
+          </a:prstGeom>
+          <a:noFill/>
+          <a:ln w="0">
+            <a:noFill/>
+          </a:ln>
+        </p:spPr>
+        <p:style>
+          <a:lnRef idx="0"/>
+          <a:fillRef idx="0"/>
+          <a:effectRef idx="0"/>
+          <a:fontRef idx="minor"/>
+        </p:style>
+        <p:txBody>
           <a:bodyPr lIns="0" tIns="0" rIns="0" bIns="0" anchor="t">
             <a:spAutoFit/>
           </a:bodyPr>
           <a:p>
-            <a:pPr algn="ctr">
+            <a:pPr>
+              <a:lnSpc>
+                <a:spcPct val="100000"/>
+              </a:lnSpc>
+              <a:tabLst>
+                <a:tab pos="0" algn="l"/>
+              </a:tabLst>
+            </a:pPr>
+            <a:r>
+              <a:rPr lang="en-US" sz="2400" b="1" u="none" strike="noStrike">
+                <a:solidFill>
+                  <a:srgbClr val="F5F5F5"/>
+                </a:solidFill>
+                <a:effectLst/>
+                <a:uFillTx/>
+                <a:latin typeface="Cinzel"/>
+                <a:ea typeface="Cinzel"/>
+              </a:rPr>
+              <a:t>Running your Code</a:t>
+            </a:r>
+            <a:endParaRPr lang="en-US" sz="2400" b="0" u="none" strike="noStrike">
+              <a:solidFill>
+                <a:srgbClr val="FFFFFF"/>
+              </a:solidFill>
+              <a:effectLst/>
+              <a:uFillTx/>
+              <a:latin typeface="Arial"/>
+            </a:endParaRPr>
+          </a:p>
+        </p:txBody>
+      </p:sp>
+      <p:sp>
+        <p:nvSpPr>
+          <p:cNvPr id="203" name="Google Shape;104;p 23"/>
+          <p:cNvSpPr/>
+          <p:nvPr/>
+        </p:nvSpPr>
+        <p:spPr>
+          <a:xfrm>
+            <a:off x="6045120" y="5682240"/>
+            <a:ext cx="9879120" cy="685800"/>
+          </a:xfrm>
+          <a:prstGeom prst="rect">
+            <a:avLst/>
+          </a:prstGeom>
+          <a:noFill/>
+          <a:ln w="0">
+            <a:noFill/>
+          </a:ln>
+        </p:spPr>
+        <p:style>
+          <a:lnRef idx="0"/>
+          <a:fillRef idx="0"/>
+          <a:effectRef idx="0"/>
+          <a:fontRef idx="minor"/>
+        </p:style>
+        <p:txBody>
+          <a:bodyPr lIns="0" tIns="0" rIns="0" bIns="0" anchor="t">
+            <a:spAutoFit/>
+          </a:bodyPr>
+          <a:p>
+            <a:pPr marL="216000" indent="-216000">
               <a:lnSpc>
                 <a:spcPct val="150000"/>
               </a:lnSpc>
+              <a:buClr>
+                <a:srgbClr val="FFFFFF"/>
+              </a:buClr>
+              <a:buSzPct val="45000"/>
+              <a:buFont typeface="Wingdings" charset="2"/>
+              <a:buChar char=""/>
               <a:tabLst>
                 <a:tab pos="0" algn="l"/>
               </a:tabLst>
@@ -11206,7 +11274,7 @@
                 <a:latin typeface="Lato"/>
                 <a:ea typeface="Lato"/>
               </a:rPr>
-              <a:t>The other option for an if statement is called elif</a:t>
+              <a:t>Open the terminal if it is not yet:</a:t>
             </a:r>
             <a:endParaRPr lang="en-US" sz="1500" b="0" u="none" strike="noStrike">
               <a:solidFill>
@@ -11217,32 +11285,44 @@
               <a:latin typeface="Arial"/>
             </a:endParaRPr>
           </a:p>
-        </p:txBody>
-      </p:sp>
-      <p:pic>
-        <p:nvPicPr>
-          <p:cNvPr id="207" name=""/>
-          <p:cNvPicPr/>
-          <p:nvPr/>
-        </p:nvPicPr>
-        <p:blipFill>
-          <a:blip r:embed="rId4"/>
-          <a:stretch/>
-        </p:blipFill>
-        <p:spPr>
-          <a:xfrm>
-            <a:off x="4235760" y="3540240"/>
-            <a:ext cx="3876480" cy="1837800"/>
-          </a:xfrm>
-          <a:prstGeom prst="rect">
-            <a:avLst/>
-          </a:prstGeom>
-          <a:noFill/>
-          <a:ln w="0">
-            <a:noFill/>
-          </a:ln>
-        </p:spPr>
-      </p:pic>
+          <a:p>
+            <a:pPr marL="216000" indent="-216000">
+              <a:lnSpc>
+                <a:spcPct val="150000"/>
+              </a:lnSpc>
+              <a:buClr>
+                <a:srgbClr val="FFFFFF"/>
+              </a:buClr>
+              <a:buSzPct val="45000"/>
+              <a:buFont typeface="Wingdings" charset="2"/>
+              <a:buChar char=""/>
+              <a:tabLst>
+                <a:tab pos="0" algn="l"/>
+              </a:tabLst>
+            </a:pPr>
+            <a:r>
+              <a:rPr lang="en-US" sz="1500" b="0" u="none" strike="noStrike">
+                <a:solidFill>
+                  <a:srgbClr val="D1D1D1"/>
+                </a:solidFill>
+                <a:effectLst/>
+                <a:uFillTx/>
+                <a:latin typeface="Lato"/>
+                <a:ea typeface="Lato"/>
+              </a:rPr>
+              <a:t>Run the program: python Step7.py</a:t>
+            </a:r>
+            <a:endParaRPr lang="en-US" sz="1500" b="0" u="none" strike="noStrike">
+              <a:solidFill>
+                <a:srgbClr val="FFFFFF"/>
+              </a:solidFill>
+              <a:effectLst/>
+              <a:uFillTx/>
+              <a:latin typeface="Arial"/>
+            </a:endParaRPr>
+          </a:p>
+        </p:txBody>
+      </p:sp>
     </p:spTree>
   </p:cSld>
   <mc:AlternateContent>
@@ -11280,16 +11360,88 @@
           <a:chExt cx="0" cy="0"/>
         </a:xfrm>
       </p:grpSpPr>
-      <p:sp>
-        <p:nvSpPr>
-          <p:cNvPr id="208" name="Google Shape;103;p 23"/>
+      <p:pic>
+        <p:nvPicPr>
+          <p:cNvPr id="204" name="Google Shape;199;p 2"/>
+          <p:cNvPicPr/>
+          <p:nvPr/>
+        </p:nvPicPr>
+        <p:blipFill>
+          <a:blip r:embed="rId1"/>
+          <a:stretch/>
+        </p:blipFill>
+        <p:spPr>
+          <a:xfrm>
+            <a:off x="0" y="0"/>
+            <a:ext cx="12191760" cy="6857640"/>
+          </a:xfrm>
+          <a:prstGeom prst="rect">
+            <a:avLst/>
+          </a:prstGeom>
+          <a:noFill/>
+          <a:ln w="0">
+            <a:noFill/>
+          </a:ln>
+        </p:spPr>
+      </p:pic>
+      <p:pic>
+        <p:nvPicPr>
+          <p:cNvPr id="205" name="Google Shape;200;p 2"/>
+          <p:cNvPicPr/>
+          <p:nvPr/>
+        </p:nvPicPr>
+        <p:blipFill>
+          <a:blip r:embed="rId2"/>
+          <a:stretch/>
+        </p:blipFill>
+        <p:spPr>
+          <a:xfrm>
+            <a:off x="581040" y="1609560"/>
+            <a:ext cx="11074320" cy="4849920"/>
+          </a:xfrm>
+          <a:prstGeom prst="rect">
+            <a:avLst/>
+          </a:prstGeom>
+          <a:noFill/>
+          <a:ln w="0">
+            <a:noFill/>
+          </a:ln>
+        </p:spPr>
+      </p:pic>
+      <p:pic>
+        <p:nvPicPr>
+          <p:cNvPr id="206" name="Google Shape;204;p 3"/>
+          <p:cNvPicPr/>
+          <p:nvPr/>
+        </p:nvPicPr>
+        <p:blipFill>
+          <a:blip r:embed="rId3"/>
+          <a:stretch/>
+        </p:blipFill>
+        <p:spPr>
+          <a:xfrm>
+            <a:off x="5929560" y="1905120"/>
+            <a:ext cx="333000" cy="380520"/>
+          </a:xfrm>
+          <a:prstGeom prst="rect">
+            <a:avLst/>
+          </a:prstGeom>
+          <a:noFill/>
+          <a:ln w="0">
+            <a:noFill/>
+          </a:ln>
+        </p:spPr>
+      </p:pic>
+      <p:sp>
+        <p:nvSpPr>
+          <p:cNvPr id="207" name="Google Shape;205;p 3"/>
           <p:cNvSpPr/>
           <p:nvPr/>
         </p:nvSpPr>
         <p:spPr>
           <a:xfrm>
-            <a:off x="581040" y="1609560"/>
-            <a:ext cx="5590440" cy="366120"/>
+            <a:off x="3585960" y="2428920"/>
+            <a:ext cx="5020200" cy="366120"/>
           </a:xfrm>
           <a:prstGeom prst="rect">
             <a:avLst/>
@@ -11310,7 +11462,7 @@
             <a:spAutoFit/>
           </a:bodyPr>
           <a:p>
-            <a:pPr>
+            <a:pPr algn="ctr">
               <a:lnSpc>
                 <a:spcPct val="100000"/>
               </a:lnSpc>
@@ -11328,7 +11480,7 @@
                 <a:latin typeface="Cinzel"/>
                 <a:ea typeface="Cinzel"/>
               </a:rPr>
-              <a:t>Code</a:t>
+              <a:t>Elif Statements</a:t>
             </a:r>
             <a:endParaRPr lang="en-US" sz="2400" b="0" u="none" strike="noStrike">
               <a:solidFill>
@@ -11343,14 +11495,14 @@
       </p:sp>
       <p:sp>
         <p:nvSpPr>
-          <p:cNvPr id="209" name="Google Shape;104;p 22"/>
+          <p:cNvPr id="208" name="Google Shape;218;p 3"/>
           <p:cNvSpPr/>
           <p:nvPr/>
         </p:nvSpPr>
         <p:spPr>
           <a:xfrm>
-            <a:off x="581040" y="2162160"/>
-            <a:ext cx="9879120" cy="2056680"/>
+            <a:off x="581040" y="581040"/>
+            <a:ext cx="11581200" cy="480240"/>
           </a:xfrm>
           <a:prstGeom prst="rect">
             <a:avLst/>
@@ -11371,250 +11523,54 @@
             <a:spAutoFit/>
           </a:bodyPr>
           <a:p>
-            <a:pPr marL="216000" indent="-216000">
-              <a:lnSpc>
-                <a:spcPct val="150000"/>
-              </a:lnSpc>
-              <a:buClr>
-                <a:srgbClr val="FFFFFF"/>
-              </a:buClr>
-              <a:buSzPct val="45000"/>
-              <a:buFont typeface="Wingdings" charset="2"/>
-              <a:buChar char=""/>
-              <a:tabLst>
-                <a:tab pos="0" algn="l"/>
-              </a:tabLst>
-            </a:pPr>
-            <a:r>
-              <a:rPr lang="en-US" sz="1500" b="0" u="none" strike="noStrike">
-                <a:solidFill>
-                  <a:srgbClr val="D1D1D1"/>
-                </a:solidFill>
-                <a:effectLst/>
-                <a:uFillTx/>
-                <a:latin typeface="Lato"/>
-                <a:ea typeface="Lato"/>
-              </a:rPr>
-              <a:t>Open the file </a:t>
-            </a:r>
-            <a:r>
-              <a:rPr lang="en-US" sz="1500" b="0" i="1" u="none" strike="noStrike">
-                <a:solidFill>
-                  <a:srgbClr val="D1D1D1"/>
-                </a:solidFill>
-                <a:effectLst/>
-                <a:uFillTx/>
-                <a:latin typeface="Lato"/>
-                <a:ea typeface="Lato"/>
-              </a:rPr>
-              <a:t>Step7.py</a:t>
-            </a:r>
-            <a:endParaRPr lang="en-US" sz="1500" b="0" u="none" strike="noStrike">
-              <a:solidFill>
-                <a:srgbClr val="FFFFFF"/>
-              </a:solidFill>
-              <a:effectLst/>
-              <a:uFillTx/>
-              <a:latin typeface="Arial"/>
-            </a:endParaRPr>
-          </a:p>
-          <a:p>
-            <a:pPr marL="216000" indent="-216000">
-              <a:lnSpc>
-                <a:spcPct val="150000"/>
-              </a:lnSpc>
-              <a:buClr>
-                <a:srgbClr val="FFFFFF"/>
-              </a:buClr>
-              <a:buSzPct val="45000"/>
-              <a:buFont typeface="Wingdings" charset="2"/>
-              <a:buChar char=""/>
-              <a:tabLst>
-                <a:tab pos="0" algn="l"/>
-              </a:tabLst>
-            </a:pPr>
-            <a:r>
-              <a:rPr lang="en-US" sz="1500" b="0" u="none" strike="noStrike">
-                <a:solidFill>
-                  <a:srgbClr val="D1D1D1"/>
-                </a:solidFill>
-                <a:effectLst/>
-                <a:uFillTx/>
-                <a:latin typeface="Lato"/>
-                <a:ea typeface="Lato"/>
-              </a:rPr>
-              <a:t>Click File &gt; Save As</a:t>
-            </a:r>
-            <a:endParaRPr lang="en-US" sz="1500" b="0" u="none" strike="noStrike">
-              <a:solidFill>
-                <a:srgbClr val="FFFFFF"/>
-              </a:solidFill>
-              <a:effectLst/>
-              <a:uFillTx/>
-              <a:latin typeface="Arial"/>
-            </a:endParaRPr>
-          </a:p>
-          <a:p>
-            <a:pPr marL="216000" indent="-216000">
-              <a:lnSpc>
-                <a:spcPct val="150000"/>
-              </a:lnSpc>
-              <a:buClr>
-                <a:srgbClr val="FFFFFF"/>
-              </a:buClr>
-              <a:buSzPct val="45000"/>
-              <a:buFont typeface="Wingdings" charset="2"/>
-              <a:buChar char=""/>
-              <a:tabLst>
-                <a:tab pos="0" algn="l"/>
-              </a:tabLst>
-            </a:pPr>
-            <a:r>
-              <a:rPr lang="en-US" sz="1500" b="0" u="none" strike="noStrike">
-                <a:solidFill>
-                  <a:srgbClr val="D1D1D1"/>
-                </a:solidFill>
-                <a:effectLst/>
-                <a:uFillTx/>
-                <a:latin typeface="Lato"/>
-                <a:ea typeface="Lato"/>
-              </a:rPr>
-              <a:t>Save the file as </a:t>
-            </a:r>
-            <a:r>
-              <a:rPr lang="en-US" sz="1500" b="0" i="1" u="none" strike="noStrike">
-                <a:solidFill>
-                  <a:srgbClr val="D1D1D1"/>
-                </a:solidFill>
-                <a:effectLst/>
-                <a:uFillTx/>
-                <a:latin typeface="Lato"/>
-                <a:ea typeface="Lato"/>
-              </a:rPr>
-              <a:t>Step8.py</a:t>
-            </a:r>
-            <a:endParaRPr lang="en-US" sz="1500" b="0" u="none" strike="noStrike">
-              <a:solidFill>
-                <a:srgbClr val="FFFFFF"/>
-              </a:solidFill>
-              <a:effectLst/>
-              <a:uFillTx/>
-              <a:latin typeface="Arial"/>
-            </a:endParaRPr>
-          </a:p>
-          <a:p>
-            <a:pPr marL="216000" indent="-216000">
-              <a:lnSpc>
-                <a:spcPct val="150000"/>
-              </a:lnSpc>
-              <a:buClr>
-                <a:srgbClr val="FFFFFF"/>
-              </a:buClr>
-              <a:buSzPct val="45000"/>
-              <a:buFont typeface="Wingdings" charset="2"/>
-              <a:buChar char=""/>
-              <a:tabLst>
-                <a:tab pos="0" algn="l"/>
-              </a:tabLst>
-            </a:pPr>
-            <a:r>
-              <a:rPr lang="en-US" sz="1500" b="0" u="none" strike="noStrike">
-                <a:solidFill>
-                  <a:srgbClr val="D1D1D1"/>
-                </a:solidFill>
-                <a:effectLst/>
-                <a:uFillTx/>
-                <a:latin typeface="Lato"/>
-                <a:ea typeface="Lato"/>
-              </a:rPr>
-              <a:t>After the if statement, but before the else, add an elif code block that checks if the variable </a:t>
-            </a:r>
-            <a:r>
-              <a:rPr lang="en-US" sz="1500" b="0" i="1" u="none" strike="noStrike">
-                <a:solidFill>
-                  <a:srgbClr val="D1D1D1"/>
-                </a:solidFill>
-                <a:effectLst/>
-                <a:uFillTx/>
-                <a:latin typeface="Lato"/>
-                <a:ea typeface="Lato"/>
-              </a:rPr>
-              <a:t>player_name</a:t>
-            </a:r>
-            <a:r>
-              <a:rPr lang="en-US" sz="1500" b="0" u="none" strike="noStrike">
-                <a:solidFill>
-                  <a:srgbClr val="D1D1D1"/>
-                </a:solidFill>
-                <a:effectLst/>
-                <a:uFillTx/>
-                <a:latin typeface="Lato"/>
-                <a:ea typeface="Lato"/>
-              </a:rPr>
-              <a:t> matches your name in lower case.</a:t>
-            </a:r>
-            <a:endParaRPr lang="en-US" sz="1500" b="0" u="none" strike="noStrike">
-              <a:solidFill>
-                <a:srgbClr val="FFFFFF"/>
-              </a:solidFill>
-              <a:effectLst/>
-              <a:uFillTx/>
-              <a:latin typeface="Arial"/>
-            </a:endParaRPr>
-          </a:p>
-          <a:p>
-            <a:pPr marL="216000" indent="-216000">
-              <a:lnSpc>
-                <a:spcPct val="150000"/>
-              </a:lnSpc>
-              <a:buClr>
-                <a:srgbClr val="FFFFFF"/>
-              </a:buClr>
-              <a:buSzPct val="45000"/>
-              <a:buFont typeface="Wingdings" charset="2"/>
-              <a:buChar char=""/>
-              <a:tabLst>
-                <a:tab pos="0" algn="l"/>
-              </a:tabLst>
-            </a:pPr>
-            <a:r>
-              <a:rPr lang="en-US" sz="1500" b="0" u="none" strike="noStrike">
-                <a:solidFill>
-                  <a:srgbClr val="D1D1D1"/>
-                </a:solidFill>
-                <a:effectLst/>
-                <a:uFillTx/>
-                <a:latin typeface="Lato"/>
-                <a:ea typeface="Lato"/>
-              </a:rPr>
-              <a:t>If the name matches, let yourself win! </a:t>
-            </a:r>
-            <a:endParaRPr lang="en-US" sz="1500" b="0" u="none" strike="noStrike">
-              <a:solidFill>
-                <a:srgbClr val="FFFFFF"/>
-              </a:solidFill>
-              <a:effectLst/>
-              <a:uFillTx/>
-              <a:latin typeface="Arial"/>
-            </a:endParaRPr>
-          </a:p>
-        </p:txBody>
-      </p:sp>
-      <p:sp>
-        <p:nvSpPr>
-          <p:cNvPr id="210" name="Google Shape;113;p 13"/>
+            <a:pPr>
+              <a:lnSpc>
+                <a:spcPct val="100000"/>
+              </a:lnSpc>
+              <a:tabLst>
+                <a:tab pos="0" algn="l"/>
+              </a:tabLst>
+            </a:pPr>
+            <a:r>
+              <a:rPr lang="en-US" sz="3150" b="1" u="none" strike="noStrike">
+                <a:solidFill>
+                  <a:srgbClr val="C5A059"/>
+                </a:solidFill>
+                <a:effectLst/>
+                <a:uFillTx/>
+                <a:latin typeface="Cinzel"/>
+                <a:ea typeface="Cinzel"/>
+              </a:rPr>
+              <a:t>THE HIDDEN RUNES: elif Statements</a:t>
+            </a:r>
+            <a:endParaRPr lang="en-US" sz="3150" b="0" u="none" strike="noStrike">
+              <a:solidFill>
+                <a:srgbClr val="FFFFFF"/>
+              </a:solidFill>
+              <a:effectLst/>
+              <a:uFillTx/>
+              <a:latin typeface="Arial"/>
+            </a:endParaRPr>
+          </a:p>
+        </p:txBody>
+      </p:sp>
+      <p:sp>
+        <p:nvSpPr>
+          <p:cNvPr id="209" name="Google Shape;219;p 3"/>
           <p:cNvSpPr/>
           <p:nvPr/>
         </p:nvSpPr>
         <p:spPr>
           <a:xfrm>
-            <a:off x="581040" y="581040"/>
-            <a:ext cx="11581200" cy="480240"/>
-          </a:xfrm>
-          <a:prstGeom prst="rect">
-            <a:avLst/>
-          </a:prstGeom>
-          <a:noFill/>
+            <a:off x="581040" y="1219320"/>
+            <a:ext cx="11029680" cy="9000"/>
+          </a:xfrm>
+          <a:prstGeom prst="rect">
+            <a:avLst/>
+          </a:prstGeom>
+          <a:solidFill>
+            <a:srgbClr val="3D3422"/>
+          </a:solidFill>
           <a:ln w="0">
             <a:noFill/>
           </a:ln>
@@ -11626,58 +11582,36 @@
           <a:fontRef idx="minor"/>
         </p:style>
         <p:txBody>
-          <a:bodyPr lIns="0" tIns="0" rIns="0" bIns="0" anchor="t">
-            <a:spAutoFit/>
-          </a:bodyPr>
-          <a:p>
-            <a:pPr>
-              <a:lnSpc>
-                <a:spcPct val="100000"/>
-              </a:lnSpc>
-              <a:tabLst>
-                <a:tab pos="0" algn="l"/>
-              </a:tabLst>
-            </a:pPr>
-            <a:r>
-              <a:rPr lang="en-US" sz="3150" b="1" u="none" strike="noStrike">
-                <a:solidFill>
-                  <a:srgbClr val="C5A059"/>
-                </a:solidFill>
-                <a:effectLst/>
-                <a:uFillTx/>
-                <a:latin typeface="Cinzel"/>
-                <a:ea typeface="Cinzel"/>
-              </a:rPr>
-              <a:t>Elif Statements: Your Turn</a:t>
-            </a:r>
-            <a:endParaRPr lang="en-US" sz="3150" b="0" u="none" strike="noStrike">
-              <a:solidFill>
-                <a:srgbClr val="FFFFFF"/>
-              </a:solidFill>
-              <a:effectLst/>
-              <a:uFillTx/>
-              <a:latin typeface="Arial"/>
-            </a:endParaRPr>
-          </a:p>
-        </p:txBody>
-      </p:sp>
-      <p:sp>
-        <p:nvSpPr>
-          <p:cNvPr id="211" name="Google Shape;114;p 13"/>
+          <a:bodyPr tIns="-36360" bIns="-36360" anchor="ctr">
+            <a:noAutofit/>
+          </a:bodyPr>
+          <a:p>
+            <a:endParaRPr lang="en-US" sz="1400" b="0" u="none" strike="noStrike">
+              <a:solidFill>
+                <a:srgbClr val="FFFFFF"/>
+              </a:solidFill>
+              <a:effectLst/>
+              <a:uFillTx/>
+              <a:latin typeface="Arial"/>
+            </a:endParaRPr>
+          </a:p>
+        </p:txBody>
+      </p:sp>
+      <p:sp>
+        <p:nvSpPr>
+          <p:cNvPr id="210" name="Google Shape;206;p 2"/>
           <p:cNvSpPr/>
           <p:nvPr/>
         </p:nvSpPr>
         <p:spPr>
           <a:xfrm>
-            <a:off x="581040" y="1219320"/>
-            <a:ext cx="11029680" cy="9000"/>
-          </a:xfrm>
-          <a:prstGeom prst="rect">
-            <a:avLst/>
-          </a:prstGeom>
-          <a:solidFill>
-            <a:srgbClr val="3D3422"/>
-          </a:solidFill>
+            <a:off x="2337840" y="2865960"/>
+            <a:ext cx="7516080" cy="343080"/>
+          </a:xfrm>
+          <a:prstGeom prst="rect">
+            <a:avLst/>
+          </a:prstGeom>
+          <a:noFill/>
           <a:ln w="0">
             <a:noFill/>
           </a:ln>
@@ -11689,122 +11623,14 @@
           <a:fontRef idx="minor"/>
         </p:style>
         <p:txBody>
-          <a:bodyPr tIns="-36360" bIns="-36360" anchor="ctr">
-            <a:noAutofit/>
-          </a:bodyPr>
-          <a:p>
-            <a:endParaRPr lang="en-US" sz="1400" b="0" u="none" strike="noStrike">
-              <a:solidFill>
-                <a:srgbClr val="FFFFFF"/>
-              </a:solidFill>
-              <a:effectLst/>
-              <a:uFillTx/>
-              <a:latin typeface="Arial"/>
-            </a:endParaRPr>
-          </a:p>
-        </p:txBody>
-      </p:sp>
-      <p:sp>
-        <p:nvSpPr>
-          <p:cNvPr id="212" name="Google Shape;103;p 25"/>
-          <p:cNvSpPr/>
-          <p:nvPr/>
-        </p:nvSpPr>
-        <p:spPr>
-          <a:xfrm>
-            <a:off x="546480" y="4467600"/>
-            <a:ext cx="5590440" cy="366120"/>
-          </a:xfrm>
-          <a:prstGeom prst="rect">
-            <a:avLst/>
-          </a:prstGeom>
-          <a:noFill/>
-          <a:ln w="0">
-            <a:noFill/>
-          </a:ln>
-        </p:spPr>
-        <p:style>
-          <a:lnRef idx="0"/>
-          <a:fillRef idx="0"/>
-          <a:effectRef idx="0"/>
-          <a:fontRef idx="minor"/>
-        </p:style>
-        <p:txBody>
           <a:bodyPr lIns="0" tIns="0" rIns="0" bIns="0" anchor="t">
             <a:spAutoFit/>
           </a:bodyPr>
           <a:p>
-            <a:pPr>
-              <a:lnSpc>
-                <a:spcPct val="100000"/>
-              </a:lnSpc>
-              <a:tabLst>
-                <a:tab pos="0" algn="l"/>
-              </a:tabLst>
-            </a:pPr>
-            <a:r>
-              <a:rPr lang="en-US" sz="2400" b="1" u="none" strike="noStrike">
-                <a:solidFill>
-                  <a:srgbClr val="F5F5F5"/>
-                </a:solidFill>
-                <a:effectLst/>
-                <a:uFillTx/>
-                <a:latin typeface="Cinzel"/>
-                <a:ea typeface="Cinzel"/>
-              </a:rPr>
-              <a:t>Running your Code</a:t>
-            </a:r>
-            <a:endParaRPr lang="en-US" sz="2400" b="0" u="none" strike="noStrike">
-              <a:solidFill>
-                <a:srgbClr val="FFFFFF"/>
-              </a:solidFill>
-              <a:effectLst/>
-              <a:uFillTx/>
-              <a:latin typeface="Arial"/>
-            </a:endParaRPr>
-          </a:p>
-        </p:txBody>
-      </p:sp>
-      <p:sp>
-        <p:nvSpPr>
-          <p:cNvPr id="213" name="Google Shape;104;p 24"/>
-          <p:cNvSpPr/>
-          <p:nvPr/>
-        </p:nvSpPr>
-        <p:spPr>
-          <a:xfrm>
-            <a:off x="546480" y="4833720"/>
-            <a:ext cx="9879120" cy="685800"/>
-          </a:xfrm>
-          <a:prstGeom prst="rect">
-            <a:avLst/>
-          </a:prstGeom>
-          <a:noFill/>
-          <a:ln w="0">
-            <a:noFill/>
-          </a:ln>
-        </p:spPr>
-        <p:style>
-          <a:lnRef idx="0"/>
-          <a:fillRef idx="0"/>
-          <a:effectRef idx="0"/>
-          <a:fontRef idx="minor"/>
-        </p:style>
-        <p:txBody>
-          <a:bodyPr lIns="0" tIns="0" rIns="0" bIns="0" anchor="t">
-            <a:spAutoFit/>
-          </a:bodyPr>
-          <a:p>
-            <a:pPr marL="216000" indent="-216000">
+            <a:pPr algn="ctr">
               <a:lnSpc>
                 <a:spcPct val="150000"/>
               </a:lnSpc>
-              <a:buClr>
-                <a:srgbClr val="FFFFFF"/>
-              </a:buClr>
-              <a:buSzPct val="45000"/>
-              <a:buFont typeface="Wingdings" charset="2"/>
-              <a:buChar char=""/>
               <a:tabLst>
                 <a:tab pos="0" algn="l"/>
               </a:tabLst>
@@ -11819,7 +11645,7 @@
                 <a:latin typeface="Lato"/>
                 <a:ea typeface="Lato"/>
               </a:rPr>
-              <a:t>Open the terminal if it is not yet:</a:t>
+              <a:t>The other option for an if statement is called elif</a:t>
             </a:r>
             <a:endParaRPr lang="en-US" sz="1500" b="0" u="none" strike="noStrike">
               <a:solidFill>
@@ -11830,44 +11656,32 @@
               <a:latin typeface="Arial"/>
             </a:endParaRPr>
           </a:p>
-          <a:p>
-            <a:pPr marL="216000" indent="-216000">
-              <a:lnSpc>
-                <a:spcPct val="150000"/>
-              </a:lnSpc>
-              <a:buClr>
-                <a:srgbClr val="FFFFFF"/>
-              </a:buClr>
-              <a:buSzPct val="45000"/>
-              <a:buFont typeface="Wingdings" charset="2"/>
-              <a:buChar char=""/>
-              <a:tabLst>
-                <a:tab pos="0" algn="l"/>
-              </a:tabLst>
-            </a:pPr>
-            <a:r>
-              <a:rPr lang="en-US" sz="1500" b="0" u="none" strike="noStrike">
-                <a:solidFill>
-                  <a:srgbClr val="D1D1D1"/>
-                </a:solidFill>
-                <a:effectLst/>
-                <a:uFillTx/>
-                <a:latin typeface="Lato"/>
-                <a:ea typeface="Lato"/>
-              </a:rPr>
-              <a:t>Run the program: python Step8.py</a:t>
-            </a:r>
-            <a:endParaRPr lang="en-US" sz="1500" b="0" u="none" strike="noStrike">
-              <a:solidFill>
-                <a:srgbClr val="FFFFFF"/>
-              </a:solidFill>
-              <a:effectLst/>
-              <a:uFillTx/>
-              <a:latin typeface="Arial"/>
-            </a:endParaRPr>
-          </a:p>
-        </p:txBody>
-      </p:sp>
+        </p:txBody>
+      </p:sp>
+      <p:pic>
+        <p:nvPicPr>
+          <p:cNvPr id="211" name=""/>
+          <p:cNvPicPr/>
+          <p:nvPr/>
+        </p:nvPicPr>
+        <p:blipFill>
+          <a:blip r:embed="rId4"/>
+          <a:stretch/>
+        </p:blipFill>
+        <p:spPr>
+          <a:xfrm>
+            <a:off x="4235760" y="3540240"/>
+            <a:ext cx="3876480" cy="1837800"/>
+          </a:xfrm>
+          <a:prstGeom prst="rect">
+            <a:avLst/>
+          </a:prstGeom>
+          <a:noFill/>
+          <a:ln w="0">
+            <a:noFill/>
+          </a:ln>
+        </p:spPr>
+      </p:pic>
     </p:spTree>
   </p:cSld>
   <mc:AlternateContent>
@@ -11905,40 +11719,16 @@
           <a:chExt cx="0" cy="0"/>
         </a:xfrm>
       </p:grpSpPr>
-      <p:pic>
-        <p:nvPicPr>
-          <p:cNvPr id="214" name="Google Shape;224;p 1"/>
-          <p:cNvPicPr/>
-          <p:nvPr/>
-        </p:nvPicPr>
-        <p:blipFill>
-          <a:blip r:embed="rId1"/>
-          <a:stretch/>
-        </p:blipFill>
-        <p:spPr>
-          <a:xfrm>
-            <a:off x="0" y="0"/>
-            <a:ext cx="12191760" cy="6857640"/>
-          </a:xfrm>
-          <a:prstGeom prst="rect">
-            <a:avLst/>
-          </a:prstGeom>
-          <a:noFill/>
-          <a:ln w="0">
-            <a:noFill/>
-          </a:ln>
-        </p:spPr>
-      </p:pic>
-      <p:sp>
-        <p:nvSpPr>
-          <p:cNvPr id="215" name="Google Shape;226;p 2"/>
+      <p:sp>
+        <p:nvSpPr>
+          <p:cNvPr id="212" name="Google Shape;103;p 23"/>
           <p:cNvSpPr/>
           <p:nvPr/>
         </p:nvSpPr>
         <p:spPr>
           <a:xfrm>
-            <a:off x="581040" y="581040"/>
-            <a:ext cx="5190120" cy="480240"/>
+            <a:off x="581040" y="1609560"/>
+            <a:ext cx="5590440" cy="366120"/>
           </a:xfrm>
           <a:prstGeom prst="rect">
             <a:avLst/>
@@ -11968,45 +11758,43 @@
               </a:tabLst>
             </a:pPr>
             <a:r>
-              <a:rPr lang="en-US" sz="3150" b="1" u="none" strike="noStrike">
-                <a:solidFill>
-                  <a:srgbClr val="C5A059"/>
+              <a:rPr lang="en-US" sz="2400" b="1" u="none" strike="noStrike">
+                <a:solidFill>
+                  <a:srgbClr val="F5F5F5"/>
                 </a:solidFill>
                 <a:effectLst/>
                 <a:uFillTx/>
                 <a:latin typeface="Cinzel"/>
                 <a:ea typeface="Cinzel"/>
               </a:rPr>
-              <a:t>Dictionary Entries</a:t>
-            </a:r>
-            <a:endParaRPr lang="en-US" sz="3150" b="0" u="none" strike="noStrike">
-              <a:solidFill>
-                <a:srgbClr val="FFFFFF"/>
-              </a:solidFill>
-              <a:effectLst/>
-              <a:uFillTx/>
-              <a:latin typeface="Arial"/>
-            </a:endParaRPr>
-          </a:p>
-        </p:txBody>
-      </p:sp>
-      <p:sp>
-        <p:nvSpPr>
-          <p:cNvPr id="216" name="Google Shape;227;p 2"/>
+              <a:t>Code</a:t>
+            </a:r>
+            <a:endParaRPr lang="en-US" sz="2400" b="0" u="none" strike="noStrike">
+              <a:solidFill>
+                <a:srgbClr val="FFFFFF"/>
+              </a:solidFill>
+              <a:effectLst/>
+              <a:uFillTx/>
+              <a:latin typeface="Arial"/>
+            </a:endParaRPr>
+          </a:p>
+        </p:txBody>
+      </p:sp>
+      <p:sp>
+        <p:nvSpPr>
+          <p:cNvPr id="213" name="Google Shape;104;p 22"/>
           <p:cNvSpPr/>
           <p:nvPr/>
         </p:nvSpPr>
         <p:spPr>
           <a:xfrm>
-            <a:off x="581040" y="1219320"/>
-            <a:ext cx="4943160" cy="9000"/>
-          </a:xfrm>
-          <a:prstGeom prst="rect">
-            <a:avLst/>
-          </a:prstGeom>
-          <a:solidFill>
-            <a:srgbClr val="3D3422"/>
-          </a:solidFill>
+            <a:off x="581040" y="2162160"/>
+            <a:ext cx="9879120" cy="2056680"/>
+          </a:xfrm>
+          <a:prstGeom prst="rect">
+            <a:avLst/>
+          </a:prstGeom>
+          <a:noFill/>
           <a:ln w="0">
             <a:noFill/>
           </a:ln>
@@ -12018,55 +11806,249 @@
           <a:fontRef idx="minor"/>
         </p:style>
         <p:txBody>
-          <a:bodyPr tIns="-36360" bIns="-36360" anchor="ctr">
-            <a:noAutofit/>
-          </a:bodyPr>
-          <a:p>
-            <a:endParaRPr lang="en-US" sz="1400" b="0" u="none" strike="noStrike">
-              <a:solidFill>
-                <a:srgbClr val="FFFFFF"/>
-              </a:solidFill>
-              <a:effectLst/>
-              <a:uFillTx/>
-              <a:latin typeface="Arial"/>
-            </a:endParaRPr>
-          </a:p>
-        </p:txBody>
-      </p:sp>
-      <p:pic>
-        <p:nvPicPr>
-          <p:cNvPr id="217" name="Google Shape;228;p 2"/>
-          <p:cNvPicPr/>
-          <p:nvPr/>
-        </p:nvPicPr>
-        <p:blipFill>
-          <a:blip r:embed="rId2"/>
-          <a:stretch/>
-        </p:blipFill>
-        <p:spPr>
-          <a:xfrm>
-            <a:off x="6095880" y="9360"/>
-            <a:ext cx="6086160" cy="6857640"/>
-          </a:xfrm>
-          <a:prstGeom prst="rect">
-            <a:avLst/>
-          </a:prstGeom>
-          <a:noFill/>
-          <a:ln w="0">
-            <a:noFill/>
-          </a:ln>
-        </p:spPr>
-      </p:pic>
-      <p:sp>
-        <p:nvSpPr>
-          <p:cNvPr id="218" name="Google Shape;229;p 2"/>
+          <a:bodyPr lIns="0" tIns="0" rIns="0" bIns="0" anchor="t">
+            <a:spAutoFit/>
+          </a:bodyPr>
+          <a:p>
+            <a:pPr marL="216000" indent="-216000">
+              <a:lnSpc>
+                <a:spcPct val="150000"/>
+              </a:lnSpc>
+              <a:buClr>
+                <a:srgbClr val="FFFFFF"/>
+              </a:buClr>
+              <a:buSzPct val="45000"/>
+              <a:buFont typeface="Wingdings" charset="2"/>
+              <a:buChar char=""/>
+              <a:tabLst>
+                <a:tab pos="0" algn="l"/>
+              </a:tabLst>
+            </a:pPr>
+            <a:r>
+              <a:rPr lang="en-US" sz="1500" b="0" u="none" strike="noStrike">
+                <a:solidFill>
+                  <a:srgbClr val="D1D1D1"/>
+                </a:solidFill>
+                <a:effectLst/>
+                <a:uFillTx/>
+                <a:latin typeface="Lato"/>
+                <a:ea typeface="Lato"/>
+              </a:rPr>
+              <a:t>Open the file </a:t>
+            </a:r>
+            <a:r>
+              <a:rPr lang="en-US" sz="1500" b="0" i="1" u="none" strike="noStrike">
+                <a:solidFill>
+                  <a:srgbClr val="D1D1D1"/>
+                </a:solidFill>
+                <a:effectLst/>
+                <a:uFillTx/>
+                <a:latin typeface="Lato"/>
+                <a:ea typeface="Lato"/>
+              </a:rPr>
+              <a:t>Step7.py</a:t>
+            </a:r>
+            <a:endParaRPr lang="en-US" sz="1500" b="0" u="none" strike="noStrike">
+              <a:solidFill>
+                <a:srgbClr val="FFFFFF"/>
+              </a:solidFill>
+              <a:effectLst/>
+              <a:uFillTx/>
+              <a:latin typeface="Arial"/>
+            </a:endParaRPr>
+          </a:p>
+          <a:p>
+            <a:pPr marL="216000" indent="-216000">
+              <a:lnSpc>
+                <a:spcPct val="150000"/>
+              </a:lnSpc>
+              <a:buClr>
+                <a:srgbClr val="FFFFFF"/>
+              </a:buClr>
+              <a:buSzPct val="45000"/>
+              <a:buFont typeface="Wingdings" charset="2"/>
+              <a:buChar char=""/>
+              <a:tabLst>
+                <a:tab pos="0" algn="l"/>
+              </a:tabLst>
+            </a:pPr>
+            <a:r>
+              <a:rPr lang="en-US" sz="1500" b="0" u="none" strike="noStrike">
+                <a:solidFill>
+                  <a:srgbClr val="D1D1D1"/>
+                </a:solidFill>
+                <a:effectLst/>
+                <a:uFillTx/>
+                <a:latin typeface="Lato"/>
+                <a:ea typeface="Lato"/>
+              </a:rPr>
+              <a:t>Click File &gt; Save As</a:t>
+            </a:r>
+            <a:endParaRPr lang="en-US" sz="1500" b="0" u="none" strike="noStrike">
+              <a:solidFill>
+                <a:srgbClr val="FFFFFF"/>
+              </a:solidFill>
+              <a:effectLst/>
+              <a:uFillTx/>
+              <a:latin typeface="Arial"/>
+            </a:endParaRPr>
+          </a:p>
+          <a:p>
+            <a:pPr marL="216000" indent="-216000">
+              <a:lnSpc>
+                <a:spcPct val="150000"/>
+              </a:lnSpc>
+              <a:buClr>
+                <a:srgbClr val="FFFFFF"/>
+              </a:buClr>
+              <a:buSzPct val="45000"/>
+              <a:buFont typeface="Wingdings" charset="2"/>
+              <a:buChar char=""/>
+              <a:tabLst>
+                <a:tab pos="0" algn="l"/>
+              </a:tabLst>
+            </a:pPr>
+            <a:r>
+              <a:rPr lang="en-US" sz="1500" b="0" u="none" strike="noStrike">
+                <a:solidFill>
+                  <a:srgbClr val="D1D1D1"/>
+                </a:solidFill>
+                <a:effectLst/>
+                <a:uFillTx/>
+                <a:latin typeface="Lato"/>
+                <a:ea typeface="Lato"/>
+              </a:rPr>
+              <a:t>Save the file as </a:t>
+            </a:r>
+            <a:r>
+              <a:rPr lang="en-US" sz="1500" b="0" i="1" u="none" strike="noStrike">
+                <a:solidFill>
+                  <a:srgbClr val="D1D1D1"/>
+                </a:solidFill>
+                <a:effectLst/>
+                <a:uFillTx/>
+                <a:latin typeface="Lato"/>
+                <a:ea typeface="Lato"/>
+              </a:rPr>
+              <a:t>Step8.py</a:t>
+            </a:r>
+            <a:endParaRPr lang="en-US" sz="1500" b="0" u="none" strike="noStrike">
+              <a:solidFill>
+                <a:srgbClr val="FFFFFF"/>
+              </a:solidFill>
+              <a:effectLst/>
+              <a:uFillTx/>
+              <a:latin typeface="Arial"/>
+            </a:endParaRPr>
+          </a:p>
+          <a:p>
+            <a:pPr marL="216000" indent="-216000">
+              <a:lnSpc>
+                <a:spcPct val="150000"/>
+              </a:lnSpc>
+              <a:buClr>
+                <a:srgbClr val="FFFFFF"/>
+              </a:buClr>
+              <a:buSzPct val="45000"/>
+              <a:buFont typeface="Wingdings" charset="2"/>
+              <a:buChar char=""/>
+              <a:tabLst>
+                <a:tab pos="0" algn="l"/>
+              </a:tabLst>
+            </a:pPr>
+            <a:r>
+              <a:rPr lang="en-US" sz="1500" b="0" u="none" strike="noStrike">
+                <a:solidFill>
+                  <a:srgbClr val="D1D1D1"/>
+                </a:solidFill>
+                <a:effectLst/>
+                <a:uFillTx/>
+                <a:latin typeface="Lato"/>
+                <a:ea typeface="Lato"/>
+              </a:rPr>
+              <a:t>After the if statement, but before the else, add an elif code block that checks if the variable </a:t>
+            </a:r>
+            <a:r>
+              <a:rPr lang="en-US" sz="1500" b="0" i="1" u="none" strike="noStrike">
+                <a:solidFill>
+                  <a:srgbClr val="D1D1D1"/>
+                </a:solidFill>
+                <a:effectLst/>
+                <a:uFillTx/>
+                <a:latin typeface="Lato"/>
+                <a:ea typeface="Lato"/>
+              </a:rPr>
+              <a:t>player_name</a:t>
+            </a:r>
+            <a:r>
+              <a:rPr lang="en-US" sz="1500" b="0" u="none" strike="noStrike">
+                <a:solidFill>
+                  <a:srgbClr val="D1D1D1"/>
+                </a:solidFill>
+                <a:effectLst/>
+                <a:uFillTx/>
+                <a:latin typeface="Lato"/>
+                <a:ea typeface="Lato"/>
+              </a:rPr>
+              <a:t> matches your name in lower case.</a:t>
+            </a:r>
+            <a:endParaRPr lang="en-US" sz="1500" b="0" u="none" strike="noStrike">
+              <a:solidFill>
+                <a:srgbClr val="FFFFFF"/>
+              </a:solidFill>
+              <a:effectLst/>
+              <a:uFillTx/>
+              <a:latin typeface="Arial"/>
+            </a:endParaRPr>
+          </a:p>
+          <a:p>
+            <a:pPr marL="216000" indent="-216000">
+              <a:lnSpc>
+                <a:spcPct val="150000"/>
+              </a:lnSpc>
+              <a:buClr>
+                <a:srgbClr val="FFFFFF"/>
+              </a:buClr>
+              <a:buSzPct val="45000"/>
+              <a:buFont typeface="Wingdings" charset="2"/>
+              <a:buChar char=""/>
+              <a:tabLst>
+                <a:tab pos="0" algn="l"/>
+              </a:tabLst>
+            </a:pPr>
+            <a:r>
+              <a:rPr lang="en-US" sz="1500" b="0" u="none" strike="noStrike">
+                <a:solidFill>
+                  <a:srgbClr val="D1D1D1"/>
+                </a:solidFill>
+                <a:effectLst/>
+                <a:uFillTx/>
+                <a:latin typeface="Lato"/>
+                <a:ea typeface="Lato"/>
+              </a:rPr>
+              <a:t>If the name matches, let yourself win! </a:t>
+            </a:r>
+            <a:endParaRPr lang="en-US" sz="1500" b="0" u="none" strike="noStrike">
+              <a:solidFill>
+                <a:srgbClr val="FFFFFF"/>
+              </a:solidFill>
+              <a:effectLst/>
+              <a:uFillTx/>
+              <a:latin typeface="Arial"/>
+            </a:endParaRPr>
+          </a:p>
+        </p:txBody>
+      </p:sp>
+      <p:sp>
+        <p:nvSpPr>
+          <p:cNvPr id="214" name="Google Shape;113;p 13"/>
           <p:cNvSpPr/>
           <p:nvPr/>
         </p:nvSpPr>
         <p:spPr>
           <a:xfrm>
-            <a:off x="581040" y="1609560"/>
-            <a:ext cx="4943160" cy="685800"/>
+            <a:off x="581040" y="581040"/>
+            <a:ext cx="11581200" cy="480240"/>
           </a:xfrm>
           <a:prstGeom prst="rect">
             <a:avLst/>
@@ -12089,50 +12071,52 @@
           <a:p>
             <a:pPr>
               <a:lnSpc>
-                <a:spcPct val="150000"/>
-              </a:lnSpc>
-              <a:tabLst>
-                <a:tab pos="0" algn="l"/>
-              </a:tabLst>
-            </a:pPr>
-            <a:r>
-              <a:rPr lang="en-US" sz="1500" b="1" u="none" strike="noStrike">
-                <a:solidFill>
-                  <a:srgbClr val="D1D1D1"/>
-                </a:solidFill>
-                <a:effectLst/>
-                <a:uFillTx/>
-                <a:latin typeface="Lato"/>
-                <a:ea typeface="Lato"/>
-              </a:rPr>
-              <a:t>Step 9: Dictionary entries allow for multiple values in a variable</a:t>
-            </a:r>
-            <a:endParaRPr lang="en-US" sz="1500" b="0" u="none" strike="noStrike">
-              <a:solidFill>
-                <a:srgbClr val="FFFFFF"/>
-              </a:solidFill>
-              <a:effectLst/>
-              <a:uFillTx/>
-              <a:latin typeface="Arial"/>
-            </a:endParaRPr>
-          </a:p>
-        </p:txBody>
-      </p:sp>
-      <p:sp>
-        <p:nvSpPr>
-          <p:cNvPr id="219" name="Google Shape;230;p 2"/>
+                <a:spcPct val="100000"/>
+              </a:lnSpc>
+              <a:tabLst>
+                <a:tab pos="0" algn="l"/>
+              </a:tabLst>
+            </a:pPr>
+            <a:r>
+              <a:rPr lang="en-US" sz="3150" b="1" u="none" strike="noStrike">
+                <a:solidFill>
+                  <a:srgbClr val="C5A059"/>
+                </a:solidFill>
+                <a:effectLst/>
+                <a:uFillTx/>
+                <a:latin typeface="Cinzel"/>
+                <a:ea typeface="Cinzel"/>
+              </a:rPr>
+              <a:t>Elif Statements: Your Turn</a:t>
+            </a:r>
+            <a:endParaRPr lang="en-US" sz="3150" b="0" u="none" strike="noStrike">
+              <a:solidFill>
+                <a:srgbClr val="FFFFFF"/>
+              </a:solidFill>
+              <a:effectLst/>
+              <a:uFillTx/>
+              <a:latin typeface="Arial"/>
+            </a:endParaRPr>
+          </a:p>
+        </p:txBody>
+      </p:sp>
+      <p:sp>
+        <p:nvSpPr>
+          <p:cNvPr id="215" name="Google Shape;114;p 13"/>
           <p:cNvSpPr/>
           <p:nvPr/>
         </p:nvSpPr>
         <p:spPr>
           <a:xfrm>
-            <a:off x="581040" y="3962520"/>
-            <a:ext cx="4943160" cy="343080"/>
-          </a:xfrm>
-          <a:prstGeom prst="rect">
-            <a:avLst/>
-          </a:prstGeom>
-          <a:noFill/>
+            <a:off x="581040" y="1219320"/>
+            <a:ext cx="11029680" cy="9000"/>
+          </a:xfrm>
+          <a:prstGeom prst="rect">
+            <a:avLst/>
+          </a:prstGeom>
+          <a:solidFill>
+            <a:srgbClr val="3D3422"/>
+          </a:solidFill>
           <a:ln w="0">
             <a:noFill/>
           </a:ln>
@@ -12144,14 +12128,122 @@
           <a:fontRef idx="minor"/>
         </p:style>
         <p:txBody>
+          <a:bodyPr tIns="-36360" bIns="-36360" anchor="ctr">
+            <a:noAutofit/>
+          </a:bodyPr>
+          <a:p>
+            <a:endParaRPr lang="en-US" sz="1400" b="0" u="none" strike="noStrike">
+              <a:solidFill>
+                <a:srgbClr val="FFFFFF"/>
+              </a:solidFill>
+              <a:effectLst/>
+              <a:uFillTx/>
+              <a:latin typeface="Arial"/>
+            </a:endParaRPr>
+          </a:p>
+        </p:txBody>
+      </p:sp>
+      <p:sp>
+        <p:nvSpPr>
+          <p:cNvPr id="216" name="Google Shape;103;p 25"/>
+          <p:cNvSpPr/>
+          <p:nvPr/>
+        </p:nvSpPr>
+        <p:spPr>
+          <a:xfrm>
+            <a:off x="546480" y="4467600"/>
+            <a:ext cx="5590440" cy="366120"/>
+          </a:xfrm>
+          <a:prstGeom prst="rect">
+            <a:avLst/>
+          </a:prstGeom>
+          <a:noFill/>
+          <a:ln w="0">
+            <a:noFill/>
+          </a:ln>
+        </p:spPr>
+        <p:style>
+          <a:lnRef idx="0"/>
+          <a:fillRef idx="0"/>
+          <a:effectRef idx="0"/>
+          <a:fontRef idx="minor"/>
+        </p:style>
+        <p:txBody>
           <a:bodyPr lIns="0" tIns="0" rIns="0" bIns="0" anchor="t">
             <a:spAutoFit/>
           </a:bodyPr>
           <a:p>
             <a:pPr>
               <a:lnSpc>
+                <a:spcPct val="100000"/>
+              </a:lnSpc>
+              <a:tabLst>
+                <a:tab pos="0" algn="l"/>
+              </a:tabLst>
+            </a:pPr>
+            <a:r>
+              <a:rPr lang="en-US" sz="2400" b="1" u="none" strike="noStrike">
+                <a:solidFill>
+                  <a:srgbClr val="F5F5F5"/>
+                </a:solidFill>
+                <a:effectLst/>
+                <a:uFillTx/>
+                <a:latin typeface="Cinzel"/>
+                <a:ea typeface="Cinzel"/>
+              </a:rPr>
+              <a:t>Running your Code</a:t>
+            </a:r>
+            <a:endParaRPr lang="en-US" sz="2400" b="0" u="none" strike="noStrike">
+              <a:solidFill>
+                <a:srgbClr val="FFFFFF"/>
+              </a:solidFill>
+              <a:effectLst/>
+              <a:uFillTx/>
+              <a:latin typeface="Arial"/>
+            </a:endParaRPr>
+          </a:p>
+        </p:txBody>
+      </p:sp>
+      <p:sp>
+        <p:nvSpPr>
+          <p:cNvPr id="217" name="Google Shape;104;p 24"/>
+          <p:cNvSpPr/>
+          <p:nvPr/>
+        </p:nvSpPr>
+        <p:spPr>
+          <a:xfrm>
+            <a:off x="546480" y="4833720"/>
+            <a:ext cx="9879120" cy="685800"/>
+          </a:xfrm>
+          <a:prstGeom prst="rect">
+            <a:avLst/>
+          </a:prstGeom>
+          <a:noFill/>
+          <a:ln w="0">
+            <a:noFill/>
+          </a:ln>
+        </p:spPr>
+        <p:style>
+          <a:lnRef idx="0"/>
+          <a:fillRef idx="0"/>
+          <a:effectRef idx="0"/>
+          <a:fontRef idx="minor"/>
+        </p:style>
+        <p:txBody>
+          <a:bodyPr lIns="0" tIns="0" rIns="0" bIns="0" anchor="t">
+            <a:spAutoFit/>
+          </a:bodyPr>
+          <a:p>
+            <a:pPr marL="216000" indent="-216000">
+              <a:lnSpc>
                 <a:spcPct val="150000"/>
               </a:lnSpc>
+              <a:buClr>
+                <a:srgbClr val="FFFFFF"/>
+              </a:buClr>
+              <a:buSzPct val="45000"/>
+              <a:buFont typeface="Wingdings" charset="2"/>
+              <a:buChar char=""/>
               <a:tabLst>
                 <a:tab pos="0" algn="l"/>
               </a:tabLst>
@@ -12166,7 +12258,7 @@
                 <a:latin typeface="Lato"/>
                 <a:ea typeface="Lato"/>
               </a:rPr>
-              <a:t>We will use this to create the Samurai Class in our Code</a:t>
+              <a:t>Open the terminal if it is not yet:</a:t>
             </a:r>
             <a:endParaRPr lang="en-US" sz="1500" b="0" u="none" strike="noStrike">
               <a:solidFill>
@@ -12177,32 +12269,44 @@
               <a:latin typeface="Arial"/>
             </a:endParaRPr>
           </a:p>
-        </p:txBody>
-      </p:sp>
-      <p:pic>
-        <p:nvPicPr>
-          <p:cNvPr id="220" name=""/>
-          <p:cNvPicPr/>
-          <p:nvPr/>
-        </p:nvPicPr>
-        <p:blipFill>
-          <a:blip r:embed="rId3"/>
-          <a:stretch/>
-        </p:blipFill>
-        <p:spPr>
-          <a:xfrm>
-            <a:off x="1200600" y="2397960"/>
-            <a:ext cx="2076120" cy="1133280"/>
-          </a:xfrm>
-          <a:prstGeom prst="rect">
-            <a:avLst/>
-          </a:prstGeom>
-          <a:noFill/>
-          <a:ln w="0">
-            <a:noFill/>
-          </a:ln>
-        </p:spPr>
-      </p:pic>
+          <a:p>
+            <a:pPr marL="216000" indent="-216000">
+              <a:lnSpc>
+                <a:spcPct val="150000"/>
+              </a:lnSpc>
+              <a:buClr>
+                <a:srgbClr val="FFFFFF"/>
+              </a:buClr>
+              <a:buSzPct val="45000"/>
+              <a:buFont typeface="Wingdings" charset="2"/>
+              <a:buChar char=""/>
+              <a:tabLst>
+                <a:tab pos="0" algn="l"/>
+              </a:tabLst>
+            </a:pPr>
+            <a:r>
+              <a:rPr lang="en-US" sz="1500" b="0" u="none" strike="noStrike">
+                <a:solidFill>
+                  <a:srgbClr val="D1D1D1"/>
+                </a:solidFill>
+                <a:effectLst/>
+                <a:uFillTx/>
+                <a:latin typeface="Lato"/>
+                <a:ea typeface="Lato"/>
+              </a:rPr>
+              <a:t>Run the program: python Step8.py</a:t>
+            </a:r>
+            <a:endParaRPr lang="en-US" sz="1500" b="0" u="none" strike="noStrike">
+              <a:solidFill>
+                <a:srgbClr val="FFFFFF"/>
+              </a:solidFill>
+              <a:effectLst/>
+              <a:uFillTx/>
+              <a:latin typeface="Arial"/>
+            </a:endParaRPr>
+          </a:p>
+        </p:txBody>
+      </p:sp>
     </p:spTree>
   </p:cSld>
   <mc:AlternateContent>
@@ -12240,16 +12344,40 @@
           <a:chExt cx="0" cy="0"/>
         </a:xfrm>
       </p:grpSpPr>
-      <p:sp>
-        <p:nvSpPr>
-          <p:cNvPr id="221" name="Google Shape;103;p 20"/>
+      <p:pic>
+        <p:nvPicPr>
+          <p:cNvPr id="218" name="Google Shape;224;p 1"/>
+          <p:cNvPicPr/>
+          <p:nvPr/>
+        </p:nvPicPr>
+        <p:blipFill>
+          <a:blip r:embed="rId1"/>
+          <a:stretch/>
+        </p:blipFill>
+        <p:spPr>
+          <a:xfrm>
+            <a:off x="0" y="0"/>
+            <a:ext cx="12191760" cy="6857640"/>
+          </a:xfrm>
+          <a:prstGeom prst="rect">
+            <a:avLst/>
+          </a:prstGeom>
+          <a:noFill/>
+          <a:ln w="0">
+            <a:noFill/>
+          </a:ln>
+        </p:spPr>
+      </p:pic>
+      <p:sp>
+        <p:nvSpPr>
+          <p:cNvPr id="219" name="Google Shape;226;p 2"/>
           <p:cNvSpPr/>
           <p:nvPr/>
         </p:nvSpPr>
         <p:spPr>
           <a:xfrm>
-            <a:off x="581040" y="1609560"/>
-            <a:ext cx="5590440" cy="366120"/>
+            <a:off x="581040" y="581040"/>
+            <a:ext cx="5190120" cy="480240"/>
           </a:xfrm>
           <a:prstGeom prst="rect">
             <a:avLst/>
@@ -12279,43 +12407,45 @@
               </a:tabLst>
             </a:pPr>
             <a:r>
-              <a:rPr lang="en-US" sz="2400" b="1" u="none" strike="noStrike">
-                <a:solidFill>
-                  <a:srgbClr val="F5F5F5"/>
+              <a:rPr lang="en-US" sz="3150" b="1" u="none" strike="noStrike">
+                <a:solidFill>
+                  <a:srgbClr val="C5A059"/>
                 </a:solidFill>
                 <a:effectLst/>
                 <a:uFillTx/>
                 <a:latin typeface="Cinzel"/>
                 <a:ea typeface="Cinzel"/>
               </a:rPr>
-              <a:t>Code</a:t>
-            </a:r>
-            <a:endParaRPr lang="en-US" sz="2400" b="0" u="none" strike="noStrike">
-              <a:solidFill>
-                <a:srgbClr val="FFFFFF"/>
-              </a:solidFill>
-              <a:effectLst/>
-              <a:uFillTx/>
-              <a:latin typeface="Arial"/>
-            </a:endParaRPr>
-          </a:p>
-        </p:txBody>
-      </p:sp>
-      <p:sp>
-        <p:nvSpPr>
-          <p:cNvPr id="222" name="Google Shape;104;p 19"/>
+              <a:t>Dictionary Entries</a:t>
+            </a:r>
+            <a:endParaRPr lang="en-US" sz="3150" b="0" u="none" strike="noStrike">
+              <a:solidFill>
+                <a:srgbClr val="FFFFFF"/>
+              </a:solidFill>
+              <a:effectLst/>
+              <a:uFillTx/>
+              <a:latin typeface="Arial"/>
+            </a:endParaRPr>
+          </a:p>
+        </p:txBody>
+      </p:sp>
+      <p:sp>
+        <p:nvSpPr>
+          <p:cNvPr id="220" name="Google Shape;227;p 2"/>
           <p:cNvSpPr/>
           <p:nvPr/>
         </p:nvSpPr>
         <p:spPr>
           <a:xfrm>
-            <a:off x="581040" y="2162160"/>
-            <a:ext cx="9879120" cy="1371240"/>
-          </a:xfrm>
-          <a:prstGeom prst="rect">
-            <a:avLst/>
-          </a:prstGeom>
-          <a:noFill/>
+            <a:off x="581040" y="1219320"/>
+            <a:ext cx="4943160" cy="9000"/>
+          </a:xfrm>
+          <a:prstGeom prst="rect">
+            <a:avLst/>
+          </a:prstGeom>
+          <a:solidFill>
+            <a:srgbClr val="3D3422"/>
+          </a:solidFill>
           <a:ln w="0">
             <a:noFill/>
           </a:ln>
@@ -12327,189 +12457,55 @@
           <a:fontRef idx="minor"/>
         </p:style>
         <p:txBody>
-          <a:bodyPr lIns="0" tIns="0" rIns="0" bIns="0" anchor="t">
-            <a:spAutoFit/>
-          </a:bodyPr>
-          <a:p>
-            <a:pPr marL="216000" indent="-216000">
-              <a:lnSpc>
-                <a:spcPct val="150000"/>
-              </a:lnSpc>
-              <a:buClr>
-                <a:srgbClr val="FFFFFF"/>
-              </a:buClr>
-              <a:buSzPct val="45000"/>
-              <a:buFont typeface="Wingdings" charset="2"/>
-              <a:buChar char=""/>
-              <a:tabLst>
-                <a:tab pos="0" algn="l"/>
-              </a:tabLst>
-            </a:pPr>
-            <a:r>
-              <a:rPr lang="en-US" sz="1500" b="0" u="none" strike="noStrike">
-                <a:solidFill>
-                  <a:srgbClr val="D1D1D1"/>
-                </a:solidFill>
-                <a:effectLst/>
-                <a:uFillTx/>
-                <a:latin typeface="Lato"/>
-                <a:ea typeface="Lato"/>
-              </a:rPr>
-              <a:t>Open the file </a:t>
-            </a:r>
-            <a:r>
-              <a:rPr lang="en-US" sz="1500" b="0" i="1" u="none" strike="noStrike">
-                <a:solidFill>
-                  <a:srgbClr val="D1D1D1"/>
-                </a:solidFill>
-                <a:effectLst/>
-                <a:uFillTx/>
-                <a:latin typeface="Lato"/>
-                <a:ea typeface="Lato"/>
-              </a:rPr>
-              <a:t>Step8.py</a:t>
-            </a:r>
-            <a:endParaRPr lang="en-US" sz="1500" b="0" u="none" strike="noStrike">
-              <a:solidFill>
-                <a:srgbClr val="FFFFFF"/>
-              </a:solidFill>
-              <a:effectLst/>
-              <a:uFillTx/>
-              <a:latin typeface="Arial"/>
-            </a:endParaRPr>
-          </a:p>
-          <a:p>
-            <a:pPr marL="216000" indent="-216000">
-              <a:lnSpc>
-                <a:spcPct val="150000"/>
-              </a:lnSpc>
-              <a:buClr>
-                <a:srgbClr val="FFFFFF"/>
-              </a:buClr>
-              <a:buSzPct val="45000"/>
-              <a:buFont typeface="Wingdings" charset="2"/>
-              <a:buChar char=""/>
-              <a:tabLst>
-                <a:tab pos="0" algn="l"/>
-              </a:tabLst>
-            </a:pPr>
-            <a:r>
-              <a:rPr lang="en-US" sz="1500" b="0" u="none" strike="noStrike">
-                <a:solidFill>
-                  <a:srgbClr val="D1D1D1"/>
-                </a:solidFill>
-                <a:effectLst/>
-                <a:uFillTx/>
-                <a:latin typeface="Lato"/>
-                <a:ea typeface="Lato"/>
-              </a:rPr>
-              <a:t>Click File &gt; Save As</a:t>
-            </a:r>
-            <a:endParaRPr lang="en-US" sz="1500" b="0" u="none" strike="noStrike">
-              <a:solidFill>
-                <a:srgbClr val="FFFFFF"/>
-              </a:solidFill>
-              <a:effectLst/>
-              <a:uFillTx/>
-              <a:latin typeface="Arial"/>
-            </a:endParaRPr>
-          </a:p>
-          <a:p>
-            <a:pPr marL="216000" indent="-216000">
-              <a:lnSpc>
-                <a:spcPct val="150000"/>
-              </a:lnSpc>
-              <a:buClr>
-                <a:srgbClr val="FFFFFF"/>
-              </a:buClr>
-              <a:buSzPct val="45000"/>
-              <a:buFont typeface="Wingdings" charset="2"/>
-              <a:buChar char=""/>
-              <a:tabLst>
-                <a:tab pos="0" algn="l"/>
-              </a:tabLst>
-            </a:pPr>
-            <a:r>
-              <a:rPr lang="en-US" sz="1500" b="0" u="none" strike="noStrike">
-                <a:solidFill>
-                  <a:srgbClr val="D1D1D1"/>
-                </a:solidFill>
-                <a:effectLst/>
-                <a:uFillTx/>
-                <a:latin typeface="Lato"/>
-                <a:ea typeface="Lato"/>
-              </a:rPr>
-              <a:t>Save the file as </a:t>
-            </a:r>
-            <a:r>
-              <a:rPr lang="en-US" sz="1500" b="0" i="1" u="none" strike="noStrike">
-                <a:solidFill>
-                  <a:srgbClr val="D1D1D1"/>
-                </a:solidFill>
-                <a:effectLst/>
-                <a:uFillTx/>
-                <a:latin typeface="Lato"/>
-                <a:ea typeface="Lato"/>
-              </a:rPr>
-              <a:t>Step9.py</a:t>
-            </a:r>
-            <a:endParaRPr lang="en-US" sz="1500" b="0" u="none" strike="noStrike">
-              <a:solidFill>
-                <a:srgbClr val="FFFFFF"/>
-              </a:solidFill>
-              <a:effectLst/>
-              <a:uFillTx/>
-              <a:latin typeface="Arial"/>
-            </a:endParaRPr>
-          </a:p>
-          <a:p>
-            <a:pPr marL="216000" indent="-216000">
-              <a:lnSpc>
-                <a:spcPct val="150000"/>
-              </a:lnSpc>
-              <a:buClr>
-                <a:srgbClr val="FFFFFF"/>
-              </a:buClr>
-              <a:buSzPct val="45000"/>
-              <a:buFont typeface="Wingdings" charset="2"/>
-              <a:buChar char=""/>
-              <a:tabLst>
-                <a:tab pos="0" algn="l"/>
-              </a:tabLst>
-            </a:pPr>
-            <a:r>
-              <a:rPr lang="en-US" sz="1500" b="0" u="none" strike="noStrike">
-                <a:solidFill>
-                  <a:srgbClr val="D1D1D1"/>
-                </a:solidFill>
-                <a:effectLst/>
-                <a:uFillTx/>
-                <a:latin typeface="Lato"/>
-                <a:ea typeface="Lato"/>
-              </a:rPr>
-              <a:t>Open Step9_pseudocode.py and use the instructions in there to help you create an entry for the Samurai</a:t>
-            </a:r>
-            <a:endParaRPr lang="en-US" sz="1500" b="0" u="none" strike="noStrike">
-              <a:solidFill>
-                <a:srgbClr val="FFFFFF"/>
-              </a:solidFill>
-              <a:effectLst/>
-              <a:uFillTx/>
-              <a:latin typeface="Arial"/>
-            </a:endParaRPr>
-          </a:p>
-        </p:txBody>
-      </p:sp>
-      <p:sp>
-        <p:nvSpPr>
-          <p:cNvPr id="223" name="Google Shape;113;p 11"/>
+          <a:bodyPr tIns="-36360" bIns="-36360" anchor="ctr">
+            <a:noAutofit/>
+          </a:bodyPr>
+          <a:p>
+            <a:endParaRPr lang="en-US" sz="1400" b="0" u="none" strike="noStrike">
+              <a:solidFill>
+                <a:srgbClr val="FFFFFF"/>
+              </a:solidFill>
+              <a:effectLst/>
+              <a:uFillTx/>
+              <a:latin typeface="Arial"/>
+            </a:endParaRPr>
+          </a:p>
+        </p:txBody>
+      </p:sp>
+      <p:pic>
+        <p:nvPicPr>
+          <p:cNvPr id="221" name="Google Shape;228;p 2"/>
+          <p:cNvPicPr/>
+          <p:nvPr/>
+        </p:nvPicPr>
+        <p:blipFill>
+          <a:blip r:embed="rId2"/>
+          <a:stretch/>
+        </p:blipFill>
+        <p:spPr>
+          <a:xfrm>
+            <a:off x="6095880" y="9360"/>
+            <a:ext cx="6086160" cy="6857640"/>
+          </a:xfrm>
+          <a:prstGeom prst="rect">
+            <a:avLst/>
+          </a:prstGeom>
+          <a:noFill/>
+          <a:ln w="0">
+            <a:noFill/>
+          </a:ln>
+        </p:spPr>
+      </p:pic>
+      <p:sp>
+        <p:nvSpPr>
+          <p:cNvPr id="222" name="Google Shape;229;p 2"/>
           <p:cNvSpPr/>
           <p:nvPr/>
         </p:nvSpPr>
         <p:spPr>
           <a:xfrm>
-            <a:off x="581040" y="581040"/>
-            <a:ext cx="11581200" cy="480240"/>
+            <a:off x="581040" y="1609560"/>
+            <a:ext cx="4943160" cy="685800"/>
           </a:xfrm>
           <a:prstGeom prst="rect">
             <a:avLst/>
@@ -12532,52 +12528,50 @@
           <a:p>
             <a:pPr>
               <a:lnSpc>
-                <a:spcPct val="100000"/>
-              </a:lnSpc>
-              <a:tabLst>
-                <a:tab pos="0" algn="l"/>
-              </a:tabLst>
-            </a:pPr>
-            <a:r>
-              <a:rPr lang="en-US" sz="3150" b="1" u="none" strike="noStrike">
-                <a:solidFill>
-                  <a:srgbClr val="C5A059"/>
-                </a:solidFill>
-                <a:effectLst/>
-                <a:uFillTx/>
-                <a:latin typeface="Cinzel"/>
-                <a:ea typeface="Cinzel"/>
-              </a:rPr>
-              <a:t>Dictionary Entries: Your Turn</a:t>
-            </a:r>
-            <a:endParaRPr lang="en-US" sz="3150" b="0" u="none" strike="noStrike">
-              <a:solidFill>
-                <a:srgbClr val="FFFFFF"/>
-              </a:solidFill>
-              <a:effectLst/>
-              <a:uFillTx/>
-              <a:latin typeface="Arial"/>
-            </a:endParaRPr>
-          </a:p>
-        </p:txBody>
-      </p:sp>
-      <p:sp>
-        <p:nvSpPr>
-          <p:cNvPr id="224" name="Google Shape;114;p 11"/>
+                <a:spcPct val="150000"/>
+              </a:lnSpc>
+              <a:tabLst>
+                <a:tab pos="0" algn="l"/>
+              </a:tabLst>
+            </a:pPr>
+            <a:r>
+              <a:rPr lang="en-US" sz="1500" b="1" u="none" strike="noStrike">
+                <a:solidFill>
+                  <a:srgbClr val="D1D1D1"/>
+                </a:solidFill>
+                <a:effectLst/>
+                <a:uFillTx/>
+                <a:latin typeface="Lato"/>
+                <a:ea typeface="Lato"/>
+              </a:rPr>
+              <a:t>Step 9: Dictionary entries allow for multiple values in a variable</a:t>
+            </a:r>
+            <a:endParaRPr lang="en-US" sz="1500" b="0" u="none" strike="noStrike">
+              <a:solidFill>
+                <a:srgbClr val="FFFFFF"/>
+              </a:solidFill>
+              <a:effectLst/>
+              <a:uFillTx/>
+              <a:latin typeface="Arial"/>
+            </a:endParaRPr>
+          </a:p>
+        </p:txBody>
+      </p:sp>
+      <p:sp>
+        <p:nvSpPr>
+          <p:cNvPr id="223" name="Google Shape;230;p 2"/>
           <p:cNvSpPr/>
           <p:nvPr/>
         </p:nvSpPr>
         <p:spPr>
           <a:xfrm>
-            <a:off x="581040" y="1219320"/>
-            <a:ext cx="11029680" cy="9000"/>
-          </a:xfrm>
-          <a:prstGeom prst="rect">
-            <a:avLst/>
-          </a:prstGeom>
-          <a:solidFill>
-            <a:srgbClr val="3D3422"/>
-          </a:solidFill>
+            <a:off x="581040" y="3962520"/>
+            <a:ext cx="4943160" cy="343080"/>
+          </a:xfrm>
+          <a:prstGeom prst="rect">
+            <a:avLst/>
+          </a:prstGeom>
+          <a:noFill/>
           <a:ln w="0">
             <a:noFill/>
           </a:ln>
@@ -12589,122 +12583,14 @@
           <a:fontRef idx="minor"/>
         </p:style>
         <p:txBody>
-          <a:bodyPr tIns="-36360" bIns="-36360" anchor="ctr">
-            <a:noAutofit/>
-          </a:bodyPr>
-          <a:p>
-            <a:endParaRPr lang="en-US" sz="1400" b="0" u="none" strike="noStrike">
-              <a:solidFill>
-                <a:srgbClr val="FFFFFF"/>
-              </a:solidFill>
-              <a:effectLst/>
-              <a:uFillTx/>
-              <a:latin typeface="Arial"/>
-            </a:endParaRPr>
-          </a:p>
-        </p:txBody>
-      </p:sp>
-      <p:sp>
-        <p:nvSpPr>
-          <p:cNvPr id="225" name="Google Shape;103;p 21"/>
-          <p:cNvSpPr/>
-          <p:nvPr/>
-        </p:nvSpPr>
-        <p:spPr>
-          <a:xfrm>
-            <a:off x="546480" y="4467600"/>
-            <a:ext cx="5590440" cy="366120"/>
-          </a:xfrm>
-          <a:prstGeom prst="rect">
-            <a:avLst/>
-          </a:prstGeom>
-          <a:noFill/>
-          <a:ln w="0">
-            <a:noFill/>
-          </a:ln>
-        </p:spPr>
-        <p:style>
-          <a:lnRef idx="0"/>
-          <a:fillRef idx="0"/>
-          <a:effectRef idx="0"/>
-          <a:fontRef idx="minor"/>
-        </p:style>
-        <p:txBody>
           <a:bodyPr lIns="0" tIns="0" rIns="0" bIns="0" anchor="t">
             <a:spAutoFit/>
           </a:bodyPr>
           <a:p>
             <a:pPr>
               <a:lnSpc>
-                <a:spcPct val="100000"/>
-              </a:lnSpc>
-              <a:tabLst>
-                <a:tab pos="0" algn="l"/>
-              </a:tabLst>
-            </a:pPr>
-            <a:r>
-              <a:rPr lang="en-US" sz="2400" b="1" u="none" strike="noStrike">
-                <a:solidFill>
-                  <a:srgbClr val="F5F5F5"/>
-                </a:solidFill>
-                <a:effectLst/>
-                <a:uFillTx/>
-                <a:latin typeface="Cinzel"/>
-                <a:ea typeface="Cinzel"/>
-              </a:rPr>
-              <a:t>Running your Code</a:t>
-            </a:r>
-            <a:endParaRPr lang="en-US" sz="2400" b="0" u="none" strike="noStrike">
-              <a:solidFill>
-                <a:srgbClr val="FFFFFF"/>
-              </a:solidFill>
-              <a:effectLst/>
-              <a:uFillTx/>
-              <a:latin typeface="Arial"/>
-            </a:endParaRPr>
-          </a:p>
-        </p:txBody>
-      </p:sp>
-      <p:sp>
-        <p:nvSpPr>
-          <p:cNvPr id="226" name="Google Shape;104;p 20"/>
-          <p:cNvSpPr/>
-          <p:nvPr/>
-        </p:nvSpPr>
-        <p:spPr>
-          <a:xfrm>
-            <a:off x="546480" y="4833720"/>
-            <a:ext cx="9879120" cy="685800"/>
-          </a:xfrm>
-          <a:prstGeom prst="rect">
-            <a:avLst/>
-          </a:prstGeom>
-          <a:noFill/>
-          <a:ln w="0">
-            <a:noFill/>
-          </a:ln>
-        </p:spPr>
-        <p:style>
-          <a:lnRef idx="0"/>
-          <a:fillRef idx="0"/>
-          <a:effectRef idx="0"/>
-          <a:fontRef idx="minor"/>
-        </p:style>
-        <p:txBody>
-          <a:bodyPr lIns="0" tIns="0" rIns="0" bIns="0" anchor="t">
-            <a:spAutoFit/>
-          </a:bodyPr>
-          <a:p>
-            <a:pPr marL="216000" indent="-216000">
-              <a:lnSpc>
                 <a:spcPct val="150000"/>
               </a:lnSpc>
-              <a:buClr>
-                <a:srgbClr val="FFFFFF"/>
-              </a:buClr>
-              <a:buSzPct val="45000"/>
-              <a:buFont typeface="Wingdings" charset="2"/>
-              <a:buChar char=""/>
               <a:tabLst>
                 <a:tab pos="0" algn="l"/>
               </a:tabLst>
@@ -12719,7 +12605,7 @@
                 <a:latin typeface="Lato"/>
                 <a:ea typeface="Lato"/>
               </a:rPr>
-              <a:t>Open the terminal if it is not yet:</a:t>
+              <a:t>We will use this to create the Samurai Class in our Code</a:t>
             </a:r>
             <a:endParaRPr lang="en-US" sz="1500" b="0" u="none" strike="noStrike">
               <a:solidFill>
@@ -12730,44 +12616,32 @@
               <a:latin typeface="Arial"/>
             </a:endParaRPr>
           </a:p>
-          <a:p>
-            <a:pPr marL="216000" indent="-216000">
-              <a:lnSpc>
-                <a:spcPct val="150000"/>
-              </a:lnSpc>
-              <a:buClr>
-                <a:srgbClr val="FFFFFF"/>
-              </a:buClr>
-              <a:buSzPct val="45000"/>
-              <a:buFont typeface="Wingdings" charset="2"/>
-              <a:buChar char=""/>
-              <a:tabLst>
-                <a:tab pos="0" algn="l"/>
-              </a:tabLst>
-            </a:pPr>
-            <a:r>
-              <a:rPr lang="en-US" sz="1500" b="0" u="none" strike="noStrike">
-                <a:solidFill>
-                  <a:srgbClr val="D1D1D1"/>
-                </a:solidFill>
-                <a:effectLst/>
-                <a:uFillTx/>
-                <a:latin typeface="Lato"/>
-                <a:ea typeface="Lato"/>
-              </a:rPr>
-              <a:t>Run the program: python Step9.py</a:t>
-            </a:r>
-            <a:endParaRPr lang="en-US" sz="1500" b="0" u="none" strike="noStrike">
-              <a:solidFill>
-                <a:srgbClr val="FFFFFF"/>
-              </a:solidFill>
-              <a:effectLst/>
-              <a:uFillTx/>
-              <a:latin typeface="Arial"/>
-            </a:endParaRPr>
-          </a:p>
-        </p:txBody>
-      </p:sp>
+        </p:txBody>
+      </p:sp>
+      <p:pic>
+        <p:nvPicPr>
+          <p:cNvPr id="224" name=""/>
+          <p:cNvPicPr/>
+          <p:nvPr/>
+        </p:nvPicPr>
+        <p:blipFill>
+          <a:blip r:embed="rId3"/>
+          <a:stretch/>
+        </p:blipFill>
+        <p:spPr>
+          <a:xfrm>
+            <a:off x="1200600" y="2397960"/>
+            <a:ext cx="2076120" cy="1133280"/>
+          </a:xfrm>
+          <a:prstGeom prst="rect">
+            <a:avLst/>
+          </a:prstGeom>
+          <a:noFill/>
+          <a:ln w="0">
+            <a:noFill/>
+          </a:ln>
+        </p:spPr>
+      </p:pic>
     </p:spTree>
   </p:cSld>
   <mc:AlternateContent>
@@ -12805,40 +12679,16 @@
           <a:chExt cx="0" cy="0"/>
         </a:xfrm>
       </p:grpSpPr>
-      <p:pic>
-        <p:nvPicPr>
-          <p:cNvPr id="227" name="Google Shape;224;p 2"/>
-          <p:cNvPicPr/>
-          <p:nvPr/>
-        </p:nvPicPr>
-        <p:blipFill>
-          <a:blip r:embed="rId1"/>
-          <a:stretch/>
-        </p:blipFill>
-        <p:spPr>
-          <a:xfrm>
-            <a:off x="0" y="0"/>
-            <a:ext cx="12191760" cy="6857640"/>
-          </a:xfrm>
-          <a:prstGeom prst="rect">
-            <a:avLst/>
-          </a:prstGeom>
-          <a:noFill/>
-          <a:ln w="0">
-            <a:noFill/>
-          </a:ln>
-        </p:spPr>
-      </p:pic>
-      <p:sp>
-        <p:nvSpPr>
-          <p:cNvPr id="228" name="Google Shape;226;p 3"/>
+      <p:sp>
+        <p:nvSpPr>
+          <p:cNvPr id="225" name="Google Shape;103;p 20"/>
           <p:cNvSpPr/>
           <p:nvPr/>
         </p:nvSpPr>
         <p:spPr>
           <a:xfrm>
-            <a:off x="581040" y="581040"/>
-            <a:ext cx="5190120" cy="960120"/>
+            <a:off x="581040" y="1609560"/>
+            <a:ext cx="5590440" cy="366120"/>
           </a:xfrm>
           <a:prstGeom prst="rect">
             <a:avLst/>
@@ -12868,45 +12718,43 @@
               </a:tabLst>
             </a:pPr>
             <a:r>
-              <a:rPr lang="en-US" sz="3150" b="1" u="none" strike="noStrike">
-                <a:solidFill>
-                  <a:srgbClr val="C5A059"/>
+              <a:rPr lang="en-US" sz="2400" b="1" u="none" strike="noStrike">
+                <a:solidFill>
+                  <a:srgbClr val="F5F5F5"/>
                 </a:solidFill>
                 <a:effectLst/>
                 <a:uFillTx/>
                 <a:latin typeface="Cinzel"/>
                 <a:ea typeface="Cinzel"/>
               </a:rPr>
-              <a:t>Dictionary Entries with Multiple Entries</a:t>
-            </a:r>
-            <a:endParaRPr lang="en-US" sz="3150" b="0" u="none" strike="noStrike">
-              <a:solidFill>
-                <a:srgbClr val="FFFFFF"/>
-              </a:solidFill>
-              <a:effectLst/>
-              <a:uFillTx/>
-              <a:latin typeface="Arial"/>
-            </a:endParaRPr>
-          </a:p>
-        </p:txBody>
-      </p:sp>
-      <p:sp>
-        <p:nvSpPr>
-          <p:cNvPr id="229" name="Google Shape;227;p 3"/>
+              <a:t>Code</a:t>
+            </a:r>
+            <a:endParaRPr lang="en-US" sz="2400" b="0" u="none" strike="noStrike">
+              <a:solidFill>
+                <a:srgbClr val="FFFFFF"/>
+              </a:solidFill>
+              <a:effectLst/>
+              <a:uFillTx/>
+              <a:latin typeface="Arial"/>
+            </a:endParaRPr>
+          </a:p>
+        </p:txBody>
+      </p:sp>
+      <p:sp>
+        <p:nvSpPr>
+          <p:cNvPr id="226" name="Google Shape;104;p 19"/>
           <p:cNvSpPr/>
           <p:nvPr/>
         </p:nvSpPr>
         <p:spPr>
           <a:xfrm>
-            <a:off x="581040" y="1579320"/>
-            <a:ext cx="4943160" cy="9000"/>
-          </a:xfrm>
-          <a:prstGeom prst="rect">
-            <a:avLst/>
-          </a:prstGeom>
-          <a:solidFill>
-            <a:srgbClr val="3D3422"/>
-          </a:solidFill>
+            <a:off x="581040" y="2162160"/>
+            <a:ext cx="9879120" cy="1371240"/>
+          </a:xfrm>
+          <a:prstGeom prst="rect">
+            <a:avLst/>
+          </a:prstGeom>
+          <a:noFill/>
           <a:ln w="0">
             <a:noFill/>
           </a:ln>
@@ -12918,55 +12766,189 @@
           <a:fontRef idx="minor"/>
         </p:style>
         <p:txBody>
-          <a:bodyPr tIns="-36360" bIns="-36360" anchor="ctr">
-            <a:noAutofit/>
-          </a:bodyPr>
-          <a:p>
-            <a:endParaRPr lang="en-US" sz="1400" b="0" u="none" strike="noStrike">
-              <a:solidFill>
-                <a:srgbClr val="FFFFFF"/>
-              </a:solidFill>
-              <a:effectLst/>
-              <a:uFillTx/>
-              <a:latin typeface="Arial"/>
-            </a:endParaRPr>
-          </a:p>
-        </p:txBody>
-      </p:sp>
-      <p:pic>
-        <p:nvPicPr>
-          <p:cNvPr id="230" name="Google Shape;228;p 3"/>
-          <p:cNvPicPr/>
-          <p:nvPr/>
-        </p:nvPicPr>
-        <p:blipFill>
-          <a:blip r:embed="rId2"/>
-          <a:stretch/>
-        </p:blipFill>
-        <p:spPr>
-          <a:xfrm>
-            <a:off x="6095880" y="9360"/>
-            <a:ext cx="6086160" cy="6857640"/>
-          </a:xfrm>
-          <a:prstGeom prst="rect">
-            <a:avLst/>
-          </a:prstGeom>
-          <a:noFill/>
-          <a:ln w="0">
-            <a:noFill/>
-          </a:ln>
-        </p:spPr>
-      </p:pic>
-      <p:sp>
-        <p:nvSpPr>
-          <p:cNvPr id="231" name="Google Shape;229;p 3"/>
+          <a:bodyPr lIns="0" tIns="0" rIns="0" bIns="0" anchor="t">
+            <a:spAutoFit/>
+          </a:bodyPr>
+          <a:p>
+            <a:pPr marL="216000" indent="-216000">
+              <a:lnSpc>
+                <a:spcPct val="150000"/>
+              </a:lnSpc>
+              <a:buClr>
+                <a:srgbClr val="FFFFFF"/>
+              </a:buClr>
+              <a:buSzPct val="45000"/>
+              <a:buFont typeface="Wingdings" charset="2"/>
+              <a:buChar char=""/>
+              <a:tabLst>
+                <a:tab pos="0" algn="l"/>
+              </a:tabLst>
+            </a:pPr>
+            <a:r>
+              <a:rPr lang="en-US" sz="1500" b="0" u="none" strike="noStrike">
+                <a:solidFill>
+                  <a:srgbClr val="D1D1D1"/>
+                </a:solidFill>
+                <a:effectLst/>
+                <a:uFillTx/>
+                <a:latin typeface="Lato"/>
+                <a:ea typeface="Lato"/>
+              </a:rPr>
+              <a:t>Open the file </a:t>
+            </a:r>
+            <a:r>
+              <a:rPr lang="en-US" sz="1500" b="0" i="1" u="none" strike="noStrike">
+                <a:solidFill>
+                  <a:srgbClr val="D1D1D1"/>
+                </a:solidFill>
+                <a:effectLst/>
+                <a:uFillTx/>
+                <a:latin typeface="Lato"/>
+                <a:ea typeface="Lato"/>
+              </a:rPr>
+              <a:t>Step8.py</a:t>
+            </a:r>
+            <a:endParaRPr lang="en-US" sz="1500" b="0" u="none" strike="noStrike">
+              <a:solidFill>
+                <a:srgbClr val="FFFFFF"/>
+              </a:solidFill>
+              <a:effectLst/>
+              <a:uFillTx/>
+              <a:latin typeface="Arial"/>
+            </a:endParaRPr>
+          </a:p>
+          <a:p>
+            <a:pPr marL="216000" indent="-216000">
+              <a:lnSpc>
+                <a:spcPct val="150000"/>
+              </a:lnSpc>
+              <a:buClr>
+                <a:srgbClr val="FFFFFF"/>
+              </a:buClr>
+              <a:buSzPct val="45000"/>
+              <a:buFont typeface="Wingdings" charset="2"/>
+              <a:buChar char=""/>
+              <a:tabLst>
+                <a:tab pos="0" algn="l"/>
+              </a:tabLst>
+            </a:pPr>
+            <a:r>
+              <a:rPr lang="en-US" sz="1500" b="0" u="none" strike="noStrike">
+                <a:solidFill>
+                  <a:srgbClr val="D1D1D1"/>
+                </a:solidFill>
+                <a:effectLst/>
+                <a:uFillTx/>
+                <a:latin typeface="Lato"/>
+                <a:ea typeface="Lato"/>
+              </a:rPr>
+              <a:t>Click File &gt; Save As</a:t>
+            </a:r>
+            <a:endParaRPr lang="en-US" sz="1500" b="0" u="none" strike="noStrike">
+              <a:solidFill>
+                <a:srgbClr val="FFFFFF"/>
+              </a:solidFill>
+              <a:effectLst/>
+              <a:uFillTx/>
+              <a:latin typeface="Arial"/>
+            </a:endParaRPr>
+          </a:p>
+          <a:p>
+            <a:pPr marL="216000" indent="-216000">
+              <a:lnSpc>
+                <a:spcPct val="150000"/>
+              </a:lnSpc>
+              <a:buClr>
+                <a:srgbClr val="FFFFFF"/>
+              </a:buClr>
+              <a:buSzPct val="45000"/>
+              <a:buFont typeface="Wingdings" charset="2"/>
+              <a:buChar char=""/>
+              <a:tabLst>
+                <a:tab pos="0" algn="l"/>
+              </a:tabLst>
+            </a:pPr>
+            <a:r>
+              <a:rPr lang="en-US" sz="1500" b="0" u="none" strike="noStrike">
+                <a:solidFill>
+                  <a:srgbClr val="D1D1D1"/>
+                </a:solidFill>
+                <a:effectLst/>
+                <a:uFillTx/>
+                <a:latin typeface="Lato"/>
+                <a:ea typeface="Lato"/>
+              </a:rPr>
+              <a:t>Save the file as </a:t>
+            </a:r>
+            <a:r>
+              <a:rPr lang="en-US" sz="1500" b="0" i="1" u="none" strike="noStrike">
+                <a:solidFill>
+                  <a:srgbClr val="D1D1D1"/>
+                </a:solidFill>
+                <a:effectLst/>
+                <a:uFillTx/>
+                <a:latin typeface="Lato"/>
+                <a:ea typeface="Lato"/>
+              </a:rPr>
+              <a:t>Step9.py</a:t>
+            </a:r>
+            <a:endParaRPr lang="en-US" sz="1500" b="0" u="none" strike="noStrike">
+              <a:solidFill>
+                <a:srgbClr val="FFFFFF"/>
+              </a:solidFill>
+              <a:effectLst/>
+              <a:uFillTx/>
+              <a:latin typeface="Arial"/>
+            </a:endParaRPr>
+          </a:p>
+          <a:p>
+            <a:pPr marL="216000" indent="-216000">
+              <a:lnSpc>
+                <a:spcPct val="150000"/>
+              </a:lnSpc>
+              <a:buClr>
+                <a:srgbClr val="FFFFFF"/>
+              </a:buClr>
+              <a:buSzPct val="45000"/>
+              <a:buFont typeface="Wingdings" charset="2"/>
+              <a:buChar char=""/>
+              <a:tabLst>
+                <a:tab pos="0" algn="l"/>
+              </a:tabLst>
+            </a:pPr>
+            <a:r>
+              <a:rPr lang="en-US" sz="1500" b="0" u="none" strike="noStrike">
+                <a:solidFill>
+                  <a:srgbClr val="D1D1D1"/>
+                </a:solidFill>
+                <a:effectLst/>
+                <a:uFillTx/>
+                <a:latin typeface="Lato"/>
+                <a:ea typeface="Lato"/>
+              </a:rPr>
+              <a:t>Open Step9_pseudocode.py and use the instructions in there to help you create an entry for the Samurai</a:t>
+            </a:r>
+            <a:endParaRPr lang="en-US" sz="1500" b="0" u="none" strike="noStrike">
+              <a:solidFill>
+                <a:srgbClr val="FFFFFF"/>
+              </a:solidFill>
+              <a:effectLst/>
+              <a:uFillTx/>
+              <a:latin typeface="Arial"/>
+            </a:endParaRPr>
+          </a:p>
+        </p:txBody>
+      </p:sp>
+      <p:sp>
+        <p:nvSpPr>
+          <p:cNvPr id="227" name="Google Shape;113;p 11"/>
           <p:cNvSpPr/>
           <p:nvPr/>
         </p:nvSpPr>
         <p:spPr>
           <a:xfrm>
-            <a:off x="581040" y="1609560"/>
-            <a:ext cx="4943160" cy="685800"/>
+            <a:off x="581040" y="581040"/>
+            <a:ext cx="11581200" cy="480240"/>
           </a:xfrm>
           <a:prstGeom prst="rect">
             <a:avLst/>
@@ -12989,50 +12971,52 @@
           <a:p>
             <a:pPr>
               <a:lnSpc>
-                <a:spcPct val="150000"/>
-              </a:lnSpc>
-              <a:tabLst>
-                <a:tab pos="0" algn="l"/>
-              </a:tabLst>
-            </a:pPr>
-            <a:r>
-              <a:rPr lang="en-US" sz="1500" b="1" u="none" strike="noStrike">
-                <a:solidFill>
-                  <a:srgbClr val="D1D1D1"/>
-                </a:solidFill>
-                <a:effectLst/>
-                <a:uFillTx/>
-                <a:latin typeface="Lato"/>
-                <a:ea typeface="Lato"/>
-              </a:rPr>
-              <a:t>Step 10: Dictionary entries allow for multiple values in a variable:</a:t>
-            </a:r>
-            <a:endParaRPr lang="en-US" sz="1500" b="0" u="none" strike="noStrike">
-              <a:solidFill>
-                <a:srgbClr val="FFFFFF"/>
-              </a:solidFill>
-              <a:effectLst/>
-              <a:uFillTx/>
-              <a:latin typeface="Arial"/>
-            </a:endParaRPr>
-          </a:p>
-        </p:txBody>
-      </p:sp>
-      <p:sp>
-        <p:nvSpPr>
-          <p:cNvPr id="232" name="Google Shape;230;p 3"/>
+                <a:spcPct val="100000"/>
+              </a:lnSpc>
+              <a:tabLst>
+                <a:tab pos="0" algn="l"/>
+              </a:tabLst>
+            </a:pPr>
+            <a:r>
+              <a:rPr lang="en-US" sz="3150" b="1" u="none" strike="noStrike">
+                <a:solidFill>
+                  <a:srgbClr val="C5A059"/>
+                </a:solidFill>
+                <a:effectLst/>
+                <a:uFillTx/>
+                <a:latin typeface="Cinzel"/>
+                <a:ea typeface="Cinzel"/>
+              </a:rPr>
+              <a:t>Dictionary Entries: Your Turn</a:t>
+            </a:r>
+            <a:endParaRPr lang="en-US" sz="3150" b="0" u="none" strike="noStrike">
+              <a:solidFill>
+                <a:srgbClr val="FFFFFF"/>
+              </a:solidFill>
+              <a:effectLst/>
+              <a:uFillTx/>
+              <a:latin typeface="Arial"/>
+            </a:endParaRPr>
+          </a:p>
+        </p:txBody>
+      </p:sp>
+      <p:sp>
+        <p:nvSpPr>
+          <p:cNvPr id="228" name="Google Shape;114;p 11"/>
           <p:cNvSpPr/>
           <p:nvPr/>
         </p:nvSpPr>
         <p:spPr>
           <a:xfrm>
-            <a:off x="581040" y="3962520"/>
-            <a:ext cx="4943160" cy="343080"/>
-          </a:xfrm>
-          <a:prstGeom prst="rect">
-            <a:avLst/>
-          </a:prstGeom>
-          <a:noFill/>
+            <a:off x="581040" y="1219320"/>
+            <a:ext cx="11029680" cy="9000"/>
+          </a:xfrm>
+          <a:prstGeom prst="rect">
+            <a:avLst/>
+          </a:prstGeom>
+          <a:solidFill>
+            <a:srgbClr val="3D3422"/>
+          </a:solidFill>
           <a:ln w="0">
             <a:noFill/>
           </a:ln>
@@ -13044,14 +13028,122 @@
           <a:fontRef idx="minor"/>
         </p:style>
         <p:txBody>
+          <a:bodyPr tIns="-36360" bIns="-36360" anchor="ctr">
+            <a:noAutofit/>
+          </a:bodyPr>
+          <a:p>
+            <a:endParaRPr lang="en-US" sz="1400" b="0" u="none" strike="noStrike">
+              <a:solidFill>
+                <a:srgbClr val="FFFFFF"/>
+              </a:solidFill>
+              <a:effectLst/>
+              <a:uFillTx/>
+              <a:latin typeface="Arial"/>
+            </a:endParaRPr>
+          </a:p>
+        </p:txBody>
+      </p:sp>
+      <p:sp>
+        <p:nvSpPr>
+          <p:cNvPr id="229" name="Google Shape;103;p 21"/>
+          <p:cNvSpPr/>
+          <p:nvPr/>
+        </p:nvSpPr>
+        <p:spPr>
+          <a:xfrm>
+            <a:off x="546480" y="4467600"/>
+            <a:ext cx="5590440" cy="366120"/>
+          </a:xfrm>
+          <a:prstGeom prst="rect">
+            <a:avLst/>
+          </a:prstGeom>
+          <a:noFill/>
+          <a:ln w="0">
+            <a:noFill/>
+          </a:ln>
+        </p:spPr>
+        <p:style>
+          <a:lnRef idx="0"/>
+          <a:fillRef idx="0"/>
+          <a:effectRef idx="0"/>
+          <a:fontRef idx="minor"/>
+        </p:style>
+        <p:txBody>
           <a:bodyPr lIns="0" tIns="0" rIns="0" bIns="0" anchor="t">
             <a:spAutoFit/>
           </a:bodyPr>
           <a:p>
             <a:pPr>
               <a:lnSpc>
+                <a:spcPct val="100000"/>
+              </a:lnSpc>
+              <a:tabLst>
+                <a:tab pos="0" algn="l"/>
+              </a:tabLst>
+            </a:pPr>
+            <a:r>
+              <a:rPr lang="en-US" sz="2400" b="1" u="none" strike="noStrike">
+                <a:solidFill>
+                  <a:srgbClr val="F5F5F5"/>
+                </a:solidFill>
+                <a:effectLst/>
+                <a:uFillTx/>
+                <a:latin typeface="Cinzel"/>
+                <a:ea typeface="Cinzel"/>
+              </a:rPr>
+              <a:t>Running your Code</a:t>
+            </a:r>
+            <a:endParaRPr lang="en-US" sz="2400" b="0" u="none" strike="noStrike">
+              <a:solidFill>
+                <a:srgbClr val="FFFFFF"/>
+              </a:solidFill>
+              <a:effectLst/>
+              <a:uFillTx/>
+              <a:latin typeface="Arial"/>
+            </a:endParaRPr>
+          </a:p>
+        </p:txBody>
+      </p:sp>
+      <p:sp>
+        <p:nvSpPr>
+          <p:cNvPr id="230" name="Google Shape;104;p 20"/>
+          <p:cNvSpPr/>
+          <p:nvPr/>
+        </p:nvSpPr>
+        <p:spPr>
+          <a:xfrm>
+            <a:off x="546480" y="4833720"/>
+            <a:ext cx="9879120" cy="685800"/>
+          </a:xfrm>
+          <a:prstGeom prst="rect">
+            <a:avLst/>
+          </a:prstGeom>
+          <a:noFill/>
+          <a:ln w="0">
+            <a:noFill/>
+          </a:ln>
+        </p:spPr>
+        <p:style>
+          <a:lnRef idx="0"/>
+          <a:fillRef idx="0"/>
+          <a:effectRef idx="0"/>
+          <a:fontRef idx="minor"/>
+        </p:style>
+        <p:txBody>
+          <a:bodyPr lIns="0" tIns="0" rIns="0" bIns="0" anchor="t">
+            <a:spAutoFit/>
+          </a:bodyPr>
+          <a:p>
+            <a:pPr marL="216000" indent="-216000">
+              <a:lnSpc>
                 <a:spcPct val="150000"/>
               </a:lnSpc>
+              <a:buClr>
+                <a:srgbClr val="FFFFFF"/>
+              </a:buClr>
+              <a:buSzPct val="45000"/>
+              <a:buFont typeface="Wingdings" charset="2"/>
+              <a:buChar char=""/>
               <a:tabLst>
                 <a:tab pos="0" algn="l"/>
               </a:tabLst>
@@ -13066,7 +13158,7 @@
                 <a:latin typeface="Lato"/>
                 <a:ea typeface="Lato"/>
               </a:rPr>
-              <a:t>Using this, we can select from multiple classes in our code.</a:t>
+              <a:t>Open the terminal if it is not yet:</a:t>
             </a:r>
             <a:endParaRPr lang="en-US" sz="1500" b="0" u="none" strike="noStrike">
               <a:solidFill>
@@ -13077,32 +13169,44 @@
               <a:latin typeface="Arial"/>
             </a:endParaRPr>
           </a:p>
-        </p:txBody>
-      </p:sp>
-      <p:pic>
-        <p:nvPicPr>
-          <p:cNvPr id="233" name=""/>
-          <p:cNvPicPr/>
-          <p:nvPr/>
-        </p:nvPicPr>
-        <p:blipFill>
-          <a:blip r:embed="rId3"/>
-          <a:stretch/>
-        </p:blipFill>
-        <p:spPr>
-          <a:xfrm>
-            <a:off x="171720" y="2449440"/>
-            <a:ext cx="5777280" cy="1161720"/>
-          </a:xfrm>
-          <a:prstGeom prst="rect">
-            <a:avLst/>
-          </a:prstGeom>
-          <a:noFill/>
-          <a:ln w="0">
-            <a:noFill/>
-          </a:ln>
-        </p:spPr>
-      </p:pic>
+          <a:p>
+            <a:pPr marL="216000" indent="-216000">
+              <a:lnSpc>
+                <a:spcPct val="150000"/>
+              </a:lnSpc>
+              <a:buClr>
+                <a:srgbClr val="FFFFFF"/>
+              </a:buClr>
+              <a:buSzPct val="45000"/>
+              <a:buFont typeface="Wingdings" charset="2"/>
+              <a:buChar char=""/>
+              <a:tabLst>
+                <a:tab pos="0" algn="l"/>
+              </a:tabLst>
+            </a:pPr>
+            <a:r>
+              <a:rPr lang="en-US" sz="1500" b="0" u="none" strike="noStrike">
+                <a:solidFill>
+                  <a:srgbClr val="D1D1D1"/>
+                </a:solidFill>
+                <a:effectLst/>
+                <a:uFillTx/>
+                <a:latin typeface="Lato"/>
+                <a:ea typeface="Lato"/>
+              </a:rPr>
+              <a:t>Run the program: python Step9.py</a:t>
+            </a:r>
+            <a:endParaRPr lang="en-US" sz="1500" b="0" u="none" strike="noStrike">
+              <a:solidFill>
+                <a:srgbClr val="FFFFFF"/>
+              </a:solidFill>
+              <a:effectLst/>
+              <a:uFillTx/>
+              <a:latin typeface="Arial"/>
+            </a:endParaRPr>
+          </a:p>
+        </p:txBody>
+      </p:sp>
     </p:spTree>
   </p:cSld>
   <mc:AlternateContent>
@@ -13346,7 +13450,7 @@
               </a:solidFill>
               <a:effectLst/>
               <a:uFillTx/>
-              <a:latin typeface="Lato"/>
+              <a:latin typeface="Arial"/>
             </a:endParaRPr>
           </a:p>
           <a:p>
@@ -13367,7 +13471,7 @@
               </a:solidFill>
               <a:effectLst/>
               <a:uFillTx/>
-              <a:latin typeface="Lato"/>
+              <a:latin typeface="Arial"/>
             </a:endParaRPr>
           </a:p>
           <a:p>
@@ -13377,7 +13481,7 @@
               </a:solidFill>
               <a:effectLst/>
               <a:uFillTx/>
-              <a:latin typeface="Lato"/>
+              <a:latin typeface="Arial"/>
             </a:endParaRPr>
           </a:p>
           <a:p>
@@ -13398,7 +13502,7 @@
               </a:solidFill>
               <a:effectLst/>
               <a:uFillTx/>
-              <a:latin typeface="Lato"/>
+              <a:latin typeface="Arial"/>
             </a:endParaRPr>
           </a:p>
           <a:p>
@@ -13419,7 +13523,7 @@
               </a:solidFill>
               <a:effectLst/>
               <a:uFillTx/>
-              <a:latin typeface="Lato"/>
+              <a:latin typeface="Arial"/>
             </a:endParaRPr>
           </a:p>
           <a:p>
@@ -13429,7 +13533,7 @@
               </a:solidFill>
               <a:effectLst/>
               <a:uFillTx/>
-              <a:latin typeface="Lato"/>
+              <a:latin typeface="Arial"/>
             </a:endParaRPr>
           </a:p>
           <a:p>
@@ -13462,7 +13566,7 @@
               </a:solidFill>
               <a:effectLst/>
               <a:uFillTx/>
-              <a:latin typeface="Lato"/>
+              <a:latin typeface="Arial"/>
             </a:endParaRPr>
           </a:p>
           <a:p>
@@ -13472,7 +13576,7 @@
               </a:solidFill>
               <a:effectLst/>
               <a:uFillTx/>
-              <a:latin typeface="Lato"/>
+              <a:latin typeface="Arial"/>
             </a:endParaRPr>
           </a:p>
         </p:txBody>
@@ -13516,7 +13620,7 @@
       </p:grpSpPr>
       <p:pic>
         <p:nvPicPr>
-          <p:cNvPr id="234" name="Google Shape;243;p22"/>
+          <p:cNvPr id="231" name="Google Shape;224;p 2"/>
           <p:cNvPicPr/>
           <p:nvPr/>
         </p:nvPicPr>
@@ -13540,14 +13644,14 @@
       </p:pic>
       <p:sp>
         <p:nvSpPr>
-          <p:cNvPr id="235" name="Google Shape;245;p22"/>
+          <p:cNvPr id="232" name="Google Shape;226;p 3"/>
           <p:cNvSpPr/>
           <p:nvPr/>
         </p:nvSpPr>
         <p:spPr>
           <a:xfrm>
-            <a:off x="581040" y="1609560"/>
-            <a:ext cx="11029680" cy="343080"/>
+            <a:off x="581040" y="581040"/>
+            <a:ext cx="5190120" cy="960120"/>
           </a:xfrm>
           <a:prstGeom prst="rect">
             <a:avLst/>
@@ -13570,6 +13674,341 @@
           <a:p>
             <a:pPr>
               <a:lnSpc>
+                <a:spcPct val="100000"/>
+              </a:lnSpc>
+              <a:tabLst>
+                <a:tab pos="0" algn="l"/>
+              </a:tabLst>
+            </a:pPr>
+            <a:r>
+              <a:rPr lang="en-US" sz="3150" b="1" u="none" strike="noStrike">
+                <a:solidFill>
+                  <a:srgbClr val="C5A059"/>
+                </a:solidFill>
+                <a:effectLst/>
+                <a:uFillTx/>
+                <a:latin typeface="Cinzel"/>
+                <a:ea typeface="Cinzel"/>
+              </a:rPr>
+              <a:t>Dictionary Entries with Multiple Entries</a:t>
+            </a:r>
+            <a:endParaRPr lang="en-US" sz="3150" b="0" u="none" strike="noStrike">
+              <a:solidFill>
+                <a:srgbClr val="FFFFFF"/>
+              </a:solidFill>
+              <a:effectLst/>
+              <a:uFillTx/>
+              <a:latin typeface="Arial"/>
+            </a:endParaRPr>
+          </a:p>
+        </p:txBody>
+      </p:sp>
+      <p:sp>
+        <p:nvSpPr>
+          <p:cNvPr id="233" name="Google Shape;227;p 3"/>
+          <p:cNvSpPr/>
+          <p:nvPr/>
+        </p:nvSpPr>
+        <p:spPr>
+          <a:xfrm>
+            <a:off x="581040" y="1579320"/>
+            <a:ext cx="4943160" cy="9000"/>
+          </a:xfrm>
+          <a:prstGeom prst="rect">
+            <a:avLst/>
+          </a:prstGeom>
+          <a:solidFill>
+            <a:srgbClr val="3D3422"/>
+          </a:solidFill>
+          <a:ln w="0">
+            <a:noFill/>
+          </a:ln>
+        </p:spPr>
+        <p:style>
+          <a:lnRef idx="0"/>
+          <a:fillRef idx="0"/>
+          <a:effectRef idx="0"/>
+          <a:fontRef idx="minor"/>
+        </p:style>
+        <p:txBody>
+          <a:bodyPr tIns="-36360" bIns="-36360" anchor="ctr">
+            <a:noAutofit/>
+          </a:bodyPr>
+          <a:p>
+            <a:endParaRPr lang="en-US" sz="1400" b="0" u="none" strike="noStrike">
+              <a:solidFill>
+                <a:srgbClr val="FFFFFF"/>
+              </a:solidFill>
+              <a:effectLst/>
+              <a:uFillTx/>
+              <a:latin typeface="Arial"/>
+            </a:endParaRPr>
+          </a:p>
+        </p:txBody>
+      </p:sp>
+      <p:pic>
+        <p:nvPicPr>
+          <p:cNvPr id="234" name="Google Shape;228;p 3"/>
+          <p:cNvPicPr/>
+          <p:nvPr/>
+        </p:nvPicPr>
+        <p:blipFill>
+          <a:blip r:embed="rId2"/>
+          <a:stretch/>
+        </p:blipFill>
+        <p:spPr>
+          <a:xfrm>
+            <a:off x="6095880" y="9360"/>
+            <a:ext cx="6086160" cy="6857640"/>
+          </a:xfrm>
+          <a:prstGeom prst="rect">
+            <a:avLst/>
+          </a:prstGeom>
+          <a:noFill/>
+          <a:ln w="0">
+            <a:noFill/>
+          </a:ln>
+        </p:spPr>
+      </p:pic>
+      <p:sp>
+        <p:nvSpPr>
+          <p:cNvPr id="235" name="Google Shape;229;p 3"/>
+          <p:cNvSpPr/>
+          <p:nvPr/>
+        </p:nvSpPr>
+        <p:spPr>
+          <a:xfrm>
+            <a:off x="581040" y="1609560"/>
+            <a:ext cx="4943160" cy="685800"/>
+          </a:xfrm>
+          <a:prstGeom prst="rect">
+            <a:avLst/>
+          </a:prstGeom>
+          <a:noFill/>
+          <a:ln w="0">
+            <a:noFill/>
+          </a:ln>
+        </p:spPr>
+        <p:style>
+          <a:lnRef idx="0"/>
+          <a:fillRef idx="0"/>
+          <a:effectRef idx="0"/>
+          <a:fontRef idx="minor"/>
+        </p:style>
+        <p:txBody>
+          <a:bodyPr lIns="0" tIns="0" rIns="0" bIns="0" anchor="t">
+            <a:spAutoFit/>
+          </a:bodyPr>
+          <a:p>
+            <a:pPr>
+              <a:lnSpc>
+                <a:spcPct val="150000"/>
+              </a:lnSpc>
+              <a:tabLst>
+                <a:tab pos="0" algn="l"/>
+              </a:tabLst>
+            </a:pPr>
+            <a:r>
+              <a:rPr lang="en-US" sz="1500" b="1" u="none" strike="noStrike">
+                <a:solidFill>
+                  <a:srgbClr val="D1D1D1"/>
+                </a:solidFill>
+                <a:effectLst/>
+                <a:uFillTx/>
+                <a:latin typeface="Lato"/>
+                <a:ea typeface="Lato"/>
+              </a:rPr>
+              <a:t>Step 10: Dictionary entries allow for multiple values in a variable:</a:t>
+            </a:r>
+            <a:endParaRPr lang="en-US" sz="1500" b="0" u="none" strike="noStrike">
+              <a:solidFill>
+                <a:srgbClr val="FFFFFF"/>
+              </a:solidFill>
+              <a:effectLst/>
+              <a:uFillTx/>
+              <a:latin typeface="Arial"/>
+            </a:endParaRPr>
+          </a:p>
+        </p:txBody>
+      </p:sp>
+      <p:sp>
+        <p:nvSpPr>
+          <p:cNvPr id="236" name="Google Shape;230;p 3"/>
+          <p:cNvSpPr/>
+          <p:nvPr/>
+        </p:nvSpPr>
+        <p:spPr>
+          <a:xfrm>
+            <a:off x="581040" y="3962520"/>
+            <a:ext cx="4943160" cy="343080"/>
+          </a:xfrm>
+          <a:prstGeom prst="rect">
+            <a:avLst/>
+          </a:prstGeom>
+          <a:noFill/>
+          <a:ln w="0">
+            <a:noFill/>
+          </a:ln>
+        </p:spPr>
+        <p:style>
+          <a:lnRef idx="0"/>
+          <a:fillRef idx="0"/>
+          <a:effectRef idx="0"/>
+          <a:fontRef idx="minor"/>
+        </p:style>
+        <p:txBody>
+          <a:bodyPr lIns="0" tIns="0" rIns="0" bIns="0" anchor="t">
+            <a:spAutoFit/>
+          </a:bodyPr>
+          <a:p>
+            <a:pPr>
+              <a:lnSpc>
+                <a:spcPct val="150000"/>
+              </a:lnSpc>
+              <a:tabLst>
+                <a:tab pos="0" algn="l"/>
+              </a:tabLst>
+            </a:pPr>
+            <a:r>
+              <a:rPr lang="en-US" sz="1500" b="0" u="none" strike="noStrike">
+                <a:solidFill>
+                  <a:srgbClr val="D1D1D1"/>
+                </a:solidFill>
+                <a:effectLst/>
+                <a:uFillTx/>
+                <a:latin typeface="Lato"/>
+                <a:ea typeface="Lato"/>
+              </a:rPr>
+              <a:t>Using this, we can select from multiple classes in our code.</a:t>
+            </a:r>
+            <a:endParaRPr lang="en-US" sz="1500" b="0" u="none" strike="noStrike">
+              <a:solidFill>
+                <a:srgbClr val="FFFFFF"/>
+              </a:solidFill>
+              <a:effectLst/>
+              <a:uFillTx/>
+              <a:latin typeface="Arial"/>
+            </a:endParaRPr>
+          </a:p>
+        </p:txBody>
+      </p:sp>
+      <p:pic>
+        <p:nvPicPr>
+          <p:cNvPr id="237" name=""/>
+          <p:cNvPicPr/>
+          <p:nvPr/>
+        </p:nvPicPr>
+        <p:blipFill>
+          <a:blip r:embed="rId3"/>
+          <a:stretch/>
+        </p:blipFill>
+        <p:spPr>
+          <a:xfrm>
+            <a:off x="171720" y="2449440"/>
+            <a:ext cx="5777280" cy="1161720"/>
+          </a:xfrm>
+          <a:prstGeom prst="rect">
+            <a:avLst/>
+          </a:prstGeom>
+          <a:noFill/>
+          <a:ln w="0">
+            <a:noFill/>
+          </a:ln>
+        </p:spPr>
+      </p:pic>
+    </p:spTree>
+  </p:cSld>
+  <mc:AlternateContent>
+    <mc:Choice Requires="p14">
+      <p:transition spd="slow" p14:dur="2000"/>
+    </mc:Choice>
+    <mc:Fallback>
+      <p:transition spd="slow"/>
+    </mc:Fallback>
+  </mc:AlternateContent>
+</p:sld>
+</file>
+
+<file path=ppt/slides/slide31.xml><?xml version="1.0" encoding="utf-8"?>
+<p:sld xmlns:a="http://schemas.openxmlformats.org/drawingml/2006/main" xmlns:p="http://schemas.openxmlformats.org/presentationml/2006/main" xmlns:r="http://schemas.openxmlformats.org/officeDocument/2006/relationships" xmlns:p14="http://schemas.microsoft.com/office/powerpoint/2010/main" xmlns:p15="http://schemas.microsoft.com/office/powerpoint/2012/main" xmlns:mc="http://schemas.openxmlformats.org/markup-compatibility/2006">
+  <p:cSld>
+    <p:bg>
+      <p:bgPr>
+        <a:solidFill>
+          <a:srgbClr val="0B0B0B"/>
+        </a:solidFill>
+      </p:bgPr>
+    </p:bg>
+    <p:spTree>
+      <p:nvGrpSpPr>
+        <p:cNvPr id="1" name=""/>
+        <p:cNvGrpSpPr/>
+        <p:nvPr/>
+      </p:nvGrpSpPr>
+      <p:grpSpPr>
+        <a:xfrm>
+          <a:off x="0" y="0"/>
+          <a:ext cx="0" cy="0"/>
+          <a:chOff x="0" y="0"/>
+          <a:chExt cx="0" cy="0"/>
+        </a:xfrm>
+      </p:grpSpPr>
+      <p:pic>
+        <p:nvPicPr>
+          <p:cNvPr id="238" name="Google Shape;243;p22"/>
+          <p:cNvPicPr/>
+          <p:nvPr/>
+        </p:nvPicPr>
+        <p:blipFill>
+          <a:blip r:embed="rId1"/>
+          <a:stretch/>
+        </p:blipFill>
+        <p:spPr>
+          <a:xfrm>
+            <a:off x="0" y="0"/>
+            <a:ext cx="12191760" cy="6857640"/>
+          </a:xfrm>
+          <a:prstGeom prst="rect">
+            <a:avLst/>
+          </a:prstGeom>
+          <a:noFill/>
+          <a:ln w="0">
+            <a:noFill/>
+          </a:ln>
+        </p:spPr>
+      </p:pic>
+      <p:sp>
+        <p:nvSpPr>
+          <p:cNvPr id="239" name="Google Shape;245;p22"/>
+          <p:cNvSpPr/>
+          <p:nvPr/>
+        </p:nvSpPr>
+        <p:spPr>
+          <a:xfrm>
+            <a:off x="581040" y="1609560"/>
+            <a:ext cx="11029680" cy="343080"/>
+          </a:xfrm>
+          <a:prstGeom prst="rect">
+            <a:avLst/>
+          </a:prstGeom>
+          <a:noFill/>
+          <a:ln w="0">
+            <a:noFill/>
+          </a:ln>
+        </p:spPr>
+        <p:style>
+          <a:lnRef idx="0"/>
+          <a:fillRef idx="0"/>
+          <a:effectRef idx="0"/>
+          <a:fontRef idx="minor"/>
+        </p:style>
+        <p:txBody>
+          <a:bodyPr lIns="0" tIns="0" rIns="0" bIns="0" anchor="t">
+            <a:spAutoFit/>
+          </a:bodyPr>
+          <a:p>
+            <a:pPr>
+              <a:lnSpc>
                 <a:spcPct val="150000"/>
               </a:lnSpc>
               <a:tabLst>
@@ -13613,7 +14052,7 @@
       </p:sp>
       <p:graphicFrame>
         <p:nvGraphicFramePr>
-          <p:cNvPr id="236" name="Google Shape;246;p22"/>
+          <p:cNvPr id="240" name="Google Shape;246;p22"/>
           <p:cNvGraphicFramePr/>
           <p:nvPr/>
         </p:nvGraphicFramePr>
@@ -14701,7 +15140,7 @@
       </p:graphicFrame>
       <p:sp>
         <p:nvSpPr>
-          <p:cNvPr id="237" name="Google Shape;254;p22"/>
+          <p:cNvPr id="241" name="Google Shape;254;p22"/>
           <p:cNvSpPr/>
           <p:nvPr/>
         </p:nvSpPr>
@@ -14744,7 +15183,7 @@
       </p:sp>
       <p:sp>
         <p:nvSpPr>
-          <p:cNvPr id="238" name="Google Shape;255;p22"/>
+          <p:cNvPr id="242" name="Google Shape;255;p22"/>
           <p:cNvSpPr/>
           <p:nvPr/>
         </p:nvSpPr>
@@ -14787,7 +15226,7 @@
       </p:sp>
       <p:sp>
         <p:nvSpPr>
-          <p:cNvPr id="239" name="Google Shape;256;p22"/>
+          <p:cNvPr id="243" name="Google Shape;256;p22"/>
           <p:cNvSpPr/>
           <p:nvPr/>
         </p:nvSpPr>
@@ -14830,7 +15269,7 @@
       </p:sp>
       <p:sp>
         <p:nvSpPr>
-          <p:cNvPr id="240" name="Google Shape;257;p22"/>
+          <p:cNvPr id="244" name="Google Shape;257;p22"/>
           <p:cNvSpPr/>
           <p:nvPr/>
         </p:nvSpPr>
@@ -14873,7 +15312,7 @@
       </p:sp>
       <p:sp>
         <p:nvSpPr>
-          <p:cNvPr id="241" name="Google Shape;258;p22"/>
+          <p:cNvPr id="245" name="Google Shape;258;p22"/>
           <p:cNvSpPr/>
           <p:nvPr/>
         </p:nvSpPr>
@@ -14916,7 +15355,7 @@
       </p:sp>
       <p:sp>
         <p:nvSpPr>
-          <p:cNvPr id="242" name="Google Shape;259;p22"/>
+          <p:cNvPr id="246" name="Google Shape;259;p22"/>
           <p:cNvSpPr/>
           <p:nvPr/>
         </p:nvSpPr>
@@ -14959,7 +15398,7 @@
       </p:sp>
       <p:sp>
         <p:nvSpPr>
-          <p:cNvPr id="243" name="Google Shape;260;p22"/>
+          <p:cNvPr id="247" name="Google Shape;260;p22"/>
           <p:cNvSpPr/>
           <p:nvPr/>
         </p:nvSpPr>
@@ -15002,7 +15441,7 @@
       </p:sp>
       <p:sp>
         <p:nvSpPr>
-          <p:cNvPr id="244" name="Google Shape;261;p22"/>
+          <p:cNvPr id="248" name="Google Shape;261;p22"/>
           <p:cNvSpPr/>
           <p:nvPr/>
         </p:nvSpPr>
@@ -15045,7 +15484,7 @@
       </p:sp>
       <p:sp>
         <p:nvSpPr>
-          <p:cNvPr id="245" name="Google Shape;262;p22"/>
+          <p:cNvPr id="249" name="Google Shape;262;p22"/>
           <p:cNvSpPr/>
           <p:nvPr/>
         </p:nvSpPr>
@@ -15088,7 +15527,7 @@
       </p:sp>
       <p:sp>
         <p:nvSpPr>
-          <p:cNvPr id="246" name="Google Shape;263;p22"/>
+          <p:cNvPr id="250" name="Google Shape;263;p22"/>
           <p:cNvSpPr/>
           <p:nvPr/>
         </p:nvSpPr>
@@ -15131,7 +15570,7 @@
       </p:sp>
       <p:sp>
         <p:nvSpPr>
-          <p:cNvPr id="247" name="Google Shape;264;p22"/>
+          <p:cNvPr id="251" name="Google Shape;264;p22"/>
           <p:cNvSpPr/>
           <p:nvPr/>
         </p:nvSpPr>
@@ -15174,7 +15613,7 @@
       </p:sp>
       <p:sp>
         <p:nvSpPr>
-          <p:cNvPr id="248" name="Google Shape;265;p22"/>
+          <p:cNvPr id="252" name="Google Shape;265;p22"/>
           <p:cNvSpPr/>
           <p:nvPr/>
         </p:nvSpPr>
@@ -15217,7 +15656,7 @@
       </p:sp>
       <p:sp>
         <p:nvSpPr>
-          <p:cNvPr id="249" name="Google Shape;266;p22"/>
+          <p:cNvPr id="253" name="Google Shape;266;p22"/>
           <p:cNvSpPr/>
           <p:nvPr/>
         </p:nvSpPr>
@@ -15278,7 +15717,7 @@
       </p:sp>
       <p:sp>
         <p:nvSpPr>
-          <p:cNvPr id="250" name="Google Shape;267;p22"/>
+          <p:cNvPr id="254" name="Google Shape;267;p22"/>
           <p:cNvSpPr/>
           <p:nvPr/>
         </p:nvSpPr>
@@ -15332,7 +15771,7 @@
 </p:sld>
 </file>
 
-<file path=ppt/slides/slide31.xml><?xml version="1.0" encoding="utf-8"?>
+<file path=ppt/slides/slide32.xml><?xml version="1.0" encoding="utf-8"?>
 <p:sld xmlns:a="http://schemas.openxmlformats.org/drawingml/2006/main" xmlns:p="http://schemas.openxmlformats.org/presentationml/2006/main" xmlns:r="http://schemas.openxmlformats.org/officeDocument/2006/relationships" xmlns:p14="http://schemas.microsoft.com/office/powerpoint/2010/main" xmlns:p15="http://schemas.microsoft.com/office/powerpoint/2012/main" xmlns:mc="http://schemas.openxmlformats.org/markup-compatibility/2006">
   <p:cSld>
     <p:bg>
@@ -15358,7 +15797,7 @@
       </p:grpSpPr>
       <p:sp>
         <p:nvSpPr>
-          <p:cNvPr id="251" name="Google Shape;103;p 26"/>
+          <p:cNvPr id="255" name="Google Shape;103;p 26"/>
           <p:cNvSpPr/>
           <p:nvPr/>
         </p:nvSpPr>
@@ -15419,7 +15858,7 @@
       </p:sp>
       <p:sp>
         <p:nvSpPr>
-          <p:cNvPr id="252" name="Google Shape;104;p 25"/>
+          <p:cNvPr id="256" name="Google Shape;104;p 25"/>
           <p:cNvSpPr/>
           <p:nvPr/>
         </p:nvSpPr>
@@ -15618,7 +16057,7 @@
       </p:sp>
       <p:sp>
         <p:nvSpPr>
-          <p:cNvPr id="253" name="Google Shape;113;p 14"/>
+          <p:cNvPr id="257" name="Google Shape;113;p 14"/>
           <p:cNvSpPr/>
           <p:nvPr/>
         </p:nvSpPr>
@@ -15679,7 +16118,7 @@
       </p:sp>
       <p:sp>
         <p:nvSpPr>
-          <p:cNvPr id="254" name="Google Shape;114;p 14"/>
+          <p:cNvPr id="258" name="Google Shape;114;p 14"/>
           <p:cNvSpPr/>
           <p:nvPr/>
         </p:nvSpPr>
@@ -15722,7 +16161,7 @@
       </p:sp>
       <p:sp>
         <p:nvSpPr>
-          <p:cNvPr id="255" name="Google Shape;103;p 27"/>
+          <p:cNvPr id="259" name="Google Shape;103;p 27"/>
           <p:cNvSpPr/>
           <p:nvPr/>
         </p:nvSpPr>
@@ -15783,7 +16222,7 @@
       </p:sp>
       <p:sp>
         <p:nvSpPr>
-          <p:cNvPr id="256" name="Google Shape;104;p 26"/>
+          <p:cNvPr id="260" name="Google Shape;104;p 26"/>
           <p:cNvSpPr/>
           <p:nvPr/>
         </p:nvSpPr>
@@ -15897,7 +16336,7 @@
 </p:sld>
 </file>
 
-<file path=ppt/slides/slide32.xml><?xml version="1.0" encoding="utf-8"?>
+<file path=ppt/slides/slide33.xml><?xml version="1.0" encoding="utf-8"?>
 <p:sld xmlns:a="http://schemas.openxmlformats.org/drawingml/2006/main" xmlns:p="http://schemas.openxmlformats.org/presentationml/2006/main" xmlns:r="http://schemas.openxmlformats.org/officeDocument/2006/relationships" xmlns:p14="http://schemas.microsoft.com/office/powerpoint/2010/main" xmlns:p15="http://schemas.microsoft.com/office/powerpoint/2012/main" xmlns:mc="http://schemas.openxmlformats.org/markup-compatibility/2006">
   <p:cSld>
     <p:spTree>
@@ -15916,7 +16355,7 @@
       </p:grpSpPr>
       <p:pic>
         <p:nvPicPr>
-          <p:cNvPr id="257" name="Google Shape;272;p23"/>
+          <p:cNvPr id="261" name="Google Shape;272;p23"/>
           <p:cNvPicPr/>
           <p:nvPr/>
         </p:nvPicPr>
@@ -15940,7 +16379,7 @@
       </p:pic>
       <p:pic>
         <p:nvPicPr>
-          <p:cNvPr id="258" name="Google Shape;273;p23"/>
+          <p:cNvPr id="262" name="Google Shape;273;p23"/>
           <p:cNvPicPr/>
           <p:nvPr/>
         </p:nvPicPr>
@@ -15964,7 +16403,7 @@
       </p:pic>
       <p:sp>
         <p:nvSpPr>
-          <p:cNvPr id="259" name="Google Shape;274;p23"/>
+          <p:cNvPr id="263" name="Google Shape;274;p23"/>
           <p:cNvSpPr/>
           <p:nvPr/>
         </p:nvSpPr>
@@ -16025,7 +16464,7 @@
       </p:sp>
       <p:sp>
         <p:nvSpPr>
-          <p:cNvPr id="260" name="Google Shape;275;p23"/>
+          <p:cNvPr id="264" name="Google Shape;275;p23"/>
           <p:cNvSpPr/>
           <p:nvPr/>
         </p:nvSpPr>
@@ -16086,7 +16525,7 @@
       </p:sp>
       <p:sp>
         <p:nvSpPr>
-          <p:cNvPr id="261" name="Google Shape;276;p23"/>
+          <p:cNvPr id="265" name="Google Shape;276;p23"/>
           <p:cNvSpPr/>
           <p:nvPr/>
         </p:nvSpPr>
@@ -16145,491 +16584,6 @@
           </a:p>
         </p:txBody>
       </p:sp>
-    </p:spTree>
-  </p:cSld>
-  <mc:AlternateContent>
-    <mc:Choice Requires="p14">
-      <p:transition spd="slow" p14:dur="2000"/>
-    </mc:Choice>
-    <mc:Fallback>
-      <p:transition spd="slow"/>
-    </mc:Fallback>
-  </mc:AlternateContent>
-</p:sld>
-</file>
-
-<file path=ppt/slides/slide33.xml><?xml version="1.0" encoding="utf-8"?>
-<p:sld xmlns:a="http://schemas.openxmlformats.org/drawingml/2006/main" xmlns:p="http://schemas.openxmlformats.org/presentationml/2006/main" xmlns:r="http://schemas.openxmlformats.org/officeDocument/2006/relationships" xmlns:p14="http://schemas.microsoft.com/office/powerpoint/2010/main" xmlns:p15="http://schemas.microsoft.com/office/powerpoint/2012/main" xmlns:mc="http://schemas.openxmlformats.org/markup-compatibility/2006">
-  <p:cSld>
-    <p:bg>
-      <p:bgPr>
-        <a:solidFill>
-          <a:srgbClr val="0B0B0B"/>
-        </a:solidFill>
-      </p:bgPr>
-    </p:bg>
-    <p:spTree>
-      <p:nvGrpSpPr>
-        <p:cNvPr id="1" name=""/>
-        <p:cNvGrpSpPr/>
-        <p:nvPr/>
-      </p:nvGrpSpPr>
-      <p:grpSpPr>
-        <a:xfrm>
-          <a:off x="0" y="0"/>
-          <a:ext cx="0" cy="0"/>
-          <a:chOff x="0" y="0"/>
-          <a:chExt cx="0" cy="0"/>
-        </a:xfrm>
-      </p:grpSpPr>
-      <p:pic>
-        <p:nvPicPr>
-          <p:cNvPr id="262" name="Google Shape;224;p 3"/>
-          <p:cNvPicPr/>
-          <p:nvPr/>
-        </p:nvPicPr>
-        <p:blipFill>
-          <a:blip r:embed="rId1"/>
-          <a:stretch/>
-        </p:blipFill>
-        <p:spPr>
-          <a:xfrm>
-            <a:off x="0" y="0"/>
-            <a:ext cx="12191760" cy="6857640"/>
-          </a:xfrm>
-          <a:prstGeom prst="rect">
-            <a:avLst/>
-          </a:prstGeom>
-          <a:noFill/>
-          <a:ln w="0">
-            <a:noFill/>
-          </a:ln>
-        </p:spPr>
-      </p:pic>
-      <p:sp>
-        <p:nvSpPr>
-          <p:cNvPr id="263" name="Google Shape;226;p 4"/>
-          <p:cNvSpPr/>
-          <p:nvPr/>
-        </p:nvSpPr>
-        <p:spPr>
-          <a:xfrm>
-            <a:off x="581040" y="581040"/>
-            <a:ext cx="5190120" cy="960120"/>
-          </a:xfrm>
-          <a:prstGeom prst="rect">
-            <a:avLst/>
-          </a:prstGeom>
-          <a:noFill/>
-          <a:ln w="0">
-            <a:noFill/>
-          </a:ln>
-        </p:spPr>
-        <p:style>
-          <a:lnRef idx="0"/>
-          <a:fillRef idx="0"/>
-          <a:effectRef idx="0"/>
-          <a:fontRef idx="minor"/>
-        </p:style>
-        <p:txBody>
-          <a:bodyPr lIns="0" tIns="0" rIns="0" bIns="0" anchor="t">
-            <a:spAutoFit/>
-          </a:bodyPr>
-          <a:p>
-            <a:pPr>
-              <a:lnSpc>
-                <a:spcPct val="100000"/>
-              </a:lnSpc>
-              <a:tabLst>
-                <a:tab pos="0" algn="l"/>
-              </a:tabLst>
-            </a:pPr>
-            <a:r>
-              <a:rPr lang="en-US" sz="3150" b="1" u="none" strike="noStrike">
-                <a:solidFill>
-                  <a:srgbClr val="C5A059"/>
-                </a:solidFill>
-                <a:effectLst/>
-                <a:uFillTx/>
-                <a:latin typeface="Cinzel"/>
-                <a:ea typeface="Cinzel"/>
-              </a:rPr>
-              <a:t>Where do we Go From here?</a:t>
-            </a:r>
-            <a:endParaRPr lang="en-US" sz="3150" b="0" u="none" strike="noStrike">
-              <a:solidFill>
-                <a:srgbClr val="FFFFFF"/>
-              </a:solidFill>
-              <a:effectLst/>
-              <a:uFillTx/>
-              <a:latin typeface="Arial"/>
-            </a:endParaRPr>
-          </a:p>
-        </p:txBody>
-      </p:sp>
-      <p:sp>
-        <p:nvSpPr>
-          <p:cNvPr id="264" name="Google Shape;227;p 4"/>
-          <p:cNvSpPr/>
-          <p:nvPr/>
-        </p:nvSpPr>
-        <p:spPr>
-          <a:xfrm>
-            <a:off x="581040" y="1579320"/>
-            <a:ext cx="4943160" cy="9000"/>
-          </a:xfrm>
-          <a:prstGeom prst="rect">
-            <a:avLst/>
-          </a:prstGeom>
-          <a:solidFill>
-            <a:srgbClr val="3D3422"/>
-          </a:solidFill>
-          <a:ln w="0">
-            <a:noFill/>
-          </a:ln>
-        </p:spPr>
-        <p:style>
-          <a:lnRef idx="0"/>
-          <a:fillRef idx="0"/>
-          <a:effectRef idx="0"/>
-          <a:fontRef idx="minor"/>
-        </p:style>
-        <p:txBody>
-          <a:bodyPr tIns="-36360" bIns="-36360" anchor="ctr">
-            <a:noAutofit/>
-          </a:bodyPr>
-          <a:p>
-            <a:endParaRPr lang="en-US" sz="1400" b="0" u="none" strike="noStrike">
-              <a:solidFill>
-                <a:srgbClr val="FFFFFF"/>
-              </a:solidFill>
-              <a:effectLst/>
-              <a:uFillTx/>
-              <a:latin typeface="Arial"/>
-            </a:endParaRPr>
-          </a:p>
-        </p:txBody>
-      </p:sp>
-      <p:pic>
-        <p:nvPicPr>
-          <p:cNvPr id="265" name="Google Shape;228;p 4"/>
-          <p:cNvPicPr/>
-          <p:nvPr/>
-        </p:nvPicPr>
-        <p:blipFill>
-          <a:blip r:embed="rId2"/>
-          <a:stretch/>
-        </p:blipFill>
-        <p:spPr>
-          <a:xfrm>
-            <a:off x="6095880" y="9360"/>
-            <a:ext cx="6086160" cy="6857640"/>
-          </a:xfrm>
-          <a:prstGeom prst="rect">
-            <a:avLst/>
-          </a:prstGeom>
-          <a:noFill/>
-          <a:ln w="0">
-            <a:noFill/>
-          </a:ln>
-        </p:spPr>
-      </p:pic>
-      <p:sp>
-        <p:nvSpPr>
-          <p:cNvPr id="266" name="Google Shape;229;p 4"/>
-          <p:cNvSpPr/>
-          <p:nvPr/>
-        </p:nvSpPr>
-        <p:spPr>
-          <a:xfrm>
-            <a:off x="581040" y="1609560"/>
-            <a:ext cx="4943160" cy="4455720"/>
-          </a:xfrm>
-          <a:prstGeom prst="rect">
-            <a:avLst/>
-          </a:prstGeom>
-          <a:noFill/>
-          <a:ln w="0">
-            <a:noFill/>
-          </a:ln>
-        </p:spPr>
-        <p:style>
-          <a:lnRef idx="0"/>
-          <a:fillRef idx="0"/>
-          <a:effectRef idx="0"/>
-          <a:fontRef idx="minor"/>
-        </p:style>
-        <p:txBody>
-          <a:bodyPr lIns="0" tIns="0" rIns="0" bIns="0" anchor="t">
-            <a:spAutoFit/>
-          </a:bodyPr>
-          <a:p>
-            <a:pPr>
-              <a:lnSpc>
-                <a:spcPct val="150000"/>
-              </a:lnSpc>
-              <a:tabLst>
-                <a:tab pos="0" algn="l"/>
-              </a:tabLst>
-            </a:pPr>
-            <a:r>
-              <a:rPr lang="en-US" sz="1500" b="1" u="none" strike="noStrike">
-                <a:solidFill>
-                  <a:srgbClr val="D1D1D1"/>
-                </a:solidFill>
-                <a:effectLst/>
-                <a:uFillTx/>
-                <a:latin typeface="Lato"/>
-                <a:ea typeface="Lato"/>
-              </a:rPr>
-              <a:t>We don’t have time to get into more detail in this course and actually use these dictionary entries.</a:t>
-            </a:r>
-            <a:endParaRPr lang="en-US" sz="1500" b="0" u="none" strike="noStrike">
-              <a:solidFill>
-                <a:srgbClr val="FFFFFF"/>
-              </a:solidFill>
-              <a:effectLst/>
-              <a:uFillTx/>
-              <a:latin typeface="Arial"/>
-            </a:endParaRPr>
-          </a:p>
-          <a:p>
-            <a:pPr>
-              <a:lnSpc>
-                <a:spcPct val="150000"/>
-              </a:lnSpc>
-              <a:tabLst>
-                <a:tab pos="0" algn="l"/>
-              </a:tabLst>
-            </a:pPr>
-            <a:r>
-              <a:rPr lang="en-US" sz="1500" b="1" u="none" strike="noStrike">
-                <a:solidFill>
-                  <a:srgbClr val="D1D1D1"/>
-                </a:solidFill>
-                <a:effectLst/>
-                <a:uFillTx/>
-                <a:latin typeface="Lato"/>
-                <a:ea typeface="Lato"/>
-              </a:rPr>
-              <a:t>But you can build it on your own if you want!</a:t>
-            </a:r>
-            <a:endParaRPr lang="en-US" sz="1500" b="0" u="none" strike="noStrike">
-              <a:solidFill>
-                <a:srgbClr val="FFFFFF"/>
-              </a:solidFill>
-              <a:effectLst/>
-              <a:uFillTx/>
-              <a:latin typeface="Arial"/>
-            </a:endParaRPr>
-          </a:p>
-          <a:p>
-            <a:pPr>
-              <a:lnSpc>
-                <a:spcPct val="150000"/>
-              </a:lnSpc>
-              <a:tabLst>
-                <a:tab pos="0" algn="l"/>
-              </a:tabLst>
-            </a:pPr>
-            <a:endParaRPr lang="en-US" sz="1500" b="0" u="none" strike="noStrike">
-              <a:solidFill>
-                <a:srgbClr val="FFFFFF"/>
-              </a:solidFill>
-              <a:effectLst/>
-              <a:uFillTx/>
-              <a:latin typeface="Arial"/>
-            </a:endParaRPr>
-          </a:p>
-          <a:p>
-            <a:pPr>
-              <a:lnSpc>
-                <a:spcPct val="150000"/>
-              </a:lnSpc>
-              <a:tabLst>
-                <a:tab pos="0" algn="l"/>
-              </a:tabLst>
-            </a:pPr>
-            <a:r>
-              <a:rPr lang="en-US" sz="1500" b="1" u="none" strike="noStrike">
-                <a:solidFill>
-                  <a:srgbClr val="D1D1D1"/>
-                </a:solidFill>
-                <a:effectLst/>
-                <a:uFillTx/>
-                <a:latin typeface="Lato"/>
-                <a:ea typeface="Lato"/>
-              </a:rPr>
-              <a:t>As a bonus, I have a completed a version of the code that you can play and use. It has all the features we learned plus one we didn’t cover: functions.</a:t>
-            </a:r>
-            <a:endParaRPr lang="en-US" sz="1500" b="0" u="none" strike="noStrike">
-              <a:solidFill>
-                <a:srgbClr val="FFFFFF"/>
-              </a:solidFill>
-              <a:effectLst/>
-              <a:uFillTx/>
-              <a:latin typeface="Arial"/>
-            </a:endParaRPr>
-          </a:p>
-          <a:p>
-            <a:pPr>
-              <a:lnSpc>
-                <a:spcPct val="150000"/>
-              </a:lnSpc>
-              <a:tabLst>
-                <a:tab pos="0" algn="l"/>
-              </a:tabLst>
-            </a:pPr>
-            <a:endParaRPr lang="en-US" sz="1500" b="0" u="none" strike="noStrike">
-              <a:solidFill>
-                <a:srgbClr val="FFFFFF"/>
-              </a:solidFill>
-              <a:effectLst/>
-              <a:uFillTx/>
-              <a:latin typeface="Arial"/>
-            </a:endParaRPr>
-          </a:p>
-          <a:p>
-            <a:pPr>
-              <a:lnSpc>
-                <a:spcPct val="150000"/>
-              </a:lnSpc>
-              <a:tabLst>
-                <a:tab pos="0" algn="l"/>
-              </a:tabLst>
-            </a:pPr>
-            <a:r>
-              <a:rPr lang="en-US" sz="1500" b="1" u="none" strike="noStrike">
-                <a:solidFill>
-                  <a:srgbClr val="D1D1D1"/>
-                </a:solidFill>
-                <a:effectLst/>
-                <a:uFillTx/>
-                <a:latin typeface="Lato"/>
-                <a:ea typeface="Lato"/>
-              </a:rPr>
-              <a:t>You can get it here:</a:t>
-            </a:r>
-            <a:endParaRPr lang="en-US" sz="1500" b="0" u="none" strike="noStrike">
-              <a:solidFill>
-                <a:srgbClr val="FFFFFF"/>
-              </a:solidFill>
-              <a:effectLst/>
-              <a:uFillTx/>
-              <a:latin typeface="Arial"/>
-            </a:endParaRPr>
-          </a:p>
-          <a:p>
-            <a:pPr>
-              <a:lnSpc>
-                <a:spcPct val="150000"/>
-              </a:lnSpc>
-              <a:tabLst>
-                <a:tab pos="0" algn="l"/>
-              </a:tabLst>
-            </a:pPr>
-            <a:r>
-              <a:rPr lang="en-US" sz="1500" b="1" u="none" strike="noStrike">
-                <a:solidFill>
-                  <a:srgbClr val="D1D1D1"/>
-                </a:solidFill>
-                <a:effectLst/>
-                <a:uFillTx/>
-                <a:latin typeface="Lato"/>
-                <a:ea typeface="Lato"/>
-                <a:hlinkClick r:id="rId3"/>
-              </a:rPr>
-              <a:t>https://github.com/jemiller-iwcc/python-elden-ring</a:t>
-            </a:r>
-            <a:endParaRPr lang="en-US" sz="1500" b="0" u="none" strike="noStrike">
-              <a:solidFill>
-                <a:srgbClr val="FFFFFF"/>
-              </a:solidFill>
-              <a:effectLst/>
-              <a:uFillTx/>
-              <a:latin typeface="Arial"/>
-            </a:endParaRPr>
-          </a:p>
-          <a:p>
-            <a:pPr>
-              <a:lnSpc>
-                <a:spcPct val="150000"/>
-              </a:lnSpc>
-              <a:tabLst>
-                <a:tab pos="0" algn="l"/>
-              </a:tabLst>
-            </a:pPr>
-            <a:endParaRPr lang="en-US" sz="1500" b="0" u="none" strike="noStrike">
-              <a:solidFill>
-                <a:srgbClr val="FFFFFF"/>
-              </a:solidFill>
-              <a:effectLst/>
-              <a:uFillTx/>
-              <a:latin typeface="Arial"/>
-            </a:endParaRPr>
-          </a:p>
-          <a:p>
-            <a:pPr>
-              <a:lnSpc>
-                <a:spcPct val="150000"/>
-              </a:lnSpc>
-              <a:tabLst>
-                <a:tab pos="0" algn="l"/>
-              </a:tabLst>
-            </a:pPr>
-            <a:r>
-              <a:rPr lang="en-US" sz="1500" b="1" u="none" strike="noStrike">
-                <a:solidFill>
-                  <a:srgbClr val="D1D1D1"/>
-                </a:solidFill>
-                <a:effectLst/>
-                <a:uFillTx/>
-                <a:latin typeface="Lato"/>
-                <a:ea typeface="Lato"/>
-              </a:rPr>
-              <a:t>All code solutions, pseudocode, and these slides are on the site.</a:t>
-            </a:r>
-            <a:endParaRPr lang="en-US" sz="1500" b="0" u="none" strike="noStrike">
-              <a:solidFill>
-                <a:srgbClr val="FFFFFF"/>
-              </a:solidFill>
-              <a:effectLst/>
-              <a:uFillTx/>
-              <a:latin typeface="Arial"/>
-            </a:endParaRPr>
-          </a:p>
-        </p:txBody>
-      </p:sp>
-      <p:pic>
-        <p:nvPicPr>
-          <p:cNvPr id="267" name=""/>
-          <p:cNvPicPr/>
-          <p:nvPr/>
-        </p:nvPicPr>
-        <p:blipFill>
-          <a:blip r:embed="rId4">
-            <a:extLst>
-              <a:ext uri="{96DAC541-7B7A-43D3-8B79-37D633B846F1}">
-                <asvg:svgBlip xmlns:asvg="http://schemas.microsoft.com/office/drawing/2016/SVG/main" r:embed="rId5"/>
-              </a:ext>
-            </a:extLst>
-          </a:blip>
-          <a:stretch/>
-        </p:blipFill>
-        <p:spPr>
-          <a:xfrm>
-            <a:off x="6571080" y="813960"/>
-            <a:ext cx="5065560" cy="5065560"/>
-          </a:xfrm>
-          <a:prstGeom prst="rect">
-            <a:avLst/>
-          </a:prstGeom>
-          <a:noFill/>
-          <a:ln w="0">
-            <a:noFill/>
-          </a:ln>
-        </p:spPr>
-      </p:pic>
     </p:spTree>
   </p:cSld>
   <mc:AlternateContent>
@@ -16669,7 +16623,7 @@
       </p:grpSpPr>
       <p:pic>
         <p:nvPicPr>
-          <p:cNvPr id="268" name="Google Shape;281;p24"/>
+          <p:cNvPr id="266" name="Google Shape;224;p 3"/>
           <p:cNvPicPr/>
           <p:nvPr/>
         </p:nvPicPr>
@@ -16691,40 +16645,16 @@
           </a:ln>
         </p:spPr>
       </p:pic>
-      <p:pic>
-        <p:nvPicPr>
-          <p:cNvPr id="269" name="Google Shape;282;p24"/>
-          <p:cNvPicPr/>
-          <p:nvPr/>
-        </p:nvPicPr>
-        <p:blipFill>
-          <a:blip r:embed="rId2"/>
-          <a:stretch/>
-        </p:blipFill>
-        <p:spPr>
-          <a:xfrm>
-            <a:off x="5810400" y="2328840"/>
-            <a:ext cx="571320" cy="761760"/>
-          </a:xfrm>
-          <a:prstGeom prst="rect">
-            <a:avLst/>
-          </a:prstGeom>
-          <a:noFill/>
-          <a:ln w="0">
-            <a:noFill/>
-          </a:ln>
-        </p:spPr>
-      </p:pic>
-      <p:sp>
-        <p:nvSpPr>
-          <p:cNvPr id="270" name="Google Shape;283;p24"/>
+      <p:sp>
+        <p:nvSpPr>
+          <p:cNvPr id="267" name="Google Shape;226;p 4"/>
           <p:cNvSpPr/>
           <p:nvPr/>
         </p:nvSpPr>
         <p:spPr>
           <a:xfrm>
-            <a:off x="3845880" y="3281400"/>
-            <a:ext cx="4500360" cy="274680"/>
+            <a:off x="581040" y="581040"/>
+            <a:ext cx="5190120" cy="960120"/>
           </a:xfrm>
           <a:prstGeom prst="rect">
             <a:avLst/>
@@ -16745,7 +16675,7 @@
             <a:spAutoFit/>
           </a:bodyPr>
           <a:p>
-            <a:pPr algn="ctr">
+            <a:pPr>
               <a:lnSpc>
                 <a:spcPct val="100000"/>
               </a:lnSpc>
@@ -16754,7 +16684,7 @@
               </a:tabLst>
             </a:pPr>
             <a:r>
-              <a:rPr lang="en-US" sz="1800" b="1" u="none" strike="noStrike">
+              <a:rPr lang="en-US" sz="3150" b="1" u="none" strike="noStrike">
                 <a:solidFill>
                   <a:srgbClr val="C5A059"/>
                 </a:solidFill>
@@ -16763,34 +16693,36 @@
                 <a:latin typeface="Cinzel"/>
                 <a:ea typeface="Cinzel"/>
               </a:rPr>
-              <a:t>QUESTIONS?</a:t>
-            </a:r>
-            <a:endParaRPr lang="en-US" sz="1800" b="0" u="none" strike="noStrike">
-              <a:solidFill>
-                <a:srgbClr val="FFFFFF"/>
-              </a:solidFill>
-              <a:effectLst/>
-              <a:uFillTx/>
-              <a:latin typeface="Arial"/>
-            </a:endParaRPr>
-          </a:p>
-        </p:txBody>
-      </p:sp>
-      <p:sp>
-        <p:nvSpPr>
-          <p:cNvPr id="271" name="Google Shape;284;p24"/>
+              <a:t>Where do we Go From here?</a:t>
+            </a:r>
+            <a:endParaRPr lang="en-US" sz="3150" b="0" u="none" strike="noStrike">
+              <a:solidFill>
+                <a:srgbClr val="FFFFFF"/>
+              </a:solidFill>
+              <a:effectLst/>
+              <a:uFillTx/>
+              <a:latin typeface="Arial"/>
+            </a:endParaRPr>
+          </a:p>
+        </p:txBody>
+      </p:sp>
+      <p:sp>
+        <p:nvSpPr>
+          <p:cNvPr id="268" name="Google Shape;227;p 4"/>
           <p:cNvSpPr/>
           <p:nvPr/>
         </p:nvSpPr>
         <p:spPr>
           <a:xfrm>
-            <a:off x="3952800" y="3586320"/>
-            <a:ext cx="4285800" cy="343080"/>
-          </a:xfrm>
-          <a:prstGeom prst="rect">
-            <a:avLst/>
-          </a:prstGeom>
-          <a:noFill/>
+            <a:off x="581040" y="1579320"/>
+            <a:ext cx="4943160" cy="9000"/>
+          </a:xfrm>
+          <a:prstGeom prst="rect">
+            <a:avLst/>
+          </a:prstGeom>
+          <a:solidFill>
+            <a:srgbClr val="3D3422"/>
+          </a:solidFill>
           <a:ln w="0">
             <a:noFill/>
           </a:ln>
@@ -16802,51 +16734,55 @@
           <a:fontRef idx="minor"/>
         </p:style>
         <p:txBody>
-          <a:bodyPr lIns="0" tIns="0" rIns="0" bIns="0" anchor="t">
-            <a:spAutoFit/>
-          </a:bodyPr>
-          <a:p>
-            <a:pPr algn="ctr">
-              <a:lnSpc>
-                <a:spcPct val="150000"/>
-              </a:lnSpc>
-              <a:tabLst>
-                <a:tab pos="0" algn="l"/>
-              </a:tabLst>
-            </a:pPr>
-            <a:r>
-              <a:rPr lang="en-US" sz="1500" b="0" u="none" strike="noStrike">
-                <a:solidFill>
-                  <a:srgbClr val="D1D1D1"/>
-                </a:solidFill>
-                <a:effectLst/>
-                <a:uFillTx/>
-                <a:latin typeface="Lato"/>
-                <a:ea typeface="Lato"/>
-              </a:rPr>
-              <a:t>Thy quest continues in the terminal.</a:t>
-            </a:r>
-            <a:endParaRPr lang="en-US" sz="1500" b="0" u="none" strike="noStrike">
-              <a:solidFill>
-                <a:srgbClr val="FFFFFF"/>
-              </a:solidFill>
-              <a:effectLst/>
-              <a:uFillTx/>
-              <a:latin typeface="Arial"/>
-            </a:endParaRPr>
-          </a:p>
-        </p:txBody>
-      </p:sp>
-      <p:sp>
-        <p:nvSpPr>
-          <p:cNvPr id="272" name="Google Shape;285;p24"/>
+          <a:bodyPr tIns="-36360" bIns="-36360" anchor="ctr">
+            <a:noAutofit/>
+          </a:bodyPr>
+          <a:p>
+            <a:endParaRPr lang="en-US" sz="1400" b="0" u="none" strike="noStrike">
+              <a:solidFill>
+                <a:srgbClr val="FFFFFF"/>
+              </a:solidFill>
+              <a:effectLst/>
+              <a:uFillTx/>
+              <a:latin typeface="Arial"/>
+            </a:endParaRPr>
+          </a:p>
+        </p:txBody>
+      </p:sp>
+      <p:pic>
+        <p:nvPicPr>
+          <p:cNvPr id="269" name="Google Shape;228;p 4"/>
+          <p:cNvPicPr/>
+          <p:nvPr/>
+        </p:nvPicPr>
+        <p:blipFill>
+          <a:blip r:embed="rId2"/>
+          <a:stretch/>
+        </p:blipFill>
+        <p:spPr>
+          <a:xfrm>
+            <a:off x="6095880" y="9360"/>
+            <a:ext cx="6086160" cy="6857640"/>
+          </a:xfrm>
+          <a:prstGeom prst="rect">
+            <a:avLst/>
+          </a:prstGeom>
+          <a:noFill/>
+          <a:ln w="0">
+            <a:noFill/>
+          </a:ln>
+        </p:spPr>
+      </p:pic>
+      <p:sp>
+        <p:nvSpPr>
+          <p:cNvPr id="270" name="Google Shape;229;p 4"/>
           <p:cNvSpPr/>
           <p:nvPr/>
         </p:nvSpPr>
         <p:spPr>
           <a:xfrm>
-            <a:off x="3952800" y="4348080"/>
-            <a:ext cx="4285800" cy="183240"/>
+            <a:off x="581040" y="1609560"/>
+            <a:ext cx="4943160" cy="4455720"/>
           </a:xfrm>
           <a:prstGeom prst="rect">
             <a:avLst/>
@@ -16867,30 +16803,174 @@
             <a:spAutoFit/>
           </a:bodyPr>
           <a:p>
-            <a:pPr algn="ctr">
-              <a:lnSpc>
-                <a:spcPct val="100000"/>
-              </a:lnSpc>
-              <a:tabLst>
-                <a:tab pos="0" algn="l"/>
-              </a:tabLst>
-            </a:pPr>
-            <a:r>
-              <a:rPr lang="en-US" sz="1200" b="0" u="none" strike="noStrike">
-                <a:solidFill>
-                  <a:srgbClr val="3D3422"/>
-                </a:solidFill>
-                <a:effectLst/>
-                <a:uFillTx/>
-                <a:latin typeface="Lato"/>
-                <a:ea typeface="Lato"/>
-              </a:rPr>
-              <a:t>Justin E. Miller, </a:t>
-            </a:r>
-            <a:r>
-              <a:rPr lang="en-US" sz="1200" b="0" u="none" strike="noStrike">
-                <a:solidFill>
-                  <a:srgbClr val="3D3422"/>
+            <a:pPr>
+              <a:lnSpc>
+                <a:spcPct val="150000"/>
+              </a:lnSpc>
+              <a:tabLst>
+                <a:tab pos="0" algn="l"/>
+              </a:tabLst>
+            </a:pPr>
+            <a:r>
+              <a:rPr lang="en-US" sz="1500" b="1" u="none" strike="noStrike">
+                <a:solidFill>
+                  <a:srgbClr val="D1D1D1"/>
+                </a:solidFill>
+                <a:effectLst/>
+                <a:uFillTx/>
+                <a:latin typeface="Lato"/>
+                <a:ea typeface="Lato"/>
+              </a:rPr>
+              <a:t>We don’t have time to get into more detail in this course and actually use these dictionary entries.</a:t>
+            </a:r>
+            <a:endParaRPr lang="en-US" sz="1500" b="0" u="none" strike="noStrike">
+              <a:solidFill>
+                <a:srgbClr val="FFFFFF"/>
+              </a:solidFill>
+              <a:effectLst/>
+              <a:uFillTx/>
+              <a:latin typeface="Arial"/>
+            </a:endParaRPr>
+          </a:p>
+          <a:p>
+            <a:pPr>
+              <a:lnSpc>
+                <a:spcPct val="150000"/>
+              </a:lnSpc>
+              <a:tabLst>
+                <a:tab pos="0" algn="l"/>
+              </a:tabLst>
+            </a:pPr>
+            <a:r>
+              <a:rPr lang="en-US" sz="1500" b="1" u="none" strike="noStrike">
+                <a:solidFill>
+                  <a:srgbClr val="D1D1D1"/>
+                </a:solidFill>
+                <a:effectLst/>
+                <a:uFillTx/>
+                <a:latin typeface="Lato"/>
+                <a:ea typeface="Lato"/>
+              </a:rPr>
+              <a:t>But you can build it on your own if you want!</a:t>
+            </a:r>
+            <a:endParaRPr lang="en-US" sz="1500" b="0" u="none" strike="noStrike">
+              <a:solidFill>
+                <a:srgbClr val="FFFFFF"/>
+              </a:solidFill>
+              <a:effectLst/>
+              <a:uFillTx/>
+              <a:latin typeface="Arial"/>
+            </a:endParaRPr>
+          </a:p>
+          <a:p>
+            <a:pPr>
+              <a:lnSpc>
+                <a:spcPct val="150000"/>
+              </a:lnSpc>
+              <a:tabLst>
+                <a:tab pos="0" algn="l"/>
+              </a:tabLst>
+            </a:pPr>
+            <a:endParaRPr lang="en-US" sz="1500" b="0" u="none" strike="noStrike">
+              <a:solidFill>
+                <a:srgbClr val="FFFFFF"/>
+              </a:solidFill>
+              <a:effectLst/>
+              <a:uFillTx/>
+              <a:latin typeface="Arial"/>
+            </a:endParaRPr>
+          </a:p>
+          <a:p>
+            <a:pPr>
+              <a:lnSpc>
+                <a:spcPct val="150000"/>
+              </a:lnSpc>
+              <a:tabLst>
+                <a:tab pos="0" algn="l"/>
+              </a:tabLst>
+            </a:pPr>
+            <a:r>
+              <a:rPr lang="en-US" sz="1500" b="1" u="none" strike="noStrike">
+                <a:solidFill>
+                  <a:srgbClr val="D1D1D1"/>
+                </a:solidFill>
+                <a:effectLst/>
+                <a:uFillTx/>
+                <a:latin typeface="Lato"/>
+                <a:ea typeface="Lato"/>
+              </a:rPr>
+              <a:t>As a bonus, I have a completed a version of the code that you can play and use. It has all the features we learned plus one we didn’t cover: functions.</a:t>
+            </a:r>
+            <a:endParaRPr lang="en-US" sz="1500" b="0" u="none" strike="noStrike">
+              <a:solidFill>
+                <a:srgbClr val="FFFFFF"/>
+              </a:solidFill>
+              <a:effectLst/>
+              <a:uFillTx/>
+              <a:latin typeface="Arial"/>
+            </a:endParaRPr>
+          </a:p>
+          <a:p>
+            <a:pPr>
+              <a:lnSpc>
+                <a:spcPct val="150000"/>
+              </a:lnSpc>
+              <a:tabLst>
+                <a:tab pos="0" algn="l"/>
+              </a:tabLst>
+            </a:pPr>
+            <a:endParaRPr lang="en-US" sz="1500" b="0" u="none" strike="noStrike">
+              <a:solidFill>
+                <a:srgbClr val="FFFFFF"/>
+              </a:solidFill>
+              <a:effectLst/>
+              <a:uFillTx/>
+              <a:latin typeface="Arial"/>
+            </a:endParaRPr>
+          </a:p>
+          <a:p>
+            <a:pPr>
+              <a:lnSpc>
+                <a:spcPct val="150000"/>
+              </a:lnSpc>
+              <a:tabLst>
+                <a:tab pos="0" algn="l"/>
+              </a:tabLst>
+            </a:pPr>
+            <a:r>
+              <a:rPr lang="en-US" sz="1500" b="1" u="none" strike="noStrike">
+                <a:solidFill>
+                  <a:srgbClr val="D1D1D1"/>
+                </a:solidFill>
+                <a:effectLst/>
+                <a:uFillTx/>
+                <a:latin typeface="Lato"/>
+                <a:ea typeface="Lato"/>
+              </a:rPr>
+              <a:t>You can get it here:</a:t>
+            </a:r>
+            <a:endParaRPr lang="en-US" sz="1500" b="0" u="none" strike="noStrike">
+              <a:solidFill>
+                <a:srgbClr val="FFFFFF"/>
+              </a:solidFill>
+              <a:effectLst/>
+              <a:uFillTx/>
+              <a:latin typeface="Arial"/>
+            </a:endParaRPr>
+          </a:p>
+          <a:p>
+            <a:pPr>
+              <a:lnSpc>
+                <a:spcPct val="150000"/>
+              </a:lnSpc>
+              <a:tabLst>
+                <a:tab pos="0" algn="l"/>
+              </a:tabLst>
+            </a:pPr>
+            <a:r>
+              <a:rPr lang="en-US" sz="1500" b="1" u="none" strike="noStrike">
+                <a:solidFill>
+                  <a:srgbClr val="D1D1D1"/>
                 </a:solidFill>
                 <a:effectLst/>
                 <a:uFillTx/>
@@ -16898,31 +16978,97 @@
                 <a:ea typeface="Lato"/>
                 <a:hlinkClick r:id="rId3"/>
               </a:rPr>
-              <a:t>jemiller@iwcc.edu</a:t>
-            </a:r>
-            <a:r>
-              <a:rPr lang="en-US" sz="1200" b="0" u="none" strike="noStrike">
-                <a:solidFill>
-                  <a:srgbClr val="3D3422"/>
-                </a:solidFill>
-                <a:effectLst/>
-                <a:uFillTx/>
-                <a:latin typeface="Lato"/>
-                <a:ea typeface="Lato"/>
-              </a:rPr>
-              <a:t> </a:t>
-            </a:r>
-            <a:endParaRPr lang="en-US" sz="1200" b="0" u="none" strike="noStrike">
-              <a:solidFill>
-                <a:srgbClr val="FFFFFF"/>
-              </a:solidFill>
-              <a:effectLst/>
-              <a:uFillTx/>
-              <a:latin typeface="Arial"/>
-            </a:endParaRPr>
-          </a:p>
-        </p:txBody>
-      </p:sp>
+              <a:t>https://github.com/jemiller-iwcc/python-elden-ring</a:t>
+            </a:r>
+            <a:endParaRPr lang="en-US" sz="1500" b="0" u="none" strike="noStrike">
+              <a:solidFill>
+                <a:srgbClr val="FFFFFF"/>
+              </a:solidFill>
+              <a:effectLst/>
+              <a:uFillTx/>
+              <a:latin typeface="Arial"/>
+            </a:endParaRPr>
+          </a:p>
+          <a:p>
+            <a:pPr>
+              <a:lnSpc>
+                <a:spcPct val="150000"/>
+              </a:lnSpc>
+              <a:tabLst>
+                <a:tab pos="0" algn="l"/>
+              </a:tabLst>
+            </a:pPr>
+            <a:endParaRPr lang="en-US" sz="1500" b="0" u="none" strike="noStrike">
+              <a:solidFill>
+                <a:srgbClr val="FFFFFF"/>
+              </a:solidFill>
+              <a:effectLst/>
+              <a:uFillTx/>
+              <a:latin typeface="Arial"/>
+            </a:endParaRPr>
+          </a:p>
+          <a:p>
+            <a:pPr>
+              <a:lnSpc>
+                <a:spcPct val="150000"/>
+              </a:lnSpc>
+              <a:tabLst>
+                <a:tab pos="0" algn="l"/>
+              </a:tabLst>
+            </a:pPr>
+            <a:r>
+              <a:rPr lang="en-US" sz="1500" b="1" u="none" strike="noStrike">
+                <a:solidFill>
+                  <a:srgbClr val="D1D1D1"/>
+                </a:solidFill>
+                <a:effectLst/>
+                <a:uFillTx/>
+                <a:latin typeface="Lato"/>
+                <a:ea typeface="Lato"/>
+              </a:rPr>
+              <a:t>All code solutions, pseudocode, and these slides are on the site.</a:t>
+            </a:r>
+            <a:endParaRPr lang="en-US" sz="1500" b="0" u="none" strike="noStrike">
+              <a:solidFill>
+                <a:srgbClr val="FFFFFF"/>
+              </a:solidFill>
+              <a:effectLst/>
+              <a:uFillTx/>
+              <a:latin typeface="Arial"/>
+            </a:endParaRPr>
+          </a:p>
+        </p:txBody>
+      </p:sp>
+      <p:pic>
+        <p:nvPicPr>
+          <p:cNvPr id="271" name=""/>
+          <p:cNvPicPr/>
+          <p:nvPr/>
+        </p:nvPicPr>
+        <p:blipFill>
+          <a:blip r:embed="rId4">
+            <a:extLst>
+              <a:ext uri="{96DAC541-7B7A-43D3-8B79-37D633B846F1}">
+                <asvg:svgBlip xmlns:asvg="http://schemas.microsoft.com/office/drawing/2016/SVG/main" r:embed="rId5"/>
+              </a:ext>
+            </a:extLst>
+          </a:blip>
+          <a:stretch/>
+        </p:blipFill>
+        <p:spPr>
+          <a:xfrm>
+            <a:off x="6571080" y="813960"/>
+            <a:ext cx="5065560" cy="5065560"/>
+          </a:xfrm>
+          <a:prstGeom prst="rect">
+            <a:avLst/>
+          </a:prstGeom>
+          <a:noFill/>
+          <a:ln w="0">
+            <a:noFill/>
+          </a:ln>
+        </p:spPr>
+      </p:pic>
     </p:spTree>
   </p:cSld>
   <mc:AlternateContent>
@@ -16962,7 +17108,7 @@
       </p:grpSpPr>
       <p:pic>
         <p:nvPicPr>
-          <p:cNvPr id="273" name="Google Shape;290;p25"/>
+          <p:cNvPr id="272" name="Google Shape;281;p24"/>
           <p:cNvPicPr/>
           <p:nvPr/>
         </p:nvPicPr>
@@ -16984,16 +17130,40 @@
           </a:ln>
         </p:spPr>
       </p:pic>
-      <p:sp>
-        <p:nvSpPr>
-          <p:cNvPr id="274" name="Google Shape;291;p25"/>
+      <p:pic>
+        <p:nvPicPr>
+          <p:cNvPr id="273" name="Google Shape;282;p24"/>
+          <p:cNvPicPr/>
+          <p:nvPr/>
+        </p:nvPicPr>
+        <p:blipFill>
+          <a:blip r:embed="rId2"/>
+          <a:stretch/>
+        </p:blipFill>
+        <p:spPr>
+          <a:xfrm>
+            <a:off x="5810400" y="2328840"/>
+            <a:ext cx="571320" cy="761760"/>
+          </a:xfrm>
+          <a:prstGeom prst="rect">
+            <a:avLst/>
+          </a:prstGeom>
+          <a:noFill/>
+          <a:ln w="0">
+            <a:noFill/>
+          </a:ln>
+        </p:spPr>
+      </p:pic>
+      <p:sp>
+        <p:nvSpPr>
+          <p:cNvPr id="274" name="Google Shape;283;p24"/>
           <p:cNvSpPr/>
           <p:nvPr/>
         </p:nvSpPr>
         <p:spPr>
           <a:xfrm>
-            <a:off x="581040" y="1609560"/>
-            <a:ext cx="11029680" cy="771120"/>
+            <a:off x="3845880" y="3281400"/>
+            <a:ext cx="4500360" cy="274680"/>
           </a:xfrm>
           <a:prstGeom prst="rect">
             <a:avLst/>
@@ -17010,31 +17180,51 @@
           <a:fontRef idx="minor"/>
         </p:style>
         <p:txBody>
-          <a:bodyPr anchor="ctr">
-            <a:noAutofit/>
-          </a:bodyPr>
-          <a:p>
-            <a:endParaRPr lang="en-US" sz="1400" b="0" u="none" strike="noStrike">
-              <a:solidFill>
-                <a:srgbClr val="FFFFFF"/>
-              </a:solidFill>
-              <a:effectLst/>
-              <a:uFillTx/>
-              <a:latin typeface="Arial"/>
-            </a:endParaRPr>
-          </a:p>
-        </p:txBody>
-      </p:sp>
-      <p:sp>
-        <p:nvSpPr>
-          <p:cNvPr id="275" name="Google Shape;292;p25"/>
+          <a:bodyPr lIns="0" tIns="0" rIns="0" bIns="0" anchor="t">
+            <a:spAutoFit/>
+          </a:bodyPr>
+          <a:p>
+            <a:pPr algn="ctr">
+              <a:lnSpc>
+                <a:spcPct val="100000"/>
+              </a:lnSpc>
+              <a:tabLst>
+                <a:tab pos="0" algn="l"/>
+              </a:tabLst>
+            </a:pPr>
+            <a:r>
+              <a:rPr lang="en-US" sz="1800" b="1" u="none" strike="noStrike">
+                <a:solidFill>
+                  <a:srgbClr val="C5A059"/>
+                </a:solidFill>
+                <a:effectLst/>
+                <a:uFillTx/>
+                <a:latin typeface="Cinzel"/>
+                <a:ea typeface="Cinzel"/>
+              </a:rPr>
+              <a:t>QUESTIONS?</a:t>
+            </a:r>
+            <a:endParaRPr lang="en-US" sz="1800" b="0" u="none" strike="noStrike">
+              <a:solidFill>
+                <a:srgbClr val="FFFFFF"/>
+              </a:solidFill>
+              <a:effectLst/>
+              <a:uFillTx/>
+              <a:latin typeface="Arial"/>
+            </a:endParaRPr>
+          </a:p>
+        </p:txBody>
+      </p:sp>
+      <p:sp>
+        <p:nvSpPr>
+          <p:cNvPr id="275" name="Google Shape;284;p24"/>
           <p:cNvSpPr/>
           <p:nvPr/>
         </p:nvSpPr>
         <p:spPr>
           <a:xfrm>
-            <a:off x="581040" y="2381400"/>
-            <a:ext cx="11029680" cy="771120"/>
+            <a:off x="3952800" y="3586320"/>
+            <a:ext cx="4285800" cy="343080"/>
           </a:xfrm>
           <a:prstGeom prst="rect">
             <a:avLst/>
@@ -17051,31 +17241,51 @@
           <a:fontRef idx="minor"/>
         </p:style>
         <p:txBody>
-          <a:bodyPr anchor="ctr">
-            <a:noAutofit/>
-          </a:bodyPr>
-          <a:p>
-            <a:endParaRPr lang="en-US" sz="1400" b="0" u="none" strike="noStrike">
-              <a:solidFill>
-                <a:srgbClr val="FFFFFF"/>
-              </a:solidFill>
-              <a:effectLst/>
-              <a:uFillTx/>
-              <a:latin typeface="Arial"/>
-            </a:endParaRPr>
-          </a:p>
-        </p:txBody>
-      </p:sp>
-      <p:sp>
-        <p:nvSpPr>
-          <p:cNvPr id="276" name="Google Shape;293;p25"/>
+          <a:bodyPr lIns="0" tIns="0" rIns="0" bIns="0" anchor="t">
+            <a:spAutoFit/>
+          </a:bodyPr>
+          <a:p>
+            <a:pPr algn="ctr">
+              <a:lnSpc>
+                <a:spcPct val="150000"/>
+              </a:lnSpc>
+              <a:tabLst>
+                <a:tab pos="0" algn="l"/>
+              </a:tabLst>
+            </a:pPr>
+            <a:r>
+              <a:rPr lang="en-US" sz="1500" b="0" u="none" strike="noStrike">
+                <a:solidFill>
+                  <a:srgbClr val="D1D1D1"/>
+                </a:solidFill>
+                <a:effectLst/>
+                <a:uFillTx/>
+                <a:latin typeface="Lato"/>
+                <a:ea typeface="Lato"/>
+              </a:rPr>
+              <a:t>Thy quest continues in the terminal.</a:t>
+            </a:r>
+            <a:endParaRPr lang="en-US" sz="1500" b="0" u="none" strike="noStrike">
+              <a:solidFill>
+                <a:srgbClr val="FFFFFF"/>
+              </a:solidFill>
+              <a:effectLst/>
+              <a:uFillTx/>
+              <a:latin typeface="Arial"/>
+            </a:endParaRPr>
+          </a:p>
+        </p:txBody>
+      </p:sp>
+      <p:sp>
+        <p:nvSpPr>
+          <p:cNvPr id="276" name="Google Shape;285;p24"/>
           <p:cNvSpPr/>
           <p:nvPr/>
         </p:nvSpPr>
         <p:spPr>
           <a:xfrm>
-            <a:off x="581040" y="3152880"/>
-            <a:ext cx="11029680" cy="771120"/>
+            <a:off x="3952800" y="4348080"/>
+            <a:ext cx="4285800" cy="183240"/>
           </a:xfrm>
           <a:prstGeom prst="rect">
             <a:avLst/>
@@ -17092,30 +17302,136 @@
           <a:fontRef idx="minor"/>
         </p:style>
         <p:txBody>
-          <a:bodyPr anchor="ctr">
-            <a:noAutofit/>
-          </a:bodyPr>
-          <a:p>
-            <a:endParaRPr lang="en-US" sz="1400" b="0" u="none" strike="noStrike">
-              <a:solidFill>
-                <a:srgbClr val="FFFFFF"/>
-              </a:solidFill>
-              <a:effectLst/>
-              <a:uFillTx/>
-              <a:latin typeface="Arial"/>
-            </a:endParaRPr>
-          </a:p>
-        </p:txBody>
-      </p:sp>
-      <p:sp>
-        <p:nvSpPr>
-          <p:cNvPr id="277" name="Google Shape;294;p25"/>
+          <a:bodyPr lIns="0" tIns="0" rIns="0" bIns="0" anchor="t">
+            <a:spAutoFit/>
+          </a:bodyPr>
+          <a:p>
+            <a:pPr algn="ctr">
+              <a:lnSpc>
+                <a:spcPct val="100000"/>
+              </a:lnSpc>
+              <a:tabLst>
+                <a:tab pos="0" algn="l"/>
+              </a:tabLst>
+            </a:pPr>
+            <a:r>
+              <a:rPr lang="en-US" sz="1200" b="0" u="none" strike="noStrike">
+                <a:solidFill>
+                  <a:srgbClr val="3D3422"/>
+                </a:solidFill>
+                <a:effectLst/>
+                <a:uFillTx/>
+                <a:latin typeface="Lato"/>
+                <a:ea typeface="Lato"/>
+              </a:rPr>
+              <a:t>Justin E. Miller, </a:t>
+            </a:r>
+            <a:r>
+              <a:rPr lang="en-US" sz="1200" b="0" u="none" strike="noStrike">
+                <a:solidFill>
+                  <a:srgbClr val="3D3422"/>
+                </a:solidFill>
+                <a:effectLst/>
+                <a:uFillTx/>
+                <a:latin typeface="Lato"/>
+                <a:ea typeface="Lato"/>
+                <a:hlinkClick r:id="rId3"/>
+              </a:rPr>
+              <a:t>jemiller@iwcc.edu</a:t>
+            </a:r>
+            <a:r>
+              <a:rPr lang="en-US" sz="1200" b="0" u="none" strike="noStrike">
+                <a:solidFill>
+                  <a:srgbClr val="3D3422"/>
+                </a:solidFill>
+                <a:effectLst/>
+                <a:uFillTx/>
+                <a:latin typeface="Lato"/>
+                <a:ea typeface="Lato"/>
+              </a:rPr>
+              <a:t> </a:t>
+            </a:r>
+            <a:endParaRPr lang="en-US" sz="1200" b="0" u="none" strike="noStrike">
+              <a:solidFill>
+                <a:srgbClr val="FFFFFF"/>
+              </a:solidFill>
+              <a:effectLst/>
+              <a:uFillTx/>
+              <a:latin typeface="Arial"/>
+            </a:endParaRPr>
+          </a:p>
+        </p:txBody>
+      </p:sp>
+    </p:spTree>
+  </p:cSld>
+  <mc:AlternateContent>
+    <mc:Choice Requires="p14">
+      <p:transition spd="slow" p14:dur="2000"/>
+    </mc:Choice>
+    <mc:Fallback>
+      <p:transition spd="slow"/>
+    </mc:Fallback>
+  </mc:AlternateContent>
+</p:sld>
+</file>
+
+<file path=ppt/slides/slide36.xml><?xml version="1.0" encoding="utf-8"?>
+<p:sld xmlns:a="http://schemas.openxmlformats.org/drawingml/2006/main" xmlns:p="http://schemas.openxmlformats.org/presentationml/2006/main" xmlns:r="http://schemas.openxmlformats.org/officeDocument/2006/relationships" xmlns:p14="http://schemas.microsoft.com/office/powerpoint/2010/main" xmlns:p15="http://schemas.microsoft.com/office/powerpoint/2012/main" xmlns:mc="http://schemas.openxmlformats.org/markup-compatibility/2006">
+  <p:cSld>
+    <p:bg>
+      <p:bgPr>
+        <a:solidFill>
+          <a:srgbClr val="0B0B0B"/>
+        </a:solidFill>
+      </p:bgPr>
+    </p:bg>
+    <p:spTree>
+      <p:nvGrpSpPr>
+        <p:cNvPr id="1" name=""/>
+        <p:cNvGrpSpPr/>
+        <p:nvPr/>
+      </p:nvGrpSpPr>
+      <p:grpSpPr>
+        <a:xfrm>
+          <a:off x="0" y="0"/>
+          <a:ext cx="0" cy="0"/>
+          <a:chOff x="0" y="0"/>
+          <a:chExt cx="0" cy="0"/>
+        </a:xfrm>
+      </p:grpSpPr>
+      <p:pic>
+        <p:nvPicPr>
+          <p:cNvPr id="277" name="Google Shape;290;p25"/>
+          <p:cNvPicPr/>
+          <p:nvPr/>
+        </p:nvPicPr>
+        <p:blipFill>
+          <a:blip r:embed="rId1"/>
+          <a:stretch/>
+        </p:blipFill>
+        <p:spPr>
+          <a:xfrm>
+            <a:off x="0" y="0"/>
+            <a:ext cx="12191760" cy="6857640"/>
+          </a:xfrm>
+          <a:prstGeom prst="rect">
+            <a:avLst/>
+          </a:prstGeom>
+          <a:noFill/>
+          <a:ln w="0">
+            <a:noFill/>
+          </a:ln>
+        </p:spPr>
+      </p:pic>
+      <p:sp>
+        <p:nvSpPr>
+          <p:cNvPr id="278" name="Google Shape;291;p25"/>
           <p:cNvSpPr/>
           <p:nvPr/>
         </p:nvSpPr>
         <p:spPr>
           <a:xfrm>
-            <a:off x="581040" y="3924360"/>
+            <a:off x="581040" y="1609560"/>
             <a:ext cx="11029680" cy="771120"/>
           </a:xfrm>
           <a:prstGeom prst="rect">
@@ -17150,21 +17466,19 @@
       </p:sp>
       <p:sp>
         <p:nvSpPr>
-          <p:cNvPr id="278" name="Google Shape;295;p25"/>
+          <p:cNvPr id="279" name="Google Shape;292;p25"/>
           <p:cNvSpPr/>
           <p:nvPr/>
         </p:nvSpPr>
         <p:spPr>
           <a:xfrm>
-            <a:off x="581040" y="2371680"/>
-            <a:ext cx="11029680" cy="9000"/>
-          </a:xfrm>
-          <a:prstGeom prst="rect">
-            <a:avLst/>
-          </a:prstGeom>
-          <a:solidFill>
-            <a:srgbClr val="757575"/>
-          </a:solidFill>
+            <a:off x="581040" y="2381400"/>
+            <a:ext cx="11029680" cy="771120"/>
+          </a:xfrm>
+          <a:prstGeom prst="rect">
+            <a:avLst/>
+          </a:prstGeom>
+          <a:noFill/>
           <a:ln w="0">
             <a:noFill/>
           </a:ln>
@@ -17176,7 +17490,7 @@
           <a:fontRef idx="minor"/>
         </p:style>
         <p:txBody>
-          <a:bodyPr tIns="-36360" bIns="-36360" anchor="ctr">
+          <a:bodyPr anchor="ctr">
             <a:noAutofit/>
           </a:bodyPr>
           <a:p>
@@ -17193,21 +17507,19 @@
       </p:sp>
       <p:sp>
         <p:nvSpPr>
-          <p:cNvPr id="279" name="Google Shape;296;p25"/>
+          <p:cNvPr id="280" name="Google Shape;293;p25"/>
           <p:cNvSpPr/>
           <p:nvPr/>
         </p:nvSpPr>
         <p:spPr>
           <a:xfrm>
-            <a:off x="581040" y="2371680"/>
-            <a:ext cx="11029680" cy="9000"/>
-          </a:xfrm>
-          <a:prstGeom prst="rect">
-            <a:avLst/>
-          </a:prstGeom>
-          <a:solidFill>
-            <a:srgbClr val="757575"/>
-          </a:solidFill>
+            <a:off x="581040" y="3152880"/>
+            <a:ext cx="11029680" cy="771120"/>
+          </a:xfrm>
+          <a:prstGeom prst="rect">
+            <a:avLst/>
+          </a:prstGeom>
+          <a:noFill/>
           <a:ln w="0">
             <a:noFill/>
           </a:ln>
@@ -17219,7 +17531,7 @@
           <a:fontRef idx="minor"/>
         </p:style>
         <p:txBody>
-          <a:bodyPr tIns="-36360" bIns="-36360" anchor="ctr">
+          <a:bodyPr anchor="ctr">
             <a:noAutofit/>
           </a:bodyPr>
           <a:p>
@@ -17236,21 +17548,19 @@
       </p:sp>
       <p:sp>
         <p:nvSpPr>
-          <p:cNvPr id="280" name="Google Shape;297;p25"/>
+          <p:cNvPr id="281" name="Google Shape;294;p25"/>
           <p:cNvSpPr/>
           <p:nvPr/>
         </p:nvSpPr>
         <p:spPr>
           <a:xfrm>
-            <a:off x="581040" y="3143160"/>
-            <a:ext cx="11029680" cy="9000"/>
-          </a:xfrm>
-          <a:prstGeom prst="rect">
-            <a:avLst/>
-          </a:prstGeom>
-          <a:solidFill>
-            <a:srgbClr val="757575"/>
-          </a:solidFill>
+            <a:off x="581040" y="3924360"/>
+            <a:ext cx="11029680" cy="771120"/>
+          </a:xfrm>
+          <a:prstGeom prst="rect">
+            <a:avLst/>
+          </a:prstGeom>
+          <a:noFill/>
           <a:ln w="0">
             <a:noFill/>
           </a:ln>
@@ -17262,7 +17572,7 @@
           <a:fontRef idx="minor"/>
         </p:style>
         <p:txBody>
-          <a:bodyPr tIns="-36360" bIns="-36360" anchor="ctr">
+          <a:bodyPr anchor="ctr">
             <a:noAutofit/>
           </a:bodyPr>
           <a:p>
@@ -17279,13 +17589,13 @@
       </p:sp>
       <p:sp>
         <p:nvSpPr>
-          <p:cNvPr id="281" name="Google Shape;298;p25"/>
+          <p:cNvPr id="282" name="Google Shape;295;p25"/>
           <p:cNvSpPr/>
           <p:nvPr/>
         </p:nvSpPr>
         <p:spPr>
           <a:xfrm>
-            <a:off x="581040" y="3143160"/>
+            <a:off x="581040" y="2371680"/>
             <a:ext cx="11029680" cy="9000"/>
           </a:xfrm>
           <a:prstGeom prst="rect">
@@ -17322,13 +17632,13 @@
       </p:sp>
       <p:sp>
         <p:nvSpPr>
-          <p:cNvPr id="282" name="Google Shape;299;p25"/>
+          <p:cNvPr id="283" name="Google Shape;296;p25"/>
           <p:cNvSpPr/>
           <p:nvPr/>
         </p:nvSpPr>
         <p:spPr>
           <a:xfrm>
-            <a:off x="581040" y="3914640"/>
+            <a:off x="581040" y="2371680"/>
             <a:ext cx="11029680" cy="9000"/>
           </a:xfrm>
           <a:prstGeom prst="rect">
@@ -17365,13 +17675,13 @@
       </p:sp>
       <p:sp>
         <p:nvSpPr>
-          <p:cNvPr id="283" name="Google Shape;300;p25"/>
+          <p:cNvPr id="284" name="Google Shape;297;p25"/>
           <p:cNvSpPr/>
           <p:nvPr/>
         </p:nvSpPr>
         <p:spPr>
           <a:xfrm>
-            <a:off x="581040" y="3914640"/>
+            <a:off x="581040" y="3143160"/>
             <a:ext cx="11029680" cy="9000"/>
           </a:xfrm>
           <a:prstGeom prst="rect">
@@ -17408,13 +17718,13 @@
       </p:sp>
       <p:sp>
         <p:nvSpPr>
-          <p:cNvPr id="284" name="Google Shape;301;p25"/>
+          <p:cNvPr id="285" name="Google Shape;298;p25"/>
           <p:cNvSpPr/>
           <p:nvPr/>
         </p:nvSpPr>
         <p:spPr>
           <a:xfrm>
-            <a:off x="581040" y="4686480"/>
+            <a:off x="581040" y="3143160"/>
             <a:ext cx="11029680" cy="9000"/>
           </a:xfrm>
           <a:prstGeom prst="rect">
@@ -17451,13 +17761,13 @@
       </p:sp>
       <p:sp>
         <p:nvSpPr>
-          <p:cNvPr id="285" name="Google Shape;302;p25"/>
+          <p:cNvPr id="286" name="Google Shape;299;p25"/>
           <p:cNvSpPr/>
           <p:nvPr/>
         </p:nvSpPr>
         <p:spPr>
           <a:xfrm>
-            <a:off x="581040" y="4686480"/>
+            <a:off x="581040" y="3914640"/>
             <a:ext cx="11029680" cy="9000"/>
           </a:xfrm>
           <a:prstGeom prst="rect">
@@ -17492,45 +17802,23 @@
           </a:p>
         </p:txBody>
       </p:sp>
-      <p:pic>
-        <p:nvPicPr>
-          <p:cNvPr id="286" name="Google Shape;303;p25"/>
-          <p:cNvPicPr/>
-          <p:nvPr/>
-        </p:nvPicPr>
-        <p:blipFill>
-          <a:blip r:embed="rId2"/>
-          <a:stretch/>
-        </p:blipFill>
-        <p:spPr>
-          <a:xfrm>
-            <a:off x="581040" y="1752480"/>
-            <a:ext cx="856800" cy="475920"/>
-          </a:xfrm>
-          <a:prstGeom prst="rect">
-            <a:avLst/>
-          </a:prstGeom>
-          <a:noFill/>
-          <a:ln w="0">
-            <a:noFill/>
-          </a:ln>
-        </p:spPr>
-      </p:pic>
-      <p:sp>
-        <p:nvSpPr>
-          <p:cNvPr id="287" name="Google Shape;304;p25"/>
+      <p:sp>
+        <p:nvSpPr>
+          <p:cNvPr id="287" name="Google Shape;300;p25"/>
           <p:cNvSpPr/>
           <p:nvPr/>
         </p:nvSpPr>
         <p:spPr>
           <a:xfrm>
-            <a:off x="1676520" y="1759680"/>
-            <a:ext cx="9934200" cy="222840"/>
-          </a:xfrm>
-          <a:prstGeom prst="rect">
-            <a:avLst/>
-          </a:prstGeom>
-          <a:noFill/>
+            <a:off x="581040" y="3914640"/>
+            <a:ext cx="11029680" cy="9000"/>
+          </a:xfrm>
+          <a:prstGeom prst="rect">
+            <a:avLst/>
+          </a:prstGeom>
+          <a:solidFill>
+            <a:srgbClr val="757575"/>
+          </a:solidFill>
           <a:ln w="0">
             <a:noFill/>
           </a:ln>
@@ -17542,56 +17830,38 @@
           <a:fontRef idx="minor"/>
         </p:style>
         <p:txBody>
-          <a:bodyPr lIns="0" tIns="0" rIns="0" bIns="0" anchor="t">
-            <a:spAutoFit/>
-          </a:bodyPr>
-          <a:p>
-            <a:pPr>
-              <a:lnSpc>
-                <a:spcPct val="149000"/>
-              </a:lnSpc>
-              <a:tabLst>
-                <a:tab pos="0" algn="l"/>
-              </a:tabLst>
-            </a:pPr>
-            <a:r>
-              <a:rPr lang="en-US" sz="980" b="0" u="none" strike="noStrike">
-                <a:solidFill>
-                  <a:srgbClr val="D1D1D1"/>
-                </a:solidFill>
-                <a:effectLst/>
-                <a:uFillTx/>
-                <a:latin typeface="Lato"/>
-                <a:ea typeface="Lato"/>
-              </a:rPr>
-              <a:t>https://eldenring.wiki.fextralife.com/file/Elden-Ring/samurai_class_elden_ring_wiki_guide_270px.png</a:t>
-            </a:r>
-            <a:endParaRPr lang="en-US" sz="980" b="0" u="none" strike="noStrike">
-              <a:solidFill>
-                <a:srgbClr val="FFFFFF"/>
-              </a:solidFill>
-              <a:effectLst/>
-              <a:uFillTx/>
-              <a:latin typeface="Arial"/>
-            </a:endParaRPr>
-          </a:p>
-        </p:txBody>
-      </p:sp>
-      <p:sp>
-        <p:nvSpPr>
-          <p:cNvPr id="288" name="Google Shape;305;p25"/>
+          <a:bodyPr tIns="-36360" bIns="-36360" anchor="ctr">
+            <a:noAutofit/>
+          </a:bodyPr>
+          <a:p>
+            <a:endParaRPr lang="en-US" sz="1400" b="0" u="none" strike="noStrike">
+              <a:solidFill>
+                <a:srgbClr val="FFFFFF"/>
+              </a:solidFill>
+              <a:effectLst/>
+              <a:uFillTx/>
+              <a:latin typeface="Arial"/>
+            </a:endParaRPr>
+          </a:p>
+        </p:txBody>
+      </p:sp>
+      <p:sp>
+        <p:nvSpPr>
+          <p:cNvPr id="288" name="Google Shape;301;p25"/>
           <p:cNvSpPr/>
           <p:nvPr/>
         </p:nvSpPr>
         <p:spPr>
           <a:xfrm>
-            <a:off x="1676520" y="1992960"/>
-            <a:ext cx="9934200" cy="274680"/>
-          </a:xfrm>
-          <a:prstGeom prst="rect">
-            <a:avLst/>
-          </a:prstGeom>
-          <a:noFill/>
+            <a:off x="581040" y="4686480"/>
+            <a:ext cx="11029680" cy="9000"/>
+          </a:xfrm>
+          <a:prstGeom prst="rect">
+            <a:avLst/>
+          </a:prstGeom>
+          <a:solidFill>
+            <a:srgbClr val="757575"/>
+          </a:solidFill>
           <a:ln w="0">
             <a:noFill/>
           </a:ln>
@@ -17603,92 +17873,38 @@
           <a:fontRef idx="minor"/>
         </p:style>
         <p:txBody>
-          <a:bodyPr lIns="0" tIns="0" rIns="0" bIns="0" anchor="t">
-            <a:spAutoFit/>
-          </a:bodyPr>
-          <a:p>
-            <a:pPr>
-              <a:lnSpc>
-                <a:spcPct val="150000"/>
-              </a:lnSpc>
-              <a:tabLst>
-                <a:tab pos="0" algn="l"/>
-              </a:tabLst>
-            </a:pPr>
-            <a:r>
-              <a:rPr lang="en-US" sz="1200" b="0" u="none" strike="noStrike">
-                <a:solidFill>
-                  <a:srgbClr val="D1D1D1"/>
-                </a:solidFill>
-                <a:effectLst/>
-                <a:uFillTx/>
-                <a:latin typeface="Lato"/>
-                <a:ea typeface="Lato"/>
-              </a:rPr>
-              <a:t>Source: </a:t>
-            </a:r>
-            <a:r>
-              <a:rPr lang="en-US" sz="1200" b="0" u="none" strike="noStrike">
-                <a:solidFill>
-                  <a:srgbClr val="4F46E5"/>
-                </a:solidFill>
-                <a:effectLst/>
-                <a:uFillTx/>
-                <a:latin typeface="Lato"/>
-                <a:ea typeface="Lato"/>
-              </a:rPr>
-              <a:t>eldenring.wiki.fextralife.com</a:t>
-            </a:r>
-            <a:endParaRPr lang="en-US" sz="1200" b="0" u="none" strike="noStrike">
-              <a:solidFill>
-                <a:srgbClr val="FFFFFF"/>
-              </a:solidFill>
-              <a:effectLst/>
-              <a:uFillTx/>
-              <a:latin typeface="Arial"/>
-            </a:endParaRPr>
-          </a:p>
-        </p:txBody>
-      </p:sp>
-      <p:pic>
-        <p:nvPicPr>
-          <p:cNvPr id="289" name="Google Shape;306;p25"/>
-          <p:cNvPicPr/>
-          <p:nvPr/>
-        </p:nvPicPr>
-        <p:blipFill>
-          <a:blip r:embed="rId3"/>
-          <a:stretch/>
-        </p:blipFill>
-        <p:spPr>
-          <a:xfrm>
-            <a:off x="581040" y="2523960"/>
-            <a:ext cx="856800" cy="475920"/>
-          </a:xfrm>
-          <a:prstGeom prst="rect">
-            <a:avLst/>
-          </a:prstGeom>
-          <a:noFill/>
-          <a:ln w="0">
-            <a:noFill/>
-          </a:ln>
-        </p:spPr>
-      </p:pic>
-      <p:sp>
-        <p:nvSpPr>
-          <p:cNvPr id="290" name="Google Shape;307;p25"/>
+          <a:bodyPr tIns="-36360" bIns="-36360" anchor="ctr">
+            <a:noAutofit/>
+          </a:bodyPr>
+          <a:p>
+            <a:endParaRPr lang="en-US" sz="1400" b="0" u="none" strike="noStrike">
+              <a:solidFill>
+                <a:srgbClr val="FFFFFF"/>
+              </a:solidFill>
+              <a:effectLst/>
+              <a:uFillTx/>
+              <a:latin typeface="Arial"/>
+            </a:endParaRPr>
+          </a:p>
+        </p:txBody>
+      </p:sp>
+      <p:sp>
+        <p:nvSpPr>
+          <p:cNvPr id="289" name="Google Shape;302;p25"/>
           <p:cNvSpPr/>
           <p:nvPr/>
         </p:nvSpPr>
         <p:spPr>
           <a:xfrm>
-            <a:off x="1676520" y="2531160"/>
-            <a:ext cx="9934200" cy="222840"/>
-          </a:xfrm>
-          <a:prstGeom prst="rect">
-            <a:avLst/>
-          </a:prstGeom>
-          <a:noFill/>
+            <a:off x="581040" y="4686480"/>
+            <a:ext cx="11029680" cy="9000"/>
+          </a:xfrm>
+          <a:prstGeom prst="rect">
+            <a:avLst/>
+          </a:prstGeom>
+          <a:solidFill>
+            <a:srgbClr val="757575"/>
+          </a:solidFill>
           <a:ln w="0">
             <a:noFill/>
           </a:ln>
@@ -17700,51 +17916,55 @@
           <a:fontRef idx="minor"/>
         </p:style>
         <p:txBody>
-          <a:bodyPr lIns="0" tIns="0" rIns="0" bIns="0" anchor="t">
-            <a:spAutoFit/>
-          </a:bodyPr>
-          <a:p>
-            <a:pPr>
-              <a:lnSpc>
-                <a:spcPct val="149000"/>
-              </a:lnSpc>
-              <a:tabLst>
-                <a:tab pos="0" algn="l"/>
-              </a:tabLst>
-            </a:pPr>
-            <a:r>
-              <a:rPr lang="en-US" sz="980" b="0" u="none" strike="noStrike">
-                <a:solidFill>
-                  <a:srgbClr val="D1D1D1"/>
-                </a:solidFill>
-                <a:effectLst/>
-                <a:uFillTx/>
-                <a:latin typeface="Lato"/>
-                <a:ea typeface="Lato"/>
-              </a:rPr>
-              <a:t>https://i.redd.it/rktzg4cigl991.jpg</a:t>
-            </a:r>
-            <a:endParaRPr lang="en-US" sz="980" b="0" u="none" strike="noStrike">
-              <a:solidFill>
-                <a:srgbClr val="FFFFFF"/>
-              </a:solidFill>
-              <a:effectLst/>
-              <a:uFillTx/>
-              <a:latin typeface="Arial"/>
-            </a:endParaRPr>
-          </a:p>
-        </p:txBody>
-      </p:sp>
-      <p:sp>
-        <p:nvSpPr>
-          <p:cNvPr id="291" name="Google Shape;308;p25"/>
+          <a:bodyPr tIns="-36360" bIns="-36360" anchor="ctr">
+            <a:noAutofit/>
+          </a:bodyPr>
+          <a:p>
+            <a:endParaRPr lang="en-US" sz="1400" b="0" u="none" strike="noStrike">
+              <a:solidFill>
+                <a:srgbClr val="FFFFFF"/>
+              </a:solidFill>
+              <a:effectLst/>
+              <a:uFillTx/>
+              <a:latin typeface="Arial"/>
+            </a:endParaRPr>
+          </a:p>
+        </p:txBody>
+      </p:sp>
+      <p:pic>
+        <p:nvPicPr>
+          <p:cNvPr id="290" name="Google Shape;303;p25"/>
+          <p:cNvPicPr/>
+          <p:nvPr/>
+        </p:nvPicPr>
+        <p:blipFill>
+          <a:blip r:embed="rId2"/>
+          <a:stretch/>
+        </p:blipFill>
+        <p:spPr>
+          <a:xfrm>
+            <a:off x="581040" y="1752480"/>
+            <a:ext cx="856800" cy="475920"/>
+          </a:xfrm>
+          <a:prstGeom prst="rect">
+            <a:avLst/>
+          </a:prstGeom>
+          <a:noFill/>
+          <a:ln w="0">
+            <a:noFill/>
+          </a:ln>
+        </p:spPr>
+      </p:pic>
+      <p:sp>
+        <p:nvSpPr>
+          <p:cNvPr id="291" name="Google Shape;304;p25"/>
           <p:cNvSpPr/>
           <p:nvPr/>
         </p:nvSpPr>
         <p:spPr>
           <a:xfrm>
-            <a:off x="1676520" y="2764800"/>
-            <a:ext cx="9934200" cy="274680"/>
+            <a:off x="1676520" y="1759680"/>
+            <a:ext cx="9934200" cy="222840"/>
           </a:xfrm>
           <a:prstGeom prst="rect">
             <a:avLst/>
@@ -17767,14 +17987,14 @@
           <a:p>
             <a:pPr>
               <a:lnSpc>
-                <a:spcPct val="150000"/>
-              </a:lnSpc>
-              <a:tabLst>
-                <a:tab pos="0" algn="l"/>
-              </a:tabLst>
-            </a:pPr>
-            <a:r>
-              <a:rPr lang="en-US" sz="1200" b="0" u="none" strike="noStrike">
+                <a:spcPct val="149000"/>
+              </a:lnSpc>
+              <a:tabLst>
+                <a:tab pos="0" algn="l"/>
+              </a:tabLst>
+            </a:pPr>
+            <a:r>
+              <a:rPr lang="en-US" sz="980" b="0" u="none" strike="noStrike">
                 <a:solidFill>
                   <a:srgbClr val="D1D1D1"/>
                 </a:solidFill>
@@ -17783,65 +18003,29 @@
                 <a:latin typeface="Lato"/>
                 <a:ea typeface="Lato"/>
               </a:rPr>
-              <a:t>Source: </a:t>
-            </a:r>
-            <a:r>
-              <a:rPr lang="en-US" sz="1200" b="0" u="none" strike="noStrike">
-                <a:solidFill>
-                  <a:srgbClr val="4F46E5"/>
-                </a:solidFill>
-                <a:effectLst/>
-                <a:uFillTx/>
-                <a:latin typeface="Lato"/>
-                <a:ea typeface="Lato"/>
-              </a:rPr>
-              <a:t>www.reddit.com</a:t>
-            </a:r>
-            <a:endParaRPr lang="en-US" sz="1200" b="0" u="none" strike="noStrike">
-              <a:solidFill>
-                <a:srgbClr val="FFFFFF"/>
-              </a:solidFill>
-              <a:effectLst/>
-              <a:uFillTx/>
-              <a:latin typeface="Arial"/>
-            </a:endParaRPr>
-          </a:p>
-        </p:txBody>
-      </p:sp>
-      <p:pic>
-        <p:nvPicPr>
-          <p:cNvPr id="292" name="Google Shape;309;p25"/>
-          <p:cNvPicPr/>
-          <p:nvPr/>
-        </p:nvPicPr>
-        <p:blipFill>
-          <a:blip r:embed="rId4"/>
-          <a:stretch/>
-        </p:blipFill>
-        <p:spPr>
-          <a:xfrm>
-            <a:off x="581040" y="3295800"/>
-            <a:ext cx="856800" cy="475920"/>
-          </a:xfrm>
-          <a:prstGeom prst="rect">
-            <a:avLst/>
-          </a:prstGeom>
-          <a:noFill/>
-          <a:ln w="0">
-            <a:noFill/>
-          </a:ln>
-        </p:spPr>
-      </p:pic>
-      <p:sp>
-        <p:nvSpPr>
-          <p:cNvPr id="293" name="Google Shape;310;p25"/>
+              <a:t>https://eldenring.wiki.fextralife.com/file/Elden-Ring/samurai_class_elden_ring_wiki_guide_270px.png</a:t>
+            </a:r>
+            <a:endParaRPr lang="en-US" sz="980" b="0" u="none" strike="noStrike">
+              <a:solidFill>
+                <a:srgbClr val="FFFFFF"/>
+              </a:solidFill>
+              <a:effectLst/>
+              <a:uFillTx/>
+              <a:latin typeface="Arial"/>
+            </a:endParaRPr>
+          </a:p>
+        </p:txBody>
+      </p:sp>
+      <p:sp>
+        <p:nvSpPr>
+          <p:cNvPr id="292" name="Google Shape;305;p25"/>
           <p:cNvSpPr/>
           <p:nvPr/>
         </p:nvSpPr>
         <p:spPr>
           <a:xfrm>
-            <a:off x="1676520" y="3302640"/>
-            <a:ext cx="9934200" cy="222840"/>
+            <a:off x="1676520" y="1992960"/>
+            <a:ext cx="9934200" cy="274680"/>
           </a:xfrm>
           <a:prstGeom prst="rect">
             <a:avLst/>
@@ -17864,14 +18048,14 @@
           <a:p>
             <a:pPr>
               <a:lnSpc>
-                <a:spcPct val="149000"/>
-              </a:lnSpc>
-              <a:tabLst>
-                <a:tab pos="0" algn="l"/>
-              </a:tabLst>
-            </a:pPr>
-            <a:r>
-              <a:rPr lang="en-US" sz="980" b="0" u="none" strike="noStrike">
+                <a:spcPct val="150000"/>
+              </a:lnSpc>
+              <a:tabLst>
+                <a:tab pos="0" algn="l"/>
+              </a:tabLst>
+            </a:pPr>
+            <a:r>
+              <a:rPr lang="en-US" sz="1200" b="0" u="none" strike="noStrike">
                 <a:solidFill>
                   <a:srgbClr val="D1D1D1"/>
                 </a:solidFill>
@@ -17880,29 +18064,65 @@
                 <a:latin typeface="Lato"/>
                 <a:ea typeface="Lato"/>
               </a:rPr>
-              <a:t>https://png.pngtree.com/thumb_back/fh260/background/20200724/pngtree-background-brown-dark-parchment-texture-image_364033.jpg</a:t>
-            </a:r>
-            <a:endParaRPr lang="en-US" sz="980" b="0" u="none" strike="noStrike">
-              <a:solidFill>
-                <a:srgbClr val="FFFFFF"/>
-              </a:solidFill>
-              <a:effectLst/>
-              <a:uFillTx/>
-              <a:latin typeface="Arial"/>
-            </a:endParaRPr>
-          </a:p>
-        </p:txBody>
-      </p:sp>
-      <p:sp>
-        <p:nvSpPr>
-          <p:cNvPr id="294" name="Google Shape;311;p25"/>
+              <a:t>Source: </a:t>
+            </a:r>
+            <a:r>
+              <a:rPr lang="en-US" sz="1200" b="0" u="none" strike="noStrike">
+                <a:solidFill>
+                  <a:srgbClr val="4F46E5"/>
+                </a:solidFill>
+                <a:effectLst/>
+                <a:uFillTx/>
+                <a:latin typeface="Lato"/>
+                <a:ea typeface="Lato"/>
+              </a:rPr>
+              <a:t>eldenring.wiki.fextralife.com</a:t>
+            </a:r>
+            <a:endParaRPr lang="en-US" sz="1200" b="0" u="none" strike="noStrike">
+              <a:solidFill>
+                <a:srgbClr val="FFFFFF"/>
+              </a:solidFill>
+              <a:effectLst/>
+              <a:uFillTx/>
+              <a:latin typeface="Arial"/>
+            </a:endParaRPr>
+          </a:p>
+        </p:txBody>
+      </p:sp>
+      <p:pic>
+        <p:nvPicPr>
+          <p:cNvPr id="293" name="Google Shape;306;p25"/>
+          <p:cNvPicPr/>
+          <p:nvPr/>
+        </p:nvPicPr>
+        <p:blipFill>
+          <a:blip r:embed="rId3"/>
+          <a:stretch/>
+        </p:blipFill>
+        <p:spPr>
+          <a:xfrm>
+            <a:off x="581040" y="2523960"/>
+            <a:ext cx="856800" cy="475920"/>
+          </a:xfrm>
+          <a:prstGeom prst="rect">
+            <a:avLst/>
+          </a:prstGeom>
+          <a:noFill/>
+          <a:ln w="0">
+            <a:noFill/>
+          </a:ln>
+        </p:spPr>
+      </p:pic>
+      <p:sp>
+        <p:nvSpPr>
+          <p:cNvPr id="294" name="Google Shape;307;p25"/>
           <p:cNvSpPr/>
           <p:nvPr/>
         </p:nvSpPr>
         <p:spPr>
           <a:xfrm>
-            <a:off x="1676520" y="3536280"/>
-            <a:ext cx="9934200" cy="274680"/>
+            <a:off x="1676520" y="2531160"/>
+            <a:ext cx="9934200" cy="222840"/>
           </a:xfrm>
           <a:prstGeom prst="rect">
             <a:avLst/>
@@ -17925,14 +18145,14 @@
           <a:p>
             <a:pPr>
               <a:lnSpc>
-                <a:spcPct val="150000"/>
-              </a:lnSpc>
-              <a:tabLst>
-                <a:tab pos="0" algn="l"/>
-              </a:tabLst>
-            </a:pPr>
-            <a:r>
-              <a:rPr lang="en-US" sz="1200" b="0" u="none" strike="noStrike">
+                <a:spcPct val="149000"/>
+              </a:lnSpc>
+              <a:tabLst>
+                <a:tab pos="0" algn="l"/>
+              </a:tabLst>
+            </a:pPr>
+            <a:r>
+              <a:rPr lang="en-US" sz="980" b="0" u="none" strike="noStrike">
                 <a:solidFill>
                   <a:srgbClr val="D1D1D1"/>
                 </a:solidFill>
@@ -17941,65 +18161,29 @@
                 <a:latin typeface="Lato"/>
                 <a:ea typeface="Lato"/>
               </a:rPr>
-              <a:t>Source: </a:t>
-            </a:r>
-            <a:r>
-              <a:rPr lang="en-US" sz="1200" b="0" u="none" strike="noStrike">
-                <a:solidFill>
-                  <a:srgbClr val="4F46E5"/>
-                </a:solidFill>
-                <a:effectLst/>
-                <a:uFillTx/>
-                <a:latin typeface="Lato"/>
-                <a:ea typeface="Lato"/>
-              </a:rPr>
-              <a:t>pngtree.com</a:t>
-            </a:r>
-            <a:endParaRPr lang="en-US" sz="1200" b="0" u="none" strike="noStrike">
-              <a:solidFill>
-                <a:srgbClr val="FFFFFF"/>
-              </a:solidFill>
-              <a:effectLst/>
-              <a:uFillTx/>
-              <a:latin typeface="Arial"/>
-            </a:endParaRPr>
-          </a:p>
-        </p:txBody>
-      </p:sp>
-      <p:pic>
-        <p:nvPicPr>
-          <p:cNvPr id="295" name="Google Shape;312;p25"/>
-          <p:cNvPicPr/>
-          <p:nvPr/>
-        </p:nvPicPr>
-        <p:blipFill>
-          <a:blip r:embed="rId5"/>
-          <a:stretch/>
-        </p:blipFill>
-        <p:spPr>
-          <a:xfrm>
-            <a:off x="581040" y="4067280"/>
-            <a:ext cx="856800" cy="475920"/>
-          </a:xfrm>
-          <a:prstGeom prst="rect">
-            <a:avLst/>
-          </a:prstGeom>
-          <a:noFill/>
-          <a:ln w="0">
-            <a:noFill/>
-          </a:ln>
-        </p:spPr>
-      </p:pic>
-      <p:sp>
-        <p:nvSpPr>
-          <p:cNvPr id="296" name="Google Shape;313;p25"/>
+              <a:t>https://i.redd.it/rktzg4cigl991.jpg</a:t>
+            </a:r>
+            <a:endParaRPr lang="en-US" sz="980" b="0" u="none" strike="noStrike">
+              <a:solidFill>
+                <a:srgbClr val="FFFFFF"/>
+              </a:solidFill>
+              <a:effectLst/>
+              <a:uFillTx/>
+              <a:latin typeface="Arial"/>
+            </a:endParaRPr>
+          </a:p>
+        </p:txBody>
+      </p:sp>
+      <p:sp>
+        <p:nvSpPr>
+          <p:cNvPr id="295" name="Google Shape;308;p25"/>
           <p:cNvSpPr/>
           <p:nvPr/>
         </p:nvSpPr>
         <p:spPr>
           <a:xfrm>
-            <a:off x="1676520" y="4074480"/>
-            <a:ext cx="9934200" cy="222840"/>
+            <a:off x="1676520" y="2764800"/>
+            <a:ext cx="9934200" cy="274680"/>
           </a:xfrm>
           <a:prstGeom prst="rect">
             <a:avLst/>
@@ -18022,14 +18206,14 @@
           <a:p>
             <a:pPr>
               <a:lnSpc>
-                <a:spcPct val="149000"/>
-              </a:lnSpc>
-              <a:tabLst>
-                <a:tab pos="0" algn="l"/>
-              </a:tabLst>
-            </a:pPr>
-            <a:r>
-              <a:rPr lang="en-US" sz="980" b="0" u="none" strike="noStrike">
+                <a:spcPct val="150000"/>
+              </a:lnSpc>
+              <a:tabLst>
+                <a:tab pos="0" algn="l"/>
+              </a:tabLst>
+            </a:pPr>
+            <a:r>
+              <a:rPr lang="en-US" sz="1200" b="0" u="none" strike="noStrike">
                 <a:solidFill>
                   <a:srgbClr val="D1D1D1"/>
                 </a:solidFill>
@@ -18038,29 +18222,65 @@
                 <a:latin typeface="Lato"/>
                 <a:ea typeface="Lato"/>
               </a:rPr>
-              <a:t>https://images4.alphacoders.com/121/thumb-1920-1214929.jpg</a:t>
-            </a:r>
-            <a:endParaRPr lang="en-US" sz="980" b="0" u="none" strike="noStrike">
-              <a:solidFill>
-                <a:srgbClr val="FFFFFF"/>
-              </a:solidFill>
-              <a:effectLst/>
-              <a:uFillTx/>
-              <a:latin typeface="Arial"/>
-            </a:endParaRPr>
-          </a:p>
-        </p:txBody>
-      </p:sp>
-      <p:sp>
-        <p:nvSpPr>
-          <p:cNvPr id="297" name="Google Shape;314;p25"/>
+              <a:t>Source: </a:t>
+            </a:r>
+            <a:r>
+              <a:rPr lang="en-US" sz="1200" b="0" u="none" strike="noStrike">
+                <a:solidFill>
+                  <a:srgbClr val="4F46E5"/>
+                </a:solidFill>
+                <a:effectLst/>
+                <a:uFillTx/>
+                <a:latin typeface="Lato"/>
+                <a:ea typeface="Lato"/>
+              </a:rPr>
+              <a:t>www.reddit.com</a:t>
+            </a:r>
+            <a:endParaRPr lang="en-US" sz="1200" b="0" u="none" strike="noStrike">
+              <a:solidFill>
+                <a:srgbClr val="FFFFFF"/>
+              </a:solidFill>
+              <a:effectLst/>
+              <a:uFillTx/>
+              <a:latin typeface="Arial"/>
+            </a:endParaRPr>
+          </a:p>
+        </p:txBody>
+      </p:sp>
+      <p:pic>
+        <p:nvPicPr>
+          <p:cNvPr id="296" name="Google Shape;309;p25"/>
+          <p:cNvPicPr/>
+          <p:nvPr/>
+        </p:nvPicPr>
+        <p:blipFill>
+          <a:blip r:embed="rId4"/>
+          <a:stretch/>
+        </p:blipFill>
+        <p:spPr>
+          <a:xfrm>
+            <a:off x="581040" y="3295800"/>
+            <a:ext cx="856800" cy="475920"/>
+          </a:xfrm>
+          <a:prstGeom prst="rect">
+            <a:avLst/>
+          </a:prstGeom>
+          <a:noFill/>
+          <a:ln w="0">
+            <a:noFill/>
+          </a:ln>
+        </p:spPr>
+      </p:pic>
+      <p:sp>
+        <p:nvSpPr>
+          <p:cNvPr id="297" name="Google Shape;310;p25"/>
           <p:cNvSpPr/>
           <p:nvPr/>
         </p:nvSpPr>
         <p:spPr>
           <a:xfrm>
-            <a:off x="1676520" y="4307760"/>
-            <a:ext cx="9934200" cy="274680"/>
+            <a:off x="1676520" y="3302640"/>
+            <a:ext cx="9934200" cy="222840"/>
           </a:xfrm>
           <a:prstGeom prst="rect">
             <a:avLst/>
@@ -18083,14 +18303,14 @@
           <a:p>
             <a:pPr>
               <a:lnSpc>
-                <a:spcPct val="150000"/>
-              </a:lnSpc>
-              <a:tabLst>
-                <a:tab pos="0" algn="l"/>
-              </a:tabLst>
-            </a:pPr>
-            <a:r>
-              <a:rPr lang="en-US" sz="1200" b="0" u="none" strike="noStrike">
+                <a:spcPct val="149000"/>
+              </a:lnSpc>
+              <a:tabLst>
+                <a:tab pos="0" algn="l"/>
+              </a:tabLst>
+            </a:pPr>
+            <a:r>
+              <a:rPr lang="en-US" sz="980" b="0" u="none" strike="noStrike">
                 <a:solidFill>
                   <a:srgbClr val="D1D1D1"/>
                 </a:solidFill>
@@ -18099,65 +18319,29 @@
                 <a:latin typeface="Lato"/>
                 <a:ea typeface="Lato"/>
               </a:rPr>
-              <a:t>Source: </a:t>
-            </a:r>
-            <a:r>
-              <a:rPr lang="en-US" sz="1200" b="0" u="none" strike="noStrike">
-                <a:solidFill>
-                  <a:srgbClr val="4F46E5"/>
-                </a:solidFill>
-                <a:effectLst/>
-                <a:uFillTx/>
-                <a:latin typeface="Lato"/>
-                <a:ea typeface="Lato"/>
-              </a:rPr>
-              <a:t>wall.alphacoders.com</a:t>
-            </a:r>
-            <a:endParaRPr lang="en-US" sz="1200" b="0" u="none" strike="noStrike">
-              <a:solidFill>
-                <a:srgbClr val="FFFFFF"/>
-              </a:solidFill>
-              <a:effectLst/>
-              <a:uFillTx/>
-              <a:latin typeface="Arial"/>
-            </a:endParaRPr>
-          </a:p>
-        </p:txBody>
-      </p:sp>
-      <p:pic>
-        <p:nvPicPr>
-          <p:cNvPr id="298" name="Google Shape;315;p25"/>
-          <p:cNvPicPr/>
-          <p:nvPr/>
-        </p:nvPicPr>
-        <p:blipFill>
-          <a:blip r:embed="rId6"/>
-          <a:stretch/>
-        </p:blipFill>
-        <p:spPr>
-          <a:xfrm>
-            <a:off x="581040" y="4838760"/>
-            <a:ext cx="856800" cy="475920"/>
-          </a:xfrm>
-          <a:prstGeom prst="rect">
-            <a:avLst/>
-          </a:prstGeom>
-          <a:noFill/>
-          <a:ln w="0">
-            <a:noFill/>
-          </a:ln>
-        </p:spPr>
-      </p:pic>
-      <p:sp>
-        <p:nvSpPr>
-          <p:cNvPr id="299" name="Google Shape;316;p25"/>
+              <a:t>https://png.pngtree.com/thumb_back/fh260/background/20200724/pngtree-background-brown-dark-parchment-texture-image_364033.jpg</a:t>
+            </a:r>
+            <a:endParaRPr lang="en-US" sz="980" b="0" u="none" strike="noStrike">
+              <a:solidFill>
+                <a:srgbClr val="FFFFFF"/>
+              </a:solidFill>
+              <a:effectLst/>
+              <a:uFillTx/>
+              <a:latin typeface="Arial"/>
+            </a:endParaRPr>
+          </a:p>
+        </p:txBody>
+      </p:sp>
+      <p:sp>
+        <p:nvSpPr>
+          <p:cNvPr id="298" name="Google Shape;311;p25"/>
           <p:cNvSpPr/>
           <p:nvPr/>
         </p:nvSpPr>
         <p:spPr>
           <a:xfrm>
-            <a:off x="1676520" y="4845960"/>
-            <a:ext cx="9934200" cy="222840"/>
+            <a:off x="1676520" y="3536280"/>
+            <a:ext cx="9934200" cy="274680"/>
           </a:xfrm>
           <a:prstGeom prst="rect">
             <a:avLst/>
@@ -18180,14 +18364,14 @@
           <a:p>
             <a:pPr>
               <a:lnSpc>
-                <a:spcPct val="149000"/>
-              </a:lnSpc>
-              <a:tabLst>
-                <a:tab pos="0" algn="l"/>
-              </a:tabLst>
-            </a:pPr>
-            <a:r>
-              <a:rPr lang="en-US" sz="980" b="0" u="none" strike="noStrike">
+                <a:spcPct val="150000"/>
+              </a:lnSpc>
+              <a:tabLst>
+                <a:tab pos="0" algn="l"/>
+              </a:tabLst>
+            </a:pPr>
+            <a:r>
+              <a:rPr lang="en-US" sz="1200" b="0" u="none" strike="noStrike">
                 <a:solidFill>
                   <a:srgbClr val="D1D1D1"/>
                 </a:solidFill>
@@ -18196,29 +18380,65 @@
                 <a:latin typeface="Lato"/>
                 <a:ea typeface="Lato"/>
               </a:rPr>
-              <a:t>https://cdn.mos.cms.futurecdn.net/GUwnMR2gDjdhWbTdzr9f5C-1200-80.jpg</a:t>
-            </a:r>
-            <a:endParaRPr lang="en-US" sz="980" b="0" u="none" strike="noStrike">
-              <a:solidFill>
-                <a:srgbClr val="FFFFFF"/>
-              </a:solidFill>
-              <a:effectLst/>
-              <a:uFillTx/>
-              <a:latin typeface="Arial"/>
-            </a:endParaRPr>
-          </a:p>
-        </p:txBody>
-      </p:sp>
-      <p:sp>
-        <p:nvSpPr>
-          <p:cNvPr id="300" name="Google Shape;317;p25"/>
+              <a:t>Source: </a:t>
+            </a:r>
+            <a:r>
+              <a:rPr lang="en-US" sz="1200" b="0" u="none" strike="noStrike">
+                <a:solidFill>
+                  <a:srgbClr val="4F46E5"/>
+                </a:solidFill>
+                <a:effectLst/>
+                <a:uFillTx/>
+                <a:latin typeface="Lato"/>
+                <a:ea typeface="Lato"/>
+              </a:rPr>
+              <a:t>pngtree.com</a:t>
+            </a:r>
+            <a:endParaRPr lang="en-US" sz="1200" b="0" u="none" strike="noStrike">
+              <a:solidFill>
+                <a:srgbClr val="FFFFFF"/>
+              </a:solidFill>
+              <a:effectLst/>
+              <a:uFillTx/>
+              <a:latin typeface="Arial"/>
+            </a:endParaRPr>
+          </a:p>
+        </p:txBody>
+      </p:sp>
+      <p:pic>
+        <p:nvPicPr>
+          <p:cNvPr id="299" name="Google Shape;312;p25"/>
+          <p:cNvPicPr/>
+          <p:nvPr/>
+        </p:nvPicPr>
+        <p:blipFill>
+          <a:blip r:embed="rId5"/>
+          <a:stretch/>
+        </p:blipFill>
+        <p:spPr>
+          <a:xfrm>
+            <a:off x="581040" y="4067280"/>
+            <a:ext cx="856800" cy="475920"/>
+          </a:xfrm>
+          <a:prstGeom prst="rect">
+            <a:avLst/>
+          </a:prstGeom>
+          <a:noFill/>
+          <a:ln w="0">
+            <a:noFill/>
+          </a:ln>
+        </p:spPr>
+      </p:pic>
+      <p:sp>
+        <p:nvSpPr>
+          <p:cNvPr id="300" name="Google Shape;313;p25"/>
           <p:cNvSpPr/>
           <p:nvPr/>
         </p:nvSpPr>
         <p:spPr>
           <a:xfrm>
-            <a:off x="1676520" y="5079240"/>
-            <a:ext cx="9934200" cy="274680"/>
+            <a:off x="1676520" y="4074480"/>
+            <a:ext cx="9934200" cy="222840"/>
           </a:xfrm>
           <a:prstGeom prst="rect">
             <a:avLst/>
@@ -18241,14 +18461,14 @@
           <a:p>
             <a:pPr>
               <a:lnSpc>
-                <a:spcPct val="150000"/>
-              </a:lnSpc>
-              <a:tabLst>
-                <a:tab pos="0" algn="l"/>
-              </a:tabLst>
-            </a:pPr>
-            <a:r>
-              <a:rPr lang="en-US" sz="1200" b="0" u="none" strike="noStrike">
+                <a:spcPct val="149000"/>
+              </a:lnSpc>
+              <a:tabLst>
+                <a:tab pos="0" algn="l"/>
+              </a:tabLst>
+            </a:pPr>
+            <a:r>
+              <a:rPr lang="en-US" sz="980" b="0" u="none" strike="noStrike">
                 <a:solidFill>
                   <a:srgbClr val="D1D1D1"/>
                 </a:solidFill>
@@ -18257,41 +18477,29 @@
                 <a:latin typeface="Lato"/>
                 <a:ea typeface="Lato"/>
               </a:rPr>
-              <a:t>Source: </a:t>
-            </a:r>
-            <a:r>
-              <a:rPr lang="en-US" sz="1200" b="0" u="none" strike="noStrike">
-                <a:solidFill>
-                  <a:srgbClr val="4F46E5"/>
-                </a:solidFill>
-                <a:effectLst/>
-                <a:uFillTx/>
-                <a:latin typeface="Lato"/>
-                <a:ea typeface="Lato"/>
-              </a:rPr>
-              <a:t>www.windowscentral.com</a:t>
-            </a:r>
-            <a:endParaRPr lang="en-US" sz="1200" b="0" u="none" strike="noStrike">
-              <a:solidFill>
-                <a:srgbClr val="FFFFFF"/>
-              </a:solidFill>
-              <a:effectLst/>
-              <a:uFillTx/>
-              <a:latin typeface="Arial"/>
-            </a:endParaRPr>
-          </a:p>
-        </p:txBody>
-      </p:sp>
-      <p:sp>
-        <p:nvSpPr>
-          <p:cNvPr id="301" name="Google Shape;318;p25"/>
+              <a:t>https://images4.alphacoders.com/121/thumb-1920-1214929.jpg</a:t>
+            </a:r>
+            <a:endParaRPr lang="en-US" sz="980" b="0" u="none" strike="noStrike">
+              <a:solidFill>
+                <a:srgbClr val="FFFFFF"/>
+              </a:solidFill>
+              <a:effectLst/>
+              <a:uFillTx/>
+              <a:latin typeface="Arial"/>
+            </a:endParaRPr>
+          </a:p>
+        </p:txBody>
+      </p:sp>
+      <p:sp>
+        <p:nvSpPr>
+          <p:cNvPr id="301" name="Google Shape;314;p25"/>
           <p:cNvSpPr/>
           <p:nvPr/>
         </p:nvSpPr>
         <p:spPr>
           <a:xfrm>
-            <a:off x="581040" y="581040"/>
-            <a:ext cx="11581200" cy="480240"/>
+            <a:off x="1676520" y="4307760"/>
+            <a:ext cx="9934200" cy="274680"/>
           </a:xfrm>
           <a:prstGeom prst="rect">
             <a:avLst/>
@@ -18314,52 +18522,86 @@
           <a:p>
             <a:pPr>
               <a:lnSpc>
-                <a:spcPct val="100000"/>
-              </a:lnSpc>
-              <a:tabLst>
-                <a:tab pos="0" algn="l"/>
-              </a:tabLst>
-            </a:pPr>
-            <a:r>
-              <a:rPr lang="en-US" sz="3150" b="1" u="none" strike="noStrike">
-                <a:solidFill>
-                  <a:srgbClr val="C5A059"/>
-                </a:solidFill>
-                <a:effectLst/>
-                <a:uFillTx/>
-                <a:latin typeface="Cinzel"/>
-                <a:ea typeface="Cinzel"/>
-              </a:rPr>
-              <a:t>SOURCES</a:t>
-            </a:r>
-            <a:endParaRPr lang="en-US" sz="3150" b="0" u="none" strike="noStrike">
-              <a:solidFill>
-                <a:srgbClr val="FFFFFF"/>
-              </a:solidFill>
-              <a:effectLst/>
-              <a:uFillTx/>
-              <a:latin typeface="Arial"/>
-            </a:endParaRPr>
-          </a:p>
-        </p:txBody>
-      </p:sp>
-      <p:sp>
-        <p:nvSpPr>
-          <p:cNvPr id="302" name="Google Shape;319;p25"/>
+                <a:spcPct val="150000"/>
+              </a:lnSpc>
+              <a:tabLst>
+                <a:tab pos="0" algn="l"/>
+              </a:tabLst>
+            </a:pPr>
+            <a:r>
+              <a:rPr lang="en-US" sz="1200" b="0" u="none" strike="noStrike">
+                <a:solidFill>
+                  <a:srgbClr val="D1D1D1"/>
+                </a:solidFill>
+                <a:effectLst/>
+                <a:uFillTx/>
+                <a:latin typeface="Lato"/>
+                <a:ea typeface="Lato"/>
+              </a:rPr>
+              <a:t>Source: </a:t>
+            </a:r>
+            <a:r>
+              <a:rPr lang="en-US" sz="1200" b="0" u="none" strike="noStrike">
+                <a:solidFill>
+                  <a:srgbClr val="4F46E5"/>
+                </a:solidFill>
+                <a:effectLst/>
+                <a:uFillTx/>
+                <a:latin typeface="Lato"/>
+                <a:ea typeface="Lato"/>
+              </a:rPr>
+              <a:t>wall.alphacoders.com</a:t>
+            </a:r>
+            <a:endParaRPr lang="en-US" sz="1200" b="0" u="none" strike="noStrike">
+              <a:solidFill>
+                <a:srgbClr val="FFFFFF"/>
+              </a:solidFill>
+              <a:effectLst/>
+              <a:uFillTx/>
+              <a:latin typeface="Arial"/>
+            </a:endParaRPr>
+          </a:p>
+        </p:txBody>
+      </p:sp>
+      <p:pic>
+        <p:nvPicPr>
+          <p:cNvPr id="302" name="Google Shape;315;p25"/>
+          <p:cNvPicPr/>
+          <p:nvPr/>
+        </p:nvPicPr>
+        <p:blipFill>
+          <a:blip r:embed="rId6"/>
+          <a:stretch/>
+        </p:blipFill>
+        <p:spPr>
+          <a:xfrm>
+            <a:off x="581040" y="4838760"/>
+            <a:ext cx="856800" cy="475920"/>
+          </a:xfrm>
+          <a:prstGeom prst="rect">
+            <a:avLst/>
+          </a:prstGeom>
+          <a:noFill/>
+          <a:ln w="0">
+            <a:noFill/>
+          </a:ln>
+        </p:spPr>
+      </p:pic>
+      <p:sp>
+        <p:nvSpPr>
+          <p:cNvPr id="303" name="Google Shape;316;p25"/>
           <p:cNvSpPr/>
           <p:nvPr/>
         </p:nvSpPr>
         <p:spPr>
           <a:xfrm>
-            <a:off x="581040" y="1219320"/>
-            <a:ext cx="11029680" cy="9000"/>
-          </a:xfrm>
-          <a:prstGeom prst="rect">
-            <a:avLst/>
-          </a:prstGeom>
-          <a:solidFill>
-            <a:srgbClr val="3D3422"/>
-          </a:solidFill>
+            <a:off x="1676520" y="4845960"/>
+            <a:ext cx="9934200" cy="222840"/>
+          </a:xfrm>
+          <a:prstGeom prst="rect">
+            <a:avLst/>
+          </a:prstGeom>
+          <a:noFill/>
           <a:ln w="0">
             <a:noFill/>
           </a:ln>
@@ -18371,6 +18613,203 @@
           <a:fontRef idx="minor"/>
         </p:style>
         <p:txBody>
+          <a:bodyPr lIns="0" tIns="0" rIns="0" bIns="0" anchor="t">
+            <a:spAutoFit/>
+          </a:bodyPr>
+          <a:p>
+            <a:pPr>
+              <a:lnSpc>
+                <a:spcPct val="149000"/>
+              </a:lnSpc>
+              <a:tabLst>
+                <a:tab pos="0" algn="l"/>
+              </a:tabLst>
+            </a:pPr>
+            <a:r>
+              <a:rPr lang="en-US" sz="980" b="0" u="none" strike="noStrike">
+                <a:solidFill>
+                  <a:srgbClr val="D1D1D1"/>
+                </a:solidFill>
+                <a:effectLst/>
+                <a:uFillTx/>
+                <a:latin typeface="Lato"/>
+                <a:ea typeface="Lato"/>
+              </a:rPr>
+              <a:t>https://cdn.mos.cms.futurecdn.net/GUwnMR2gDjdhWbTdzr9f5C-1200-80.jpg</a:t>
+            </a:r>
+            <a:endParaRPr lang="en-US" sz="980" b="0" u="none" strike="noStrike">
+              <a:solidFill>
+                <a:srgbClr val="FFFFFF"/>
+              </a:solidFill>
+              <a:effectLst/>
+              <a:uFillTx/>
+              <a:latin typeface="Arial"/>
+            </a:endParaRPr>
+          </a:p>
+        </p:txBody>
+      </p:sp>
+      <p:sp>
+        <p:nvSpPr>
+          <p:cNvPr id="304" name="Google Shape;317;p25"/>
+          <p:cNvSpPr/>
+          <p:nvPr/>
+        </p:nvSpPr>
+        <p:spPr>
+          <a:xfrm>
+            <a:off x="1676520" y="5079240"/>
+            <a:ext cx="9934200" cy="274680"/>
+          </a:xfrm>
+          <a:prstGeom prst="rect">
+            <a:avLst/>
+          </a:prstGeom>
+          <a:noFill/>
+          <a:ln w="0">
+            <a:noFill/>
+          </a:ln>
+        </p:spPr>
+        <p:style>
+          <a:lnRef idx="0"/>
+          <a:fillRef idx="0"/>
+          <a:effectRef idx="0"/>
+          <a:fontRef idx="minor"/>
+        </p:style>
+        <p:txBody>
+          <a:bodyPr lIns="0" tIns="0" rIns="0" bIns="0" anchor="t">
+            <a:spAutoFit/>
+          </a:bodyPr>
+          <a:p>
+            <a:pPr>
+              <a:lnSpc>
+                <a:spcPct val="150000"/>
+              </a:lnSpc>
+              <a:tabLst>
+                <a:tab pos="0" algn="l"/>
+              </a:tabLst>
+            </a:pPr>
+            <a:r>
+              <a:rPr lang="en-US" sz="1200" b="0" u="none" strike="noStrike">
+                <a:solidFill>
+                  <a:srgbClr val="D1D1D1"/>
+                </a:solidFill>
+                <a:effectLst/>
+                <a:uFillTx/>
+                <a:latin typeface="Lato"/>
+                <a:ea typeface="Lato"/>
+              </a:rPr>
+              <a:t>Source: </a:t>
+            </a:r>
+            <a:r>
+              <a:rPr lang="en-US" sz="1200" b="0" u="none" strike="noStrike">
+                <a:solidFill>
+                  <a:srgbClr val="4F46E5"/>
+                </a:solidFill>
+                <a:effectLst/>
+                <a:uFillTx/>
+                <a:latin typeface="Lato"/>
+                <a:ea typeface="Lato"/>
+              </a:rPr>
+              <a:t>www.windowscentral.com</a:t>
+            </a:r>
+            <a:endParaRPr lang="en-US" sz="1200" b="0" u="none" strike="noStrike">
+              <a:solidFill>
+                <a:srgbClr val="FFFFFF"/>
+              </a:solidFill>
+              <a:effectLst/>
+              <a:uFillTx/>
+              <a:latin typeface="Arial"/>
+            </a:endParaRPr>
+          </a:p>
+        </p:txBody>
+      </p:sp>
+      <p:sp>
+        <p:nvSpPr>
+          <p:cNvPr id="305" name="Google Shape;318;p25"/>
+          <p:cNvSpPr/>
+          <p:nvPr/>
+        </p:nvSpPr>
+        <p:spPr>
+          <a:xfrm>
+            <a:off x="581040" y="581040"/>
+            <a:ext cx="11581200" cy="480240"/>
+          </a:xfrm>
+          <a:prstGeom prst="rect">
+            <a:avLst/>
+          </a:prstGeom>
+          <a:noFill/>
+          <a:ln w="0">
+            <a:noFill/>
+          </a:ln>
+        </p:spPr>
+        <p:style>
+          <a:lnRef idx="0"/>
+          <a:fillRef idx="0"/>
+          <a:effectRef idx="0"/>
+          <a:fontRef idx="minor"/>
+        </p:style>
+        <p:txBody>
+          <a:bodyPr lIns="0" tIns="0" rIns="0" bIns="0" anchor="t">
+            <a:spAutoFit/>
+          </a:bodyPr>
+          <a:p>
+            <a:pPr>
+              <a:lnSpc>
+                <a:spcPct val="100000"/>
+              </a:lnSpc>
+              <a:tabLst>
+                <a:tab pos="0" algn="l"/>
+              </a:tabLst>
+            </a:pPr>
+            <a:r>
+              <a:rPr lang="en-US" sz="3150" b="1" u="none" strike="noStrike">
+                <a:solidFill>
+                  <a:srgbClr val="C5A059"/>
+                </a:solidFill>
+                <a:effectLst/>
+                <a:uFillTx/>
+                <a:latin typeface="Cinzel"/>
+                <a:ea typeface="Cinzel"/>
+              </a:rPr>
+              <a:t>SOURCES</a:t>
+            </a:r>
+            <a:endParaRPr lang="en-US" sz="3150" b="0" u="none" strike="noStrike">
+              <a:solidFill>
+                <a:srgbClr val="FFFFFF"/>
+              </a:solidFill>
+              <a:effectLst/>
+              <a:uFillTx/>
+              <a:latin typeface="Arial"/>
+            </a:endParaRPr>
+          </a:p>
+        </p:txBody>
+      </p:sp>
+      <p:sp>
+        <p:nvSpPr>
+          <p:cNvPr id="306" name="Google Shape;319;p25"/>
+          <p:cNvSpPr/>
+          <p:nvPr/>
+        </p:nvSpPr>
+        <p:spPr>
+          <a:xfrm>
+            <a:off x="581040" y="1219320"/>
+            <a:ext cx="11029680" cy="9000"/>
+          </a:xfrm>
+          <a:prstGeom prst="rect">
+            <a:avLst/>
+          </a:prstGeom>
+          <a:solidFill>
+            <a:srgbClr val="3D3422"/>
+          </a:solidFill>
+          <a:ln w="0">
+            <a:noFill/>
+          </a:ln>
+        </p:spPr>
+        <p:style>
+          <a:lnRef idx="0"/>
+          <a:fillRef idx="0"/>
+          <a:effectRef idx="0"/>
+          <a:fontRef idx="minor"/>
+        </p:style>
+        <p:txBody>
           <a:bodyPr tIns="-36360" bIns="-36360" anchor="ctr">
             <a:noAutofit/>
           </a:bodyPr>
@@ -18388,7 +18827,7 @@
       </p:sp>
       <p:sp>
         <p:nvSpPr>
-          <p:cNvPr id="303" name=""/>
+          <p:cNvPr id="307" name=""/>
           <p:cNvSpPr txBox="1"/>
           <p:nvPr/>
         </p:nvSpPr>
